--- a/docs/content/05-teaching-resources/slides/specialism/14-change-maintain-and-support.pptx
+++ b/docs/content/05-teaching-resources/slides/specialism/14-change-maintain-and-support.pptx
@@ -10,11 +10,17 @@
     <p:sldId id="258" r:id="rId9"/>
     <p:sldId id="259" r:id="rId10"/>
     <p:sldId id="260" r:id="rId11"/>
-    <p:sldId id="261" r:id="rId12"/>
-    <p:sldId id="262" r:id="rId13"/>
+    <p:sldId id="261" r:id="rId13"/>
+    <p:sldId id="262" r:id="rId14"/>
     <p:sldId id="263" r:id="rId15"/>
     <p:sldId id="264" r:id="rId16"/>
     <p:sldId id="265" r:id="rId17"/>
+    <p:sldId id="266" r:id="rId18"/>
+    <p:sldId id="267" r:id="rId19"/>
+    <p:sldId id="268" r:id="rId20"/>
+    <p:sldId id="269" r:id="rId21"/>
+    <p:sldId id="270" r:id="rId22"/>
+    <p:sldId id="271" r:id="rId23"/>
   </p:sldIdLst>
   <p:sldSz cx="12191695" cy="6858000" type="screen4x3"/>
   <p:notesSz cx="6858000" cy="9144000"/>
@@ -511,7 +517,22 @@
           <a:lstStyle/>
           <a:p>
             <a:r>
-              <a:t>Give students a few minutes to answer on mini whiteboards or paper, then reveal the answers on the next slide.</a:t>
+              <a:t>Answers:</a:t>
+            </a:r>
+          </a:p>
+          <a:p>
+            <a:r>
+              <a:t>1. Correcting.</a:t>
+            </a:r>
+          </a:p>
+          <a:p>
+            <a:r>
+              <a:t>2. Iterating.</a:t>
+            </a:r>
+          </a:p>
+          <a:p>
+            <a:r>
+              <a:t>3. E.g. updating for new regulations.</a:t>
             </a:r>
           </a:p>
         </p:txBody>
@@ -581,7 +602,22 @@
           <a:lstStyle/>
           <a:p>
             <a:r>
-              <a:t>Talk through any answers the class found difficult.</a:t>
+              <a:t>Answers:</a:t>
+            </a:r>
+          </a:p>
+          <a:p>
+            <a:r>
+              <a:t>1. To check nothing else broke.</a:t>
+            </a:r>
+          </a:p>
+          <a:p>
+            <a:r>
+              <a:t>2. Technical and non-technical audiences.</a:t>
+            </a:r>
+          </a:p>
+          <a:p>
+            <a:r>
+              <a:t>3. No, they still need documenting and testing.</a:t>
             </a:r>
           </a:p>
         </p:txBody>
@@ -607,6 +643,231 @@
 </file>
 
 <file path=ppt/notesSlides/notesSlide3.xml><?xml version="1.0" encoding="utf-8"?>
+<p:notes xmlns:a="http://schemas.openxmlformats.org/drawingml/2006/main" xmlns:p="http://schemas.openxmlformats.org/presentationml/2006/main" xmlns:r="http://schemas.openxmlformats.org/officeDocument/2006/relationships">
+  <p:cSld>
+    <p:spTree>
+      <p:nvGrpSpPr>
+        <p:cNvPr id="1" name=""/>
+        <p:cNvGrpSpPr/>
+        <p:nvPr/>
+      </p:nvGrpSpPr>
+      <p:grpSpPr>
+        <a:xfrm>
+          <a:off x="0" y="0"/>
+          <a:ext cx="0" cy="0"/>
+          <a:chOff x="0" y="0"/>
+          <a:chExt cx="0" cy="0"/>
+        </a:xfrm>
+      </p:grpSpPr>
+      <p:sp>
+        <p:nvSpPr>
+          <p:cNvPr id="2" name="Slide Image Placeholder 1"/>
+          <p:cNvSpPr>
+            <a:spLocks noGrp="1"/>
+          </p:cNvSpPr>
+          <p:nvPr>
+            <p:ph type="sldImg" idx="2"/>
+          </p:nvPr>
+        </p:nvSpPr>
+        <p:spPr/>
+      </p:sp>
+      <p:sp>
+        <p:nvSpPr>
+          <p:cNvPr id="3" name="Notes Placeholder 2"/>
+          <p:cNvSpPr>
+            <a:spLocks noGrp="1"/>
+          </p:cNvSpPr>
+          <p:nvPr>
+            <p:ph type="body" idx="3" sz="quarter"/>
+          </p:nvPr>
+        </p:nvSpPr>
+        <p:spPr/>
+        <p:txBody>
+          <a:bodyPr/>
+          <a:lstStyle/>
+          <a:p>
+            <a:r>
+              <a:t>Answers:</a:t>
+            </a:r>
+          </a:p>
+          <a:p>
+            <a:r>
+              <a:t>1. Identify or replicate it.</a:t>
+            </a:r>
+          </a:p>
+          <a:p>
+            <a:r>
+              <a:t>2. E.g. user error, system error, application error, security breach.</a:t>
+            </a:r>
+          </a:p>
+          <a:p>
+            <a:r>
+              <a:t>3. To prevent similar issues and help others.</a:t>
+            </a:r>
+          </a:p>
+        </p:txBody>
+      </p:sp>
+      <p:sp>
+        <p:nvSpPr>
+          <p:cNvPr id="4" name="Slide Number Placeholder 3"/>
+          <p:cNvSpPr>
+            <a:spLocks noGrp="1"/>
+          </p:cNvSpPr>
+          <p:nvPr>
+            <p:ph type="sldNum" idx="5" sz="quarter"/>
+          </p:nvPr>
+        </p:nvSpPr>
+        <p:spPr/>
+      </p:sp>
+    </p:spTree>
+  </p:cSld>
+  <p:clrMapOvr>
+    <a:masterClrMapping/>
+  </p:clrMapOvr>
+</p:notes>
+</file>
+
+<file path=ppt/notesSlides/notesSlide4.xml><?xml version="1.0" encoding="utf-8"?>
+<p:notes xmlns:a="http://schemas.openxmlformats.org/drawingml/2006/main" xmlns:p="http://schemas.openxmlformats.org/presentationml/2006/main" xmlns:r="http://schemas.openxmlformats.org/officeDocument/2006/relationships">
+  <p:cSld>
+    <p:spTree>
+      <p:nvGrpSpPr>
+        <p:cNvPr id="1" name=""/>
+        <p:cNvGrpSpPr/>
+        <p:nvPr/>
+      </p:nvGrpSpPr>
+      <p:grpSpPr>
+        <a:xfrm>
+          <a:off x="0" y="0"/>
+          <a:ext cx="0" cy="0"/>
+          <a:chOff x="0" y="0"/>
+          <a:chExt cx="0" cy="0"/>
+        </a:xfrm>
+      </p:grpSpPr>
+      <p:sp>
+        <p:nvSpPr>
+          <p:cNvPr id="2" name="Slide Image Placeholder 1"/>
+          <p:cNvSpPr>
+            <a:spLocks noGrp="1"/>
+          </p:cNvSpPr>
+          <p:nvPr>
+            <p:ph type="sldImg" idx="2"/>
+          </p:nvPr>
+        </p:nvSpPr>
+        <p:spPr/>
+      </p:sp>
+      <p:sp>
+        <p:nvSpPr>
+          <p:cNvPr id="3" name="Notes Placeholder 2"/>
+          <p:cNvSpPr>
+            <a:spLocks noGrp="1"/>
+          </p:cNvSpPr>
+          <p:nvPr>
+            <p:ph type="body" idx="3" sz="quarter"/>
+          </p:nvPr>
+        </p:nvSpPr>
+        <p:spPr/>
+        <p:txBody>
+          <a:bodyPr/>
+          <a:lstStyle/>
+          <a:p>
+            <a:r>
+              <a:t>Give students a few minutes to answer on mini whiteboards or paper, then reveal the answers on the next slide.</a:t>
+            </a:r>
+          </a:p>
+        </p:txBody>
+      </p:sp>
+      <p:sp>
+        <p:nvSpPr>
+          <p:cNvPr id="4" name="Slide Number Placeholder 3"/>
+          <p:cNvSpPr>
+            <a:spLocks noGrp="1"/>
+          </p:cNvSpPr>
+          <p:nvPr>
+            <p:ph type="sldNum" idx="5" sz="quarter"/>
+          </p:nvPr>
+        </p:nvSpPr>
+        <p:spPr/>
+      </p:sp>
+    </p:spTree>
+  </p:cSld>
+  <p:clrMapOvr>
+    <a:masterClrMapping/>
+  </p:clrMapOvr>
+</p:notes>
+</file>
+
+<file path=ppt/notesSlides/notesSlide5.xml><?xml version="1.0" encoding="utf-8"?>
+<p:notes xmlns:a="http://schemas.openxmlformats.org/drawingml/2006/main" xmlns:p="http://schemas.openxmlformats.org/presentationml/2006/main" xmlns:r="http://schemas.openxmlformats.org/officeDocument/2006/relationships">
+  <p:cSld>
+    <p:spTree>
+      <p:nvGrpSpPr>
+        <p:cNvPr id="1" name=""/>
+        <p:cNvGrpSpPr/>
+        <p:nvPr/>
+      </p:nvGrpSpPr>
+      <p:grpSpPr>
+        <a:xfrm>
+          <a:off x="0" y="0"/>
+          <a:ext cx="0" cy="0"/>
+          <a:chOff x="0" y="0"/>
+          <a:chExt cx="0" cy="0"/>
+        </a:xfrm>
+      </p:grpSpPr>
+      <p:sp>
+        <p:nvSpPr>
+          <p:cNvPr id="2" name="Slide Image Placeholder 1"/>
+          <p:cNvSpPr>
+            <a:spLocks noGrp="1"/>
+          </p:cNvSpPr>
+          <p:nvPr>
+            <p:ph type="sldImg" idx="2"/>
+          </p:nvPr>
+        </p:nvSpPr>
+        <p:spPr/>
+      </p:sp>
+      <p:sp>
+        <p:nvSpPr>
+          <p:cNvPr id="3" name="Notes Placeholder 2"/>
+          <p:cNvSpPr>
+            <a:spLocks noGrp="1"/>
+          </p:cNvSpPr>
+          <p:nvPr>
+            <p:ph type="body" idx="3" sz="quarter"/>
+          </p:nvPr>
+        </p:nvSpPr>
+        <p:spPr/>
+        <p:txBody>
+          <a:bodyPr/>
+          <a:lstStyle/>
+          <a:p>
+            <a:r>
+              <a:t>Talk through any answers the class found difficult.</a:t>
+            </a:r>
+          </a:p>
+        </p:txBody>
+      </p:sp>
+      <p:sp>
+        <p:nvSpPr>
+          <p:cNvPr id="4" name="Slide Number Placeholder 3"/>
+          <p:cNvSpPr>
+            <a:spLocks noGrp="1"/>
+          </p:cNvSpPr>
+          <p:nvPr>
+            <p:ph type="sldNum" idx="5" sz="quarter"/>
+          </p:nvPr>
+        </p:nvSpPr>
+        <p:spPr/>
+      </p:sp>
+    </p:spTree>
+  </p:cSld>
+  <p:clrMapOvr>
+    <a:masterClrMapping/>
+  </p:clrMapOvr>
+</p:notes>
+</file>
+
+<file path=ppt/notesSlides/notesSlide6.xml><?xml version="1.0" encoding="utf-8"?>
 <p:notes xmlns:a="http://schemas.openxmlformats.org/drawingml/2006/main" xmlns:p="http://schemas.openxmlformats.org/presentationml/2006/main" xmlns:r="http://schemas.openxmlformats.org/officeDocument/2006/relationships">
   <p:cSld>
     <p:spTree>
@@ -3982,6 +4243,3685 @@
     <p:bg>
       <p:bgPr>
         <a:solidFill>
+          <a:srgbClr val="FFFFFF"/>
+        </a:solidFill>
+        <a:effectLst/>
+      </p:bgPr>
+    </p:bg>
+    <p:spTree>
+      <p:nvGrpSpPr>
+        <p:cNvPr id="1" name=""/>
+        <p:cNvGrpSpPr/>
+        <p:nvPr/>
+      </p:nvGrpSpPr>
+      <p:grpSpPr/>
+      <p:sp>
+        <p:nvSpPr>
+          <p:cNvPr id="2" name="TextBox 1"/>
+          <p:cNvSpPr txBox="1"/>
+          <p:nvPr/>
+        </p:nvSpPr>
+        <p:spPr>
+          <a:xfrm>
+            <a:off x="548640" y="320040"/>
+            <a:ext cx="11094415" cy="274320"/>
+          </a:xfrm>
+          <a:prstGeom prst="rect">
+            <a:avLst/>
+          </a:prstGeom>
+          <a:noFill/>
+        </p:spPr>
+        <p:txBody>
+          <a:bodyPr wrap="square" anchor="t" lIns="0" rIns="0" tIns="0" bIns="0"/>
+          <a:lstStyle/>
+          <a:p>
+            <a:pPr algn="l"/>
+            <a:r>
+              <a:rPr sz="1100" b="1" i="0">
+                <a:solidFill>
+                  <a:srgbClr val="54595D"/>
+                </a:solidFill>
+                <a:latin typeface="Calibri"/>
+              </a:rPr>
+              <a:t>OCCUPATIONAL SPECIALISM  ·  Specialism Content Area 8</a:t>
+            </a:r>
+          </a:p>
+        </p:txBody>
+      </p:sp>
+      <p:sp>
+        <p:nvSpPr>
+          <p:cNvPr id="3" name="TextBox 2"/>
+          <p:cNvSpPr txBox="1"/>
+          <p:nvPr/>
+        </p:nvSpPr>
+        <p:spPr>
+          <a:xfrm>
+            <a:off x="548640" y="566928"/>
+            <a:ext cx="11094415" cy="822960"/>
+          </a:xfrm>
+          <a:prstGeom prst="rect">
+            <a:avLst/>
+          </a:prstGeom>
+          <a:noFill/>
+        </p:spPr>
+        <p:txBody>
+          <a:bodyPr wrap="square" anchor="ctr" lIns="0" rIns="0" tIns="0" bIns="0"/>
+          <a:lstStyle/>
+          <a:p>
+            <a:pPr algn="l"/>
+            <a:r>
+              <a:rPr sz="3200" b="1" i="0">
+                <a:solidFill>
+                  <a:srgbClr val="03306E"/>
+                </a:solidFill>
+                <a:latin typeface="Cambria"/>
+              </a:rPr>
+              <a:t>Resolving user issues</a:t>
+            </a:r>
+          </a:p>
+        </p:txBody>
+      </p:sp>
+      <p:sp>
+        <p:nvSpPr>
+          <p:cNvPr id="4" name="TextBox 3"/>
+          <p:cNvSpPr txBox="1"/>
+          <p:nvPr/>
+        </p:nvSpPr>
+        <p:spPr>
+          <a:xfrm>
+            <a:off x="548640" y="6446520"/>
+            <a:ext cx="8229600" cy="274320"/>
+          </a:xfrm>
+          <a:prstGeom prst="rect">
+            <a:avLst/>
+          </a:prstGeom>
+          <a:noFill/>
+        </p:spPr>
+        <p:txBody>
+          <a:bodyPr wrap="square" anchor="t" lIns="0" rIns="0" tIns="0" bIns="0"/>
+          <a:lstStyle/>
+          <a:p>
+            <a:pPr algn="l"/>
+            <a:r>
+              <a:rPr sz="1000" b="0" i="0">
+                <a:solidFill>
+                  <a:srgbClr val="54595D"/>
+                </a:solidFill>
+                <a:latin typeface="Calibri"/>
+              </a:rPr>
+              <a:t>Digital Software Development T Level  ·  Change, Maintain and Support Software</a:t>
+            </a:r>
+          </a:p>
+        </p:txBody>
+      </p:sp>
+      <p:sp>
+        <p:nvSpPr>
+          <p:cNvPr id="5" name="TextBox 4"/>
+          <p:cNvSpPr txBox="1"/>
+          <p:nvPr/>
+        </p:nvSpPr>
+        <p:spPr>
+          <a:xfrm>
+            <a:off x="10728655" y="6446520"/>
+            <a:ext cx="914400" cy="274320"/>
+          </a:xfrm>
+          <a:prstGeom prst="rect">
+            <a:avLst/>
+          </a:prstGeom>
+          <a:noFill/>
+        </p:spPr>
+        <p:txBody>
+          <a:bodyPr wrap="square" anchor="t" lIns="0" rIns="0" tIns="0" bIns="0"/>
+          <a:lstStyle/>
+          <a:p>
+            <a:pPr algn="r"/>
+            <a:r>
+              <a:rPr sz="1000" b="0" i="0">
+                <a:solidFill>
+                  <a:srgbClr val="54595D"/>
+                </a:solidFill>
+                <a:latin typeface="Calibri"/>
+              </a:rPr>
+              <a:t>10</a:t>
+            </a:r>
+          </a:p>
+        </p:txBody>
+      </p:sp>
+      <p:sp>
+        <p:nvSpPr>
+          <p:cNvPr id="6" name="TextBox 5"/>
+          <p:cNvSpPr txBox="1"/>
+          <p:nvPr/>
+        </p:nvSpPr>
+        <p:spPr>
+          <a:xfrm>
+            <a:off x="548640" y="1554480"/>
+            <a:ext cx="6720840" cy="4617720"/>
+          </a:xfrm>
+          <a:prstGeom prst="rect">
+            <a:avLst/>
+          </a:prstGeom>
+          <a:noFill/>
+        </p:spPr>
+        <p:txBody>
+          <a:bodyPr wrap="square" lIns="0" rIns="0" tIns="0" bIns="0">
+            <a:spAutoFit/>
+          </a:bodyPr>
+          <a:lstStyle/>
+          <a:p>
+            <a:pPr>
+              <a:spcAft>
+                <a:spcPts val="1260"/>
+              </a:spcAft>
+            </a:pPr>
+            <a:r>
+              <a:rPr sz="2100" b="0">
+                <a:solidFill>
+                  <a:srgbClr val="202122"/>
+                </a:solidFill>
+                <a:latin typeface="Calibri"/>
+              </a:rPr>
+              <a:t>When users report problems, follow a systematic process.</a:t>
+            </a:r>
+          </a:p>
+          <a:p>
+            <a:pPr>
+              <a:spcAft>
+                <a:spcPts val="1260"/>
+              </a:spcAft>
+            </a:pPr>
+            <a:r>
+              <a:rPr sz="2100" b="0">
+                <a:solidFill>
+                  <a:srgbClr val="202122"/>
+                </a:solidFill>
+                <a:latin typeface="Calibri"/>
+              </a:rPr>
+              <a:t>Identify or replicate the issue, so you can see it happen. Investigate the possible cause: user error, system error, application error or a security breach. Apply testing to find the error, make the change, confirm the error doesn't return and that no new issues appeared. Communicate how and when it was resolved to the right people. Document the lessons learned.</a:t>
+            </a:r>
+          </a:p>
+          <a:p>
+            <a:pPr>
+              <a:spcAft>
+                <a:spcPts val="1260"/>
+              </a:spcAft>
+            </a:pPr>
+            <a:r>
+              <a:rPr sz="2100" b="0">
+                <a:solidFill>
+                  <a:srgbClr val="202122"/>
+                </a:solidFill>
+                <a:latin typeface="Calibri"/>
+              </a:rPr>
+              <a:t>Communicate in the right tone for the audience: release notes and FAQs for users, technical notes for developers.</a:t>
+            </a:r>
+          </a:p>
+        </p:txBody>
+      </p:sp>
+      <p:sp>
+        <p:nvSpPr>
+          <p:cNvPr id="7" name="Rounded Rectangle 6"/>
+          <p:cNvSpPr/>
+          <p:nvPr/>
+        </p:nvSpPr>
+        <p:spPr>
+          <a:xfrm>
+            <a:off x="7772400" y="1554480"/>
+            <a:ext cx="3867912" cy="4526280"/>
+          </a:xfrm>
+          <a:prstGeom prst="roundRect">
+            <a:avLst>
+              <a:gd name="adj" fmla="val 8000"/>
+            </a:avLst>
+          </a:prstGeom>
+          <a:solidFill>
+            <a:srgbClr val="03306E"/>
+          </a:solidFill>
+          <a:ln>
+            <a:noFill/>
+          </a:ln>
+          <a:effectLst/>
+        </p:spPr>
+        <p:style>
+          <a:lnRef idx="1">
+            <a:schemeClr val="accent1"/>
+          </a:lnRef>
+          <a:fillRef idx="3">
+            <a:schemeClr val="accent1"/>
+          </a:fillRef>
+          <a:effectRef idx="2">
+            <a:schemeClr val="accent1"/>
+          </a:effectRef>
+          <a:fontRef idx="minor">
+            <a:schemeClr val="lt1"/>
+          </a:fontRef>
+        </p:style>
+        <p:txBody>
+          <a:bodyPr rtlCol="0" anchor="ctr"/>
+          <a:lstStyle/>
+          <a:p/>
+        </p:txBody>
+      </p:sp>
+      <p:sp>
+        <p:nvSpPr>
+          <p:cNvPr id="8" name="Oval 7"/>
+          <p:cNvSpPr/>
+          <p:nvPr/>
+        </p:nvSpPr>
+        <p:spPr>
+          <a:xfrm>
+            <a:off x="8046720" y="1828800"/>
+            <a:ext cx="548640" cy="548640"/>
+          </a:xfrm>
+          <a:prstGeom prst="ellipse">
+            <a:avLst/>
+          </a:prstGeom>
+          <a:solidFill>
+            <a:srgbClr val="33C17A"/>
+          </a:solidFill>
+          <a:ln>
+            <a:noFill/>
+          </a:ln>
+          <a:effectLst/>
+        </p:spPr>
+        <p:style>
+          <a:lnRef idx="1">
+            <a:schemeClr val="accent1"/>
+          </a:lnRef>
+          <a:fillRef idx="3">
+            <a:schemeClr val="accent1"/>
+          </a:fillRef>
+          <a:effectRef idx="2">
+            <a:schemeClr val="accent1"/>
+          </a:effectRef>
+          <a:fontRef idx="minor">
+            <a:schemeClr val="lt1"/>
+          </a:fontRef>
+        </p:style>
+        <p:txBody>
+          <a:bodyPr rtlCol="0" anchor="ctr" lIns="0" rIns="0" tIns="0" bIns="0"/>
+          <a:lstStyle/>
+          <a:p>
+            <a:pPr algn="ctr"/>
+            <a:r>
+              <a:rPr sz="1300" b="1">
+                <a:solidFill>
+                  <a:srgbClr val="202122"/>
+                </a:solidFill>
+                <a:latin typeface="Calibri"/>
+              </a:rPr>
+              <a:t>e.g.</a:t>
+            </a:r>
+          </a:p>
+        </p:txBody>
+      </p:sp>
+      <p:sp>
+        <p:nvSpPr>
+          <p:cNvPr id="9" name="TextBox 8"/>
+          <p:cNvSpPr txBox="1"/>
+          <p:nvPr/>
+        </p:nvSpPr>
+        <p:spPr>
+          <a:xfrm>
+            <a:off x="8046720" y="2560320"/>
+            <a:ext cx="3291840" cy="365760"/>
+          </a:xfrm>
+          <a:prstGeom prst="rect">
+            <a:avLst/>
+          </a:prstGeom>
+          <a:noFill/>
+        </p:spPr>
+        <p:txBody>
+          <a:bodyPr wrap="square" anchor="t" lIns="0" rIns="0" tIns="0" bIns="0"/>
+          <a:lstStyle/>
+          <a:p>
+            <a:pPr algn="l"/>
+            <a:r>
+              <a:rPr sz="1300" b="1" i="0">
+                <a:solidFill>
+                  <a:srgbClr val="A9C8F0"/>
+                </a:solidFill>
+                <a:latin typeface="Calibri"/>
+              </a:rPr>
+              <a:t>EXAMPLE</a:t>
+            </a:r>
+          </a:p>
+        </p:txBody>
+      </p:sp>
+      <p:sp>
+        <p:nvSpPr>
+          <p:cNvPr id="10" name="TextBox 9"/>
+          <p:cNvSpPr txBox="1"/>
+          <p:nvPr/>
+        </p:nvSpPr>
+        <p:spPr>
+          <a:xfrm>
+            <a:off x="8046720" y="2971800"/>
+            <a:ext cx="3291840" cy="2971800"/>
+          </a:xfrm>
+          <a:prstGeom prst="rect">
+            <a:avLst/>
+          </a:prstGeom>
+          <a:noFill/>
+        </p:spPr>
+        <p:txBody>
+          <a:bodyPr wrap="square" anchor="t" lIns="0" rIns="0" tIns="0" bIns="0"/>
+          <a:lstStyle/>
+          <a:p>
+            <a:pPr algn="l"/>
+            <a:r>
+              <a:rPr sz="1900" b="0" i="0">
+                <a:solidFill>
+                  <a:srgbClr val="FFFFFF"/>
+                </a:solidFill>
+                <a:latin typeface="Cambria"/>
+              </a:rPr>
+              <a:t>A user says the app crashes on photo upload. The developer replicates it with a large photo, finds no size check, adds one, retests and updates the FAQ.</a:t>
+            </a:r>
+          </a:p>
+        </p:txBody>
+      </p:sp>
+    </p:spTree>
+  </p:cSld>
+  <p:clrMapOvr>
+    <a:masterClrMapping/>
+  </p:clrMapOvr>
+</p:sld>
+</file>
+
+<file path=ppt/slides/slide11.xml><?xml version="1.0" encoding="utf-8"?>
+<p:sld xmlns:a="http://schemas.openxmlformats.org/drawingml/2006/main" xmlns:p="http://schemas.openxmlformats.org/presentationml/2006/main" xmlns:r="http://schemas.openxmlformats.org/officeDocument/2006/relationships">
+  <p:cSld>
+    <p:bg>
+      <p:bgPr>
+        <a:solidFill>
+          <a:srgbClr val="FFFFFF"/>
+        </a:solidFill>
+        <a:effectLst/>
+      </p:bgPr>
+    </p:bg>
+    <p:spTree>
+      <p:nvGrpSpPr>
+        <p:cNvPr id="1" name=""/>
+        <p:cNvGrpSpPr/>
+        <p:nvPr/>
+      </p:nvGrpSpPr>
+      <p:grpSpPr/>
+      <p:sp>
+        <p:nvSpPr>
+          <p:cNvPr id="2" name="TextBox 1"/>
+          <p:cNvSpPr txBox="1"/>
+          <p:nvPr/>
+        </p:nvSpPr>
+        <p:spPr>
+          <a:xfrm>
+            <a:off x="548640" y="320040"/>
+            <a:ext cx="11094415" cy="274320"/>
+          </a:xfrm>
+          <a:prstGeom prst="rect">
+            <a:avLst/>
+          </a:prstGeom>
+          <a:noFill/>
+        </p:spPr>
+        <p:txBody>
+          <a:bodyPr wrap="square" anchor="t" lIns="0" rIns="0" tIns="0" bIns="0"/>
+          <a:lstStyle/>
+          <a:p>
+            <a:pPr algn="l"/>
+            <a:r>
+              <a:rPr sz="1100" b="1" i="0">
+                <a:solidFill>
+                  <a:srgbClr val="54595D"/>
+                </a:solidFill>
+                <a:latin typeface="Calibri"/>
+              </a:rPr>
+              <a:t>OCCUPATIONAL SPECIALISM  ·  Specialism Content Area 8</a:t>
+            </a:r>
+          </a:p>
+        </p:txBody>
+      </p:sp>
+      <p:sp>
+        <p:nvSpPr>
+          <p:cNvPr id="3" name="TextBox 2"/>
+          <p:cNvSpPr txBox="1"/>
+          <p:nvPr/>
+        </p:nvSpPr>
+        <p:spPr>
+          <a:xfrm>
+            <a:off x="548640" y="566928"/>
+            <a:ext cx="11094415" cy="822960"/>
+          </a:xfrm>
+          <a:prstGeom prst="rect">
+            <a:avLst/>
+          </a:prstGeom>
+          <a:noFill/>
+        </p:spPr>
+        <p:txBody>
+          <a:bodyPr wrap="square" anchor="ctr" lIns="0" rIns="0" tIns="0" bIns="0"/>
+          <a:lstStyle/>
+          <a:p>
+            <a:pPr algn="l"/>
+            <a:r>
+              <a:rPr sz="3200" b="1" i="0">
+                <a:solidFill>
+                  <a:srgbClr val="03306E"/>
+                </a:solidFill>
+                <a:latin typeface="Cambria"/>
+              </a:rPr>
+              <a:t>Resolving user issues</a:t>
+            </a:r>
+          </a:p>
+        </p:txBody>
+      </p:sp>
+      <p:sp>
+        <p:nvSpPr>
+          <p:cNvPr id="4" name="TextBox 3"/>
+          <p:cNvSpPr txBox="1"/>
+          <p:nvPr/>
+        </p:nvSpPr>
+        <p:spPr>
+          <a:xfrm>
+            <a:off x="548640" y="6446520"/>
+            <a:ext cx="8229600" cy="274320"/>
+          </a:xfrm>
+          <a:prstGeom prst="rect">
+            <a:avLst/>
+          </a:prstGeom>
+          <a:noFill/>
+        </p:spPr>
+        <p:txBody>
+          <a:bodyPr wrap="square" anchor="t" lIns="0" rIns="0" tIns="0" bIns="0"/>
+          <a:lstStyle/>
+          <a:p>
+            <a:pPr algn="l"/>
+            <a:r>
+              <a:rPr sz="1000" b="0" i="0">
+                <a:solidFill>
+                  <a:srgbClr val="54595D"/>
+                </a:solidFill>
+                <a:latin typeface="Calibri"/>
+              </a:rPr>
+              <a:t>Digital Software Development T Level  ·  Change, Maintain and Support Software</a:t>
+            </a:r>
+          </a:p>
+        </p:txBody>
+      </p:sp>
+      <p:sp>
+        <p:nvSpPr>
+          <p:cNvPr id="5" name="TextBox 4"/>
+          <p:cNvSpPr txBox="1"/>
+          <p:nvPr/>
+        </p:nvSpPr>
+        <p:spPr>
+          <a:xfrm>
+            <a:off x="10728655" y="6446520"/>
+            <a:ext cx="914400" cy="274320"/>
+          </a:xfrm>
+          <a:prstGeom prst="rect">
+            <a:avLst/>
+          </a:prstGeom>
+          <a:noFill/>
+        </p:spPr>
+        <p:txBody>
+          <a:bodyPr wrap="square" anchor="t" lIns="0" rIns="0" tIns="0" bIns="0"/>
+          <a:lstStyle/>
+          <a:p>
+            <a:pPr algn="r"/>
+            <a:r>
+              <a:rPr sz="1000" b="0" i="0">
+                <a:solidFill>
+                  <a:srgbClr val="54595D"/>
+                </a:solidFill>
+                <a:latin typeface="Calibri"/>
+              </a:rPr>
+              <a:t>11</a:t>
+            </a:r>
+          </a:p>
+        </p:txBody>
+      </p:sp>
+      <p:sp>
+        <p:nvSpPr>
+          <p:cNvPr id="6" name="Rectangle 5"/>
+          <p:cNvSpPr/>
+          <p:nvPr/>
+        </p:nvSpPr>
+        <p:spPr>
+          <a:xfrm>
+            <a:off x="1603217" y="2656332"/>
+            <a:ext cx="8985260" cy="36576"/>
+          </a:xfrm>
+          <a:prstGeom prst="rect">
+            <a:avLst/>
+          </a:prstGeom>
+          <a:solidFill>
+            <a:srgbClr val="A9C8F0"/>
+          </a:solidFill>
+          <a:ln>
+            <a:noFill/>
+          </a:ln>
+          <a:effectLst/>
+        </p:spPr>
+        <p:style>
+          <a:lnRef idx="1">
+            <a:schemeClr val="accent1"/>
+          </a:lnRef>
+          <a:fillRef idx="3">
+            <a:schemeClr val="accent1"/>
+          </a:fillRef>
+          <a:effectRef idx="2">
+            <a:schemeClr val="accent1"/>
+          </a:effectRef>
+          <a:fontRef idx="minor">
+            <a:schemeClr val="lt1"/>
+          </a:fontRef>
+        </p:style>
+        <p:txBody>
+          <a:bodyPr rtlCol="0" anchor="ctr"/>
+          <a:lstStyle/>
+          <a:p/>
+        </p:txBody>
+      </p:sp>
+      <p:sp>
+        <p:nvSpPr>
+          <p:cNvPr id="7" name="Oval 6"/>
+          <p:cNvSpPr/>
+          <p:nvPr/>
+        </p:nvSpPr>
+        <p:spPr>
+          <a:xfrm>
+            <a:off x="1283177" y="2354580"/>
+            <a:ext cx="640080" cy="640080"/>
+          </a:xfrm>
+          <a:prstGeom prst="ellipse">
+            <a:avLst/>
+          </a:prstGeom>
+          <a:solidFill>
+            <a:srgbClr val="33C17A"/>
+          </a:solidFill>
+          <a:ln>
+            <a:noFill/>
+          </a:ln>
+          <a:effectLst/>
+        </p:spPr>
+        <p:style>
+          <a:lnRef idx="1">
+            <a:schemeClr val="accent1"/>
+          </a:lnRef>
+          <a:fillRef idx="3">
+            <a:schemeClr val="accent1"/>
+          </a:fillRef>
+          <a:effectRef idx="2">
+            <a:schemeClr val="accent1"/>
+          </a:effectRef>
+          <a:fontRef idx="minor">
+            <a:schemeClr val="lt1"/>
+          </a:fontRef>
+        </p:style>
+        <p:txBody>
+          <a:bodyPr rtlCol="0" anchor="ctr" lIns="0" rIns="0" tIns="0" bIns="0"/>
+          <a:lstStyle/>
+          <a:p>
+            <a:pPr algn="ctr"/>
+            <a:r>
+              <a:rPr sz="2000" b="1">
+                <a:solidFill>
+                  <a:srgbClr val="202122"/>
+                </a:solidFill>
+                <a:latin typeface="Calibri"/>
+              </a:rPr>
+              <a:t>1</a:t>
+            </a:r>
+          </a:p>
+        </p:txBody>
+      </p:sp>
+      <p:sp>
+        <p:nvSpPr>
+          <p:cNvPr id="8" name="TextBox 7"/>
+          <p:cNvSpPr txBox="1"/>
+          <p:nvPr/>
+        </p:nvSpPr>
+        <p:spPr>
+          <a:xfrm>
+            <a:off x="548640" y="3131820"/>
+            <a:ext cx="2109155" cy="731520"/>
+          </a:xfrm>
+          <a:prstGeom prst="rect">
+            <a:avLst/>
+          </a:prstGeom>
+          <a:noFill/>
+        </p:spPr>
+        <p:txBody>
+          <a:bodyPr wrap="square" anchor="t" lIns="0" rIns="0" tIns="0" bIns="0"/>
+          <a:lstStyle/>
+          <a:p>
+            <a:pPr algn="ctr"/>
+            <a:r>
+              <a:rPr sz="1700" b="1" i="0">
+                <a:solidFill>
+                  <a:srgbClr val="03306E"/>
+                </a:solidFill>
+                <a:latin typeface="Calibri"/>
+              </a:rPr>
+              <a:t>Replicate</a:t>
+            </a:r>
+          </a:p>
+        </p:txBody>
+      </p:sp>
+      <p:sp>
+        <p:nvSpPr>
+          <p:cNvPr id="9" name="Rounded Rectangle 8"/>
+          <p:cNvSpPr/>
+          <p:nvPr/>
+        </p:nvSpPr>
+        <p:spPr>
+          <a:xfrm>
+            <a:off x="548640" y="3909060"/>
+            <a:ext cx="2109155" cy="1508760"/>
+          </a:xfrm>
+          <a:prstGeom prst="roundRect">
+            <a:avLst>
+              <a:gd name="adj" fmla="val 6000"/>
+            </a:avLst>
+          </a:prstGeom>
+          <a:solidFill>
+            <a:srgbClr val="EAF3FF"/>
+          </a:solidFill>
+          <a:ln>
+            <a:noFill/>
+          </a:ln>
+          <a:effectLst/>
+        </p:spPr>
+        <p:style>
+          <a:lnRef idx="1">
+            <a:schemeClr val="accent1"/>
+          </a:lnRef>
+          <a:fillRef idx="3">
+            <a:schemeClr val="accent1"/>
+          </a:fillRef>
+          <a:effectRef idx="2">
+            <a:schemeClr val="accent1"/>
+          </a:effectRef>
+          <a:fontRef idx="minor">
+            <a:schemeClr val="lt1"/>
+          </a:fontRef>
+        </p:style>
+        <p:txBody>
+          <a:bodyPr rtlCol="0" anchor="ctr"/>
+          <a:lstStyle/>
+          <a:p/>
+        </p:txBody>
+      </p:sp>
+      <p:sp>
+        <p:nvSpPr>
+          <p:cNvPr id="10" name="TextBox 9"/>
+          <p:cNvSpPr txBox="1"/>
+          <p:nvPr/>
+        </p:nvSpPr>
+        <p:spPr>
+          <a:xfrm>
+            <a:off x="685800" y="4046220"/>
+            <a:ext cx="1834835" cy="1234439"/>
+          </a:xfrm>
+          <a:prstGeom prst="rect">
+            <a:avLst/>
+          </a:prstGeom>
+          <a:noFill/>
+        </p:spPr>
+        <p:txBody>
+          <a:bodyPr wrap="square" anchor="t" lIns="0" rIns="0" tIns="0" bIns="0"/>
+          <a:lstStyle/>
+          <a:p>
+            <a:pPr algn="l"/>
+            <a:r>
+              <a:rPr sz="1800" b="0" i="0">
+                <a:solidFill>
+                  <a:srgbClr val="202122"/>
+                </a:solidFill>
+                <a:latin typeface="Calibri"/>
+              </a:rPr>
+              <a:t>Identify or reproduce the issue.</a:t>
+            </a:r>
+          </a:p>
+        </p:txBody>
+      </p:sp>
+      <p:sp>
+        <p:nvSpPr>
+          <p:cNvPr id="11" name="Oval 10"/>
+          <p:cNvSpPr/>
+          <p:nvPr/>
+        </p:nvSpPr>
+        <p:spPr>
+          <a:xfrm>
+            <a:off x="3529492" y="2354580"/>
+            <a:ext cx="640080" cy="640080"/>
+          </a:xfrm>
+          <a:prstGeom prst="ellipse">
+            <a:avLst/>
+          </a:prstGeom>
+          <a:solidFill>
+            <a:srgbClr val="33C17A"/>
+          </a:solidFill>
+          <a:ln>
+            <a:noFill/>
+          </a:ln>
+          <a:effectLst/>
+        </p:spPr>
+        <p:style>
+          <a:lnRef idx="1">
+            <a:schemeClr val="accent1"/>
+          </a:lnRef>
+          <a:fillRef idx="3">
+            <a:schemeClr val="accent1"/>
+          </a:fillRef>
+          <a:effectRef idx="2">
+            <a:schemeClr val="accent1"/>
+          </a:effectRef>
+          <a:fontRef idx="minor">
+            <a:schemeClr val="lt1"/>
+          </a:fontRef>
+        </p:style>
+        <p:txBody>
+          <a:bodyPr rtlCol="0" anchor="ctr" lIns="0" rIns="0" tIns="0" bIns="0"/>
+          <a:lstStyle/>
+          <a:p>
+            <a:pPr algn="ctr"/>
+            <a:r>
+              <a:rPr sz="2000" b="1">
+                <a:solidFill>
+                  <a:srgbClr val="202122"/>
+                </a:solidFill>
+                <a:latin typeface="Calibri"/>
+              </a:rPr>
+              <a:t>2</a:t>
+            </a:r>
+          </a:p>
+        </p:txBody>
+      </p:sp>
+      <p:sp>
+        <p:nvSpPr>
+          <p:cNvPr id="12" name="TextBox 11"/>
+          <p:cNvSpPr txBox="1"/>
+          <p:nvPr/>
+        </p:nvSpPr>
+        <p:spPr>
+          <a:xfrm>
+            <a:off x="2794955" y="3131820"/>
+            <a:ext cx="2109155" cy="731520"/>
+          </a:xfrm>
+          <a:prstGeom prst="rect">
+            <a:avLst/>
+          </a:prstGeom>
+          <a:noFill/>
+        </p:spPr>
+        <p:txBody>
+          <a:bodyPr wrap="square" anchor="t" lIns="0" rIns="0" tIns="0" bIns="0"/>
+          <a:lstStyle/>
+          <a:p>
+            <a:pPr algn="ctr"/>
+            <a:r>
+              <a:rPr sz="1700" b="1" i="0">
+                <a:solidFill>
+                  <a:srgbClr val="03306E"/>
+                </a:solidFill>
+                <a:latin typeface="Calibri"/>
+              </a:rPr>
+              <a:t>Investigate</a:t>
+            </a:r>
+          </a:p>
+        </p:txBody>
+      </p:sp>
+      <p:sp>
+        <p:nvSpPr>
+          <p:cNvPr id="13" name="Rounded Rectangle 12"/>
+          <p:cNvSpPr/>
+          <p:nvPr/>
+        </p:nvSpPr>
+        <p:spPr>
+          <a:xfrm>
+            <a:off x="2794955" y="3909060"/>
+            <a:ext cx="2109155" cy="1508760"/>
+          </a:xfrm>
+          <a:prstGeom prst="roundRect">
+            <a:avLst>
+              <a:gd name="adj" fmla="val 6000"/>
+            </a:avLst>
+          </a:prstGeom>
+          <a:solidFill>
+            <a:srgbClr val="EAF3FF"/>
+          </a:solidFill>
+          <a:ln>
+            <a:noFill/>
+          </a:ln>
+          <a:effectLst/>
+        </p:spPr>
+        <p:style>
+          <a:lnRef idx="1">
+            <a:schemeClr val="accent1"/>
+          </a:lnRef>
+          <a:fillRef idx="3">
+            <a:schemeClr val="accent1"/>
+          </a:fillRef>
+          <a:effectRef idx="2">
+            <a:schemeClr val="accent1"/>
+          </a:effectRef>
+          <a:fontRef idx="minor">
+            <a:schemeClr val="lt1"/>
+          </a:fontRef>
+        </p:style>
+        <p:txBody>
+          <a:bodyPr rtlCol="0" anchor="ctr"/>
+          <a:lstStyle/>
+          <a:p/>
+        </p:txBody>
+      </p:sp>
+      <p:sp>
+        <p:nvSpPr>
+          <p:cNvPr id="14" name="TextBox 13"/>
+          <p:cNvSpPr txBox="1"/>
+          <p:nvPr/>
+        </p:nvSpPr>
+        <p:spPr>
+          <a:xfrm>
+            <a:off x="2932115" y="4046220"/>
+            <a:ext cx="1834835" cy="1234439"/>
+          </a:xfrm>
+          <a:prstGeom prst="rect">
+            <a:avLst/>
+          </a:prstGeom>
+          <a:noFill/>
+        </p:spPr>
+        <p:txBody>
+          <a:bodyPr wrap="square" anchor="t" lIns="0" rIns="0" tIns="0" bIns="0"/>
+          <a:lstStyle/>
+          <a:p>
+            <a:pPr algn="l"/>
+            <a:r>
+              <a:rPr sz="1800" b="0" i="0">
+                <a:solidFill>
+                  <a:srgbClr val="202122"/>
+                </a:solidFill>
+                <a:latin typeface="Calibri"/>
+              </a:rPr>
+              <a:t>User, system or application error, or a breach?</a:t>
+            </a:r>
+          </a:p>
+        </p:txBody>
+      </p:sp>
+      <p:sp>
+        <p:nvSpPr>
+          <p:cNvPr id="15" name="Oval 14"/>
+          <p:cNvSpPr/>
+          <p:nvPr/>
+        </p:nvSpPr>
+        <p:spPr>
+          <a:xfrm>
+            <a:off x="5775807" y="2354580"/>
+            <a:ext cx="640080" cy="640080"/>
+          </a:xfrm>
+          <a:prstGeom prst="ellipse">
+            <a:avLst/>
+          </a:prstGeom>
+          <a:solidFill>
+            <a:srgbClr val="33C17A"/>
+          </a:solidFill>
+          <a:ln>
+            <a:noFill/>
+          </a:ln>
+          <a:effectLst/>
+        </p:spPr>
+        <p:style>
+          <a:lnRef idx="1">
+            <a:schemeClr val="accent1"/>
+          </a:lnRef>
+          <a:fillRef idx="3">
+            <a:schemeClr val="accent1"/>
+          </a:fillRef>
+          <a:effectRef idx="2">
+            <a:schemeClr val="accent1"/>
+          </a:effectRef>
+          <a:fontRef idx="minor">
+            <a:schemeClr val="lt1"/>
+          </a:fontRef>
+        </p:style>
+        <p:txBody>
+          <a:bodyPr rtlCol="0" anchor="ctr" lIns="0" rIns="0" tIns="0" bIns="0"/>
+          <a:lstStyle/>
+          <a:p>
+            <a:pPr algn="ctr"/>
+            <a:r>
+              <a:rPr sz="2000" b="1">
+                <a:solidFill>
+                  <a:srgbClr val="202122"/>
+                </a:solidFill>
+                <a:latin typeface="Calibri"/>
+              </a:rPr>
+              <a:t>3</a:t>
+            </a:r>
+          </a:p>
+        </p:txBody>
+      </p:sp>
+      <p:sp>
+        <p:nvSpPr>
+          <p:cNvPr id="16" name="TextBox 15"/>
+          <p:cNvSpPr txBox="1"/>
+          <p:nvPr/>
+        </p:nvSpPr>
+        <p:spPr>
+          <a:xfrm>
+            <a:off x="5041270" y="3131820"/>
+            <a:ext cx="2109155" cy="731520"/>
+          </a:xfrm>
+          <a:prstGeom prst="rect">
+            <a:avLst/>
+          </a:prstGeom>
+          <a:noFill/>
+        </p:spPr>
+        <p:txBody>
+          <a:bodyPr wrap="square" anchor="t" lIns="0" rIns="0" tIns="0" bIns="0"/>
+          <a:lstStyle/>
+          <a:p>
+            <a:pPr algn="ctr"/>
+            <a:r>
+              <a:rPr sz="1700" b="1" i="0">
+                <a:solidFill>
+                  <a:srgbClr val="03306E"/>
+                </a:solidFill>
+                <a:latin typeface="Calibri"/>
+              </a:rPr>
+              <a:t>Fix and test</a:t>
+            </a:r>
+          </a:p>
+        </p:txBody>
+      </p:sp>
+      <p:sp>
+        <p:nvSpPr>
+          <p:cNvPr id="17" name="Rounded Rectangle 16"/>
+          <p:cNvSpPr/>
+          <p:nvPr/>
+        </p:nvSpPr>
+        <p:spPr>
+          <a:xfrm>
+            <a:off x="5041270" y="3909060"/>
+            <a:ext cx="2109155" cy="1508760"/>
+          </a:xfrm>
+          <a:prstGeom prst="roundRect">
+            <a:avLst>
+              <a:gd name="adj" fmla="val 6000"/>
+            </a:avLst>
+          </a:prstGeom>
+          <a:solidFill>
+            <a:srgbClr val="EAF3FF"/>
+          </a:solidFill>
+          <a:ln>
+            <a:noFill/>
+          </a:ln>
+          <a:effectLst/>
+        </p:spPr>
+        <p:style>
+          <a:lnRef idx="1">
+            <a:schemeClr val="accent1"/>
+          </a:lnRef>
+          <a:fillRef idx="3">
+            <a:schemeClr val="accent1"/>
+          </a:fillRef>
+          <a:effectRef idx="2">
+            <a:schemeClr val="accent1"/>
+          </a:effectRef>
+          <a:fontRef idx="minor">
+            <a:schemeClr val="lt1"/>
+          </a:fontRef>
+        </p:style>
+        <p:txBody>
+          <a:bodyPr rtlCol="0" anchor="ctr"/>
+          <a:lstStyle/>
+          <a:p/>
+        </p:txBody>
+      </p:sp>
+      <p:sp>
+        <p:nvSpPr>
+          <p:cNvPr id="18" name="TextBox 17"/>
+          <p:cNvSpPr txBox="1"/>
+          <p:nvPr/>
+        </p:nvSpPr>
+        <p:spPr>
+          <a:xfrm>
+            <a:off x="5178430" y="4046220"/>
+            <a:ext cx="1834835" cy="1234439"/>
+          </a:xfrm>
+          <a:prstGeom prst="rect">
+            <a:avLst/>
+          </a:prstGeom>
+          <a:noFill/>
+        </p:spPr>
+        <p:txBody>
+          <a:bodyPr wrap="square" anchor="t" lIns="0" rIns="0" tIns="0" bIns="0"/>
+          <a:lstStyle/>
+          <a:p>
+            <a:pPr algn="l"/>
+            <a:r>
+              <a:rPr sz="1800" b="0" i="0">
+                <a:solidFill>
+                  <a:srgbClr val="202122"/>
+                </a:solidFill>
+                <a:latin typeface="Calibri"/>
+              </a:rPr>
+              <a:t>Make the change, confirm it stays fixed with no new issues.</a:t>
+            </a:r>
+          </a:p>
+        </p:txBody>
+      </p:sp>
+      <p:sp>
+        <p:nvSpPr>
+          <p:cNvPr id="19" name="Oval 18"/>
+          <p:cNvSpPr/>
+          <p:nvPr/>
+        </p:nvSpPr>
+        <p:spPr>
+          <a:xfrm>
+            <a:off x="8022122" y="2354580"/>
+            <a:ext cx="640080" cy="640080"/>
+          </a:xfrm>
+          <a:prstGeom prst="ellipse">
+            <a:avLst/>
+          </a:prstGeom>
+          <a:solidFill>
+            <a:srgbClr val="33C17A"/>
+          </a:solidFill>
+          <a:ln>
+            <a:noFill/>
+          </a:ln>
+          <a:effectLst/>
+        </p:spPr>
+        <p:style>
+          <a:lnRef idx="1">
+            <a:schemeClr val="accent1"/>
+          </a:lnRef>
+          <a:fillRef idx="3">
+            <a:schemeClr val="accent1"/>
+          </a:fillRef>
+          <a:effectRef idx="2">
+            <a:schemeClr val="accent1"/>
+          </a:effectRef>
+          <a:fontRef idx="minor">
+            <a:schemeClr val="lt1"/>
+          </a:fontRef>
+        </p:style>
+        <p:txBody>
+          <a:bodyPr rtlCol="0" anchor="ctr" lIns="0" rIns="0" tIns="0" bIns="0"/>
+          <a:lstStyle/>
+          <a:p>
+            <a:pPr algn="ctr"/>
+            <a:r>
+              <a:rPr sz="2000" b="1">
+                <a:solidFill>
+                  <a:srgbClr val="202122"/>
+                </a:solidFill>
+                <a:latin typeface="Calibri"/>
+              </a:rPr>
+              <a:t>4</a:t>
+            </a:r>
+          </a:p>
+        </p:txBody>
+      </p:sp>
+      <p:sp>
+        <p:nvSpPr>
+          <p:cNvPr id="20" name="TextBox 19"/>
+          <p:cNvSpPr txBox="1"/>
+          <p:nvPr/>
+        </p:nvSpPr>
+        <p:spPr>
+          <a:xfrm>
+            <a:off x="7287585" y="3131820"/>
+            <a:ext cx="2109155" cy="731520"/>
+          </a:xfrm>
+          <a:prstGeom prst="rect">
+            <a:avLst/>
+          </a:prstGeom>
+          <a:noFill/>
+        </p:spPr>
+        <p:txBody>
+          <a:bodyPr wrap="square" anchor="t" lIns="0" rIns="0" tIns="0" bIns="0"/>
+          <a:lstStyle/>
+          <a:p>
+            <a:pPr algn="ctr"/>
+            <a:r>
+              <a:rPr sz="1700" b="1" i="0">
+                <a:solidFill>
+                  <a:srgbClr val="03306E"/>
+                </a:solidFill>
+                <a:latin typeface="Calibri"/>
+              </a:rPr>
+              <a:t>Communicate</a:t>
+            </a:r>
+          </a:p>
+        </p:txBody>
+      </p:sp>
+      <p:sp>
+        <p:nvSpPr>
+          <p:cNvPr id="21" name="Rounded Rectangle 20"/>
+          <p:cNvSpPr/>
+          <p:nvPr/>
+        </p:nvSpPr>
+        <p:spPr>
+          <a:xfrm>
+            <a:off x="7287585" y="3909060"/>
+            <a:ext cx="2109155" cy="1508760"/>
+          </a:xfrm>
+          <a:prstGeom prst="roundRect">
+            <a:avLst>
+              <a:gd name="adj" fmla="val 6000"/>
+            </a:avLst>
+          </a:prstGeom>
+          <a:solidFill>
+            <a:srgbClr val="EAF3FF"/>
+          </a:solidFill>
+          <a:ln>
+            <a:noFill/>
+          </a:ln>
+          <a:effectLst/>
+        </p:spPr>
+        <p:style>
+          <a:lnRef idx="1">
+            <a:schemeClr val="accent1"/>
+          </a:lnRef>
+          <a:fillRef idx="3">
+            <a:schemeClr val="accent1"/>
+          </a:fillRef>
+          <a:effectRef idx="2">
+            <a:schemeClr val="accent1"/>
+          </a:effectRef>
+          <a:fontRef idx="minor">
+            <a:schemeClr val="lt1"/>
+          </a:fontRef>
+        </p:style>
+        <p:txBody>
+          <a:bodyPr rtlCol="0" anchor="ctr"/>
+          <a:lstStyle/>
+          <a:p/>
+        </p:txBody>
+      </p:sp>
+      <p:sp>
+        <p:nvSpPr>
+          <p:cNvPr id="22" name="TextBox 21"/>
+          <p:cNvSpPr txBox="1"/>
+          <p:nvPr/>
+        </p:nvSpPr>
+        <p:spPr>
+          <a:xfrm>
+            <a:off x="7424745" y="4046220"/>
+            <a:ext cx="1834835" cy="1234439"/>
+          </a:xfrm>
+          <a:prstGeom prst="rect">
+            <a:avLst/>
+          </a:prstGeom>
+          <a:noFill/>
+        </p:spPr>
+        <p:txBody>
+          <a:bodyPr wrap="square" anchor="t" lIns="0" rIns="0" tIns="0" bIns="0"/>
+          <a:lstStyle/>
+          <a:p>
+            <a:pPr algn="l"/>
+            <a:r>
+              <a:rPr sz="1800" b="0" i="0">
+                <a:solidFill>
+                  <a:srgbClr val="202122"/>
+                </a:solidFill>
+                <a:latin typeface="Calibri"/>
+              </a:rPr>
+              <a:t>Tell stakeholders how and when.</a:t>
+            </a:r>
+          </a:p>
+        </p:txBody>
+      </p:sp>
+      <p:sp>
+        <p:nvSpPr>
+          <p:cNvPr id="23" name="Oval 22"/>
+          <p:cNvSpPr/>
+          <p:nvPr/>
+        </p:nvSpPr>
+        <p:spPr>
+          <a:xfrm>
+            <a:off x="10268437" y="2354580"/>
+            <a:ext cx="640080" cy="640080"/>
+          </a:xfrm>
+          <a:prstGeom prst="ellipse">
+            <a:avLst/>
+          </a:prstGeom>
+          <a:solidFill>
+            <a:srgbClr val="33C17A"/>
+          </a:solidFill>
+          <a:ln>
+            <a:noFill/>
+          </a:ln>
+          <a:effectLst/>
+        </p:spPr>
+        <p:style>
+          <a:lnRef idx="1">
+            <a:schemeClr val="accent1"/>
+          </a:lnRef>
+          <a:fillRef idx="3">
+            <a:schemeClr val="accent1"/>
+          </a:fillRef>
+          <a:effectRef idx="2">
+            <a:schemeClr val="accent1"/>
+          </a:effectRef>
+          <a:fontRef idx="minor">
+            <a:schemeClr val="lt1"/>
+          </a:fontRef>
+        </p:style>
+        <p:txBody>
+          <a:bodyPr rtlCol="0" anchor="ctr" lIns="0" rIns="0" tIns="0" bIns="0"/>
+          <a:lstStyle/>
+          <a:p>
+            <a:pPr algn="ctr"/>
+            <a:r>
+              <a:rPr sz="2000" b="1">
+                <a:solidFill>
+                  <a:srgbClr val="202122"/>
+                </a:solidFill>
+                <a:latin typeface="Calibri"/>
+              </a:rPr>
+              <a:t>5</a:t>
+            </a:r>
+          </a:p>
+        </p:txBody>
+      </p:sp>
+      <p:sp>
+        <p:nvSpPr>
+          <p:cNvPr id="24" name="TextBox 23"/>
+          <p:cNvSpPr txBox="1"/>
+          <p:nvPr/>
+        </p:nvSpPr>
+        <p:spPr>
+          <a:xfrm>
+            <a:off x="9533900" y="3131820"/>
+            <a:ext cx="2109155" cy="731520"/>
+          </a:xfrm>
+          <a:prstGeom prst="rect">
+            <a:avLst/>
+          </a:prstGeom>
+          <a:noFill/>
+        </p:spPr>
+        <p:txBody>
+          <a:bodyPr wrap="square" anchor="t" lIns="0" rIns="0" tIns="0" bIns="0"/>
+          <a:lstStyle/>
+          <a:p>
+            <a:pPr algn="ctr"/>
+            <a:r>
+              <a:rPr sz="1700" b="1" i="0">
+                <a:solidFill>
+                  <a:srgbClr val="03306E"/>
+                </a:solidFill>
+                <a:latin typeface="Calibri"/>
+              </a:rPr>
+              <a:t>Learn</a:t>
+            </a:r>
+          </a:p>
+        </p:txBody>
+      </p:sp>
+      <p:sp>
+        <p:nvSpPr>
+          <p:cNvPr id="25" name="Rounded Rectangle 24"/>
+          <p:cNvSpPr/>
+          <p:nvPr/>
+        </p:nvSpPr>
+        <p:spPr>
+          <a:xfrm>
+            <a:off x="9533900" y="3909060"/>
+            <a:ext cx="2109155" cy="1508760"/>
+          </a:xfrm>
+          <a:prstGeom prst="roundRect">
+            <a:avLst>
+              <a:gd name="adj" fmla="val 6000"/>
+            </a:avLst>
+          </a:prstGeom>
+          <a:solidFill>
+            <a:srgbClr val="EAF3FF"/>
+          </a:solidFill>
+          <a:ln>
+            <a:noFill/>
+          </a:ln>
+          <a:effectLst/>
+        </p:spPr>
+        <p:style>
+          <a:lnRef idx="1">
+            <a:schemeClr val="accent1"/>
+          </a:lnRef>
+          <a:fillRef idx="3">
+            <a:schemeClr val="accent1"/>
+          </a:fillRef>
+          <a:effectRef idx="2">
+            <a:schemeClr val="accent1"/>
+          </a:effectRef>
+          <a:fontRef idx="minor">
+            <a:schemeClr val="lt1"/>
+          </a:fontRef>
+        </p:style>
+        <p:txBody>
+          <a:bodyPr rtlCol="0" anchor="ctr"/>
+          <a:lstStyle/>
+          <a:p/>
+        </p:txBody>
+      </p:sp>
+      <p:sp>
+        <p:nvSpPr>
+          <p:cNvPr id="26" name="TextBox 25"/>
+          <p:cNvSpPr txBox="1"/>
+          <p:nvPr/>
+        </p:nvSpPr>
+        <p:spPr>
+          <a:xfrm>
+            <a:off x="9671060" y="4046220"/>
+            <a:ext cx="1834835" cy="1234439"/>
+          </a:xfrm>
+          <a:prstGeom prst="rect">
+            <a:avLst/>
+          </a:prstGeom>
+          <a:noFill/>
+        </p:spPr>
+        <p:txBody>
+          <a:bodyPr wrap="square" anchor="t" lIns="0" rIns="0" tIns="0" bIns="0"/>
+          <a:lstStyle/>
+          <a:p>
+            <a:pPr algn="l"/>
+            <a:r>
+              <a:rPr sz="1800" b="0" i="0">
+                <a:solidFill>
+                  <a:srgbClr val="202122"/>
+                </a:solidFill>
+                <a:latin typeface="Calibri"/>
+              </a:rPr>
+              <a:t>Document the lessons.</a:t>
+            </a:r>
+          </a:p>
+        </p:txBody>
+      </p:sp>
+    </p:spTree>
+  </p:cSld>
+  <p:clrMapOvr>
+    <a:masterClrMapping/>
+  </p:clrMapOvr>
+</p:sld>
+</file>
+
+<file path=ppt/slides/slide12.xml><?xml version="1.0" encoding="utf-8"?>
+<p:sld xmlns:a="http://schemas.openxmlformats.org/drawingml/2006/main" xmlns:p="http://schemas.openxmlformats.org/presentationml/2006/main" xmlns:r="http://schemas.openxmlformats.org/officeDocument/2006/relationships">
+  <p:cSld>
+    <p:bg>
+      <p:bgPr>
+        <a:solidFill>
+          <a:srgbClr val="FFFFFF"/>
+        </a:solidFill>
+        <a:effectLst/>
+      </p:bgPr>
+    </p:bg>
+    <p:spTree>
+      <p:nvGrpSpPr>
+        <p:cNvPr id="1" name=""/>
+        <p:cNvGrpSpPr/>
+        <p:nvPr/>
+      </p:nvGrpSpPr>
+      <p:grpSpPr/>
+      <p:sp>
+        <p:nvSpPr>
+          <p:cNvPr id="2" name="TextBox 1"/>
+          <p:cNvSpPr txBox="1"/>
+          <p:nvPr/>
+        </p:nvSpPr>
+        <p:spPr>
+          <a:xfrm>
+            <a:off x="548640" y="320040"/>
+            <a:ext cx="11094415" cy="274320"/>
+          </a:xfrm>
+          <a:prstGeom prst="rect">
+            <a:avLst/>
+          </a:prstGeom>
+          <a:noFill/>
+        </p:spPr>
+        <p:txBody>
+          <a:bodyPr wrap="square" anchor="t" lIns="0" rIns="0" tIns="0" bIns="0"/>
+          <a:lstStyle/>
+          <a:p>
+            <a:pPr algn="l"/>
+            <a:r>
+              <a:rPr sz="1100" b="1" i="0">
+                <a:solidFill>
+                  <a:srgbClr val="54595D"/>
+                </a:solidFill>
+                <a:latin typeface="Calibri"/>
+              </a:rPr>
+              <a:t>OCCUPATIONAL SPECIALISM  ·  Specialism Content Area 8</a:t>
+            </a:r>
+          </a:p>
+        </p:txBody>
+      </p:sp>
+      <p:sp>
+        <p:nvSpPr>
+          <p:cNvPr id="3" name="TextBox 2"/>
+          <p:cNvSpPr txBox="1"/>
+          <p:nvPr/>
+        </p:nvSpPr>
+        <p:spPr>
+          <a:xfrm>
+            <a:off x="548640" y="566928"/>
+            <a:ext cx="11094415" cy="822960"/>
+          </a:xfrm>
+          <a:prstGeom prst="rect">
+            <a:avLst/>
+          </a:prstGeom>
+          <a:noFill/>
+        </p:spPr>
+        <p:txBody>
+          <a:bodyPr wrap="square" anchor="ctr" lIns="0" rIns="0" tIns="0" bIns="0"/>
+          <a:lstStyle/>
+          <a:p>
+            <a:pPr algn="l"/>
+            <a:r>
+              <a:rPr sz="3200" b="1" i="0">
+                <a:solidFill>
+                  <a:srgbClr val="03306E"/>
+                </a:solidFill>
+                <a:latin typeface="Cambria"/>
+              </a:rPr>
+              <a:t>Quick check: Resolving user issues</a:t>
+            </a:r>
+          </a:p>
+        </p:txBody>
+      </p:sp>
+      <p:sp>
+        <p:nvSpPr>
+          <p:cNvPr id="4" name="TextBox 3"/>
+          <p:cNvSpPr txBox="1"/>
+          <p:nvPr/>
+        </p:nvSpPr>
+        <p:spPr>
+          <a:xfrm>
+            <a:off x="548640" y="6446520"/>
+            <a:ext cx="8229600" cy="274320"/>
+          </a:xfrm>
+          <a:prstGeom prst="rect">
+            <a:avLst/>
+          </a:prstGeom>
+          <a:noFill/>
+        </p:spPr>
+        <p:txBody>
+          <a:bodyPr wrap="square" anchor="t" lIns="0" rIns="0" tIns="0" bIns="0"/>
+          <a:lstStyle/>
+          <a:p>
+            <a:pPr algn="l"/>
+            <a:r>
+              <a:rPr sz="1000" b="0" i="0">
+                <a:solidFill>
+                  <a:srgbClr val="54595D"/>
+                </a:solidFill>
+                <a:latin typeface="Calibri"/>
+              </a:rPr>
+              <a:t>Digital Software Development T Level  ·  Change, Maintain and Support Software</a:t>
+            </a:r>
+          </a:p>
+        </p:txBody>
+      </p:sp>
+      <p:sp>
+        <p:nvSpPr>
+          <p:cNvPr id="5" name="TextBox 4"/>
+          <p:cNvSpPr txBox="1"/>
+          <p:nvPr/>
+        </p:nvSpPr>
+        <p:spPr>
+          <a:xfrm>
+            <a:off x="10728655" y="6446520"/>
+            <a:ext cx="914400" cy="274320"/>
+          </a:xfrm>
+          <a:prstGeom prst="rect">
+            <a:avLst/>
+          </a:prstGeom>
+          <a:noFill/>
+        </p:spPr>
+        <p:txBody>
+          <a:bodyPr wrap="square" anchor="t" lIns="0" rIns="0" tIns="0" bIns="0"/>
+          <a:lstStyle/>
+          <a:p>
+            <a:pPr algn="r"/>
+            <a:r>
+              <a:rPr sz="1000" b="0" i="0">
+                <a:solidFill>
+                  <a:srgbClr val="54595D"/>
+                </a:solidFill>
+                <a:latin typeface="Calibri"/>
+              </a:rPr>
+              <a:t>12</a:t>
+            </a:r>
+          </a:p>
+        </p:txBody>
+      </p:sp>
+      <p:sp>
+        <p:nvSpPr>
+          <p:cNvPr id="6" name="Oval 5"/>
+          <p:cNvSpPr/>
+          <p:nvPr/>
+        </p:nvSpPr>
+        <p:spPr>
+          <a:xfrm>
+            <a:off x="548640" y="1691640"/>
+            <a:ext cx="502920" cy="502920"/>
+          </a:xfrm>
+          <a:prstGeom prst="ellipse">
+            <a:avLst/>
+          </a:prstGeom>
+          <a:solidFill>
+            <a:srgbClr val="33C17A"/>
+          </a:solidFill>
+          <a:ln>
+            <a:noFill/>
+          </a:ln>
+          <a:effectLst/>
+        </p:spPr>
+        <p:style>
+          <a:lnRef idx="1">
+            <a:schemeClr val="accent1"/>
+          </a:lnRef>
+          <a:fillRef idx="3">
+            <a:schemeClr val="accent1"/>
+          </a:fillRef>
+          <a:effectRef idx="2">
+            <a:schemeClr val="accent1"/>
+          </a:effectRef>
+          <a:fontRef idx="minor">
+            <a:schemeClr val="lt1"/>
+          </a:fontRef>
+        </p:style>
+        <p:txBody>
+          <a:bodyPr rtlCol="0" anchor="ctr" lIns="0" rIns="0" tIns="0" bIns="0"/>
+          <a:lstStyle/>
+          <a:p>
+            <a:pPr algn="ctr"/>
+            <a:r>
+              <a:rPr sz="1600" b="1">
+                <a:solidFill>
+                  <a:srgbClr val="202122"/>
+                </a:solidFill>
+                <a:latin typeface="Calibri"/>
+              </a:rPr>
+              <a:t>1</a:t>
+            </a:r>
+          </a:p>
+        </p:txBody>
+      </p:sp>
+      <p:sp>
+        <p:nvSpPr>
+          <p:cNvPr id="7" name="TextBox 6"/>
+          <p:cNvSpPr txBox="1"/>
+          <p:nvPr/>
+        </p:nvSpPr>
+        <p:spPr>
+          <a:xfrm>
+            <a:off x="1371600" y="1645920"/>
+            <a:ext cx="10271455" cy="1188720"/>
+          </a:xfrm>
+          <a:prstGeom prst="rect">
+            <a:avLst/>
+          </a:prstGeom>
+          <a:noFill/>
+        </p:spPr>
+        <p:txBody>
+          <a:bodyPr wrap="square" anchor="t" lIns="0" rIns="0" tIns="0" bIns="0"/>
+          <a:lstStyle/>
+          <a:p>
+            <a:pPr algn="l"/>
+            <a:r>
+              <a:rPr sz="2400" b="0" i="0">
+                <a:solidFill>
+                  <a:srgbClr val="202122"/>
+                </a:solidFill>
+                <a:latin typeface="Calibri"/>
+              </a:rPr>
+              <a:t>What is the first step in resolving an issue?</a:t>
+            </a:r>
+          </a:p>
+        </p:txBody>
+      </p:sp>
+      <p:sp>
+        <p:nvSpPr>
+          <p:cNvPr id="8" name="Oval 7"/>
+          <p:cNvSpPr/>
+          <p:nvPr/>
+        </p:nvSpPr>
+        <p:spPr>
+          <a:xfrm>
+            <a:off x="548640" y="3108960"/>
+            <a:ext cx="502920" cy="502920"/>
+          </a:xfrm>
+          <a:prstGeom prst="ellipse">
+            <a:avLst/>
+          </a:prstGeom>
+          <a:solidFill>
+            <a:srgbClr val="33C17A"/>
+          </a:solidFill>
+          <a:ln>
+            <a:noFill/>
+          </a:ln>
+          <a:effectLst/>
+        </p:spPr>
+        <p:style>
+          <a:lnRef idx="1">
+            <a:schemeClr val="accent1"/>
+          </a:lnRef>
+          <a:fillRef idx="3">
+            <a:schemeClr val="accent1"/>
+          </a:fillRef>
+          <a:effectRef idx="2">
+            <a:schemeClr val="accent1"/>
+          </a:effectRef>
+          <a:fontRef idx="minor">
+            <a:schemeClr val="lt1"/>
+          </a:fontRef>
+        </p:style>
+        <p:txBody>
+          <a:bodyPr rtlCol="0" anchor="ctr" lIns="0" rIns="0" tIns="0" bIns="0"/>
+          <a:lstStyle/>
+          <a:p>
+            <a:pPr algn="ctr"/>
+            <a:r>
+              <a:rPr sz="1600" b="1">
+                <a:solidFill>
+                  <a:srgbClr val="202122"/>
+                </a:solidFill>
+                <a:latin typeface="Calibri"/>
+              </a:rPr>
+              <a:t>2</a:t>
+            </a:r>
+          </a:p>
+        </p:txBody>
+      </p:sp>
+      <p:sp>
+        <p:nvSpPr>
+          <p:cNvPr id="9" name="TextBox 8"/>
+          <p:cNvSpPr txBox="1"/>
+          <p:nvPr/>
+        </p:nvSpPr>
+        <p:spPr>
+          <a:xfrm>
+            <a:off x="1371600" y="3063240"/>
+            <a:ext cx="10271455" cy="1188720"/>
+          </a:xfrm>
+          <a:prstGeom prst="rect">
+            <a:avLst/>
+          </a:prstGeom>
+          <a:noFill/>
+        </p:spPr>
+        <p:txBody>
+          <a:bodyPr wrap="square" anchor="t" lIns="0" rIns="0" tIns="0" bIns="0"/>
+          <a:lstStyle/>
+          <a:p>
+            <a:pPr algn="l"/>
+            <a:r>
+              <a:rPr sz="2400" b="0" i="0">
+                <a:solidFill>
+                  <a:srgbClr val="202122"/>
+                </a:solidFill>
+                <a:latin typeface="Calibri"/>
+              </a:rPr>
+              <a:t>Name two possible causes of a user issue.</a:t>
+            </a:r>
+          </a:p>
+        </p:txBody>
+      </p:sp>
+      <p:sp>
+        <p:nvSpPr>
+          <p:cNvPr id="10" name="Oval 9"/>
+          <p:cNvSpPr/>
+          <p:nvPr/>
+        </p:nvSpPr>
+        <p:spPr>
+          <a:xfrm>
+            <a:off x="548640" y="4526280"/>
+            <a:ext cx="502920" cy="502920"/>
+          </a:xfrm>
+          <a:prstGeom prst="ellipse">
+            <a:avLst/>
+          </a:prstGeom>
+          <a:solidFill>
+            <a:srgbClr val="33C17A"/>
+          </a:solidFill>
+          <a:ln>
+            <a:noFill/>
+          </a:ln>
+          <a:effectLst/>
+        </p:spPr>
+        <p:style>
+          <a:lnRef idx="1">
+            <a:schemeClr val="accent1"/>
+          </a:lnRef>
+          <a:fillRef idx="3">
+            <a:schemeClr val="accent1"/>
+          </a:fillRef>
+          <a:effectRef idx="2">
+            <a:schemeClr val="accent1"/>
+          </a:effectRef>
+          <a:fontRef idx="minor">
+            <a:schemeClr val="lt1"/>
+          </a:fontRef>
+        </p:style>
+        <p:txBody>
+          <a:bodyPr rtlCol="0" anchor="ctr" lIns="0" rIns="0" tIns="0" bIns="0"/>
+          <a:lstStyle/>
+          <a:p>
+            <a:pPr algn="ctr"/>
+            <a:r>
+              <a:rPr sz="1600" b="1">
+                <a:solidFill>
+                  <a:srgbClr val="202122"/>
+                </a:solidFill>
+                <a:latin typeface="Calibri"/>
+              </a:rPr>
+              <a:t>3</a:t>
+            </a:r>
+          </a:p>
+        </p:txBody>
+      </p:sp>
+      <p:sp>
+        <p:nvSpPr>
+          <p:cNvPr id="11" name="TextBox 10"/>
+          <p:cNvSpPr txBox="1"/>
+          <p:nvPr/>
+        </p:nvSpPr>
+        <p:spPr>
+          <a:xfrm>
+            <a:off x="1371600" y="4480560"/>
+            <a:ext cx="10271455" cy="1188720"/>
+          </a:xfrm>
+          <a:prstGeom prst="rect">
+            <a:avLst/>
+          </a:prstGeom>
+          <a:noFill/>
+        </p:spPr>
+        <p:txBody>
+          <a:bodyPr wrap="square" anchor="t" lIns="0" rIns="0" tIns="0" bIns="0"/>
+          <a:lstStyle/>
+          <a:p>
+            <a:pPr algn="l"/>
+            <a:r>
+              <a:rPr sz="2400" b="0" i="0">
+                <a:solidFill>
+                  <a:srgbClr val="202122"/>
+                </a:solidFill>
+                <a:latin typeface="Calibri"/>
+              </a:rPr>
+              <a:t>Why document lessons learned?</a:t>
+            </a:r>
+          </a:p>
+        </p:txBody>
+      </p:sp>
+      <p:sp>
+        <p:nvSpPr>
+          <p:cNvPr id="12" name="TextBox 11"/>
+          <p:cNvSpPr txBox="1"/>
+          <p:nvPr/>
+        </p:nvSpPr>
+        <p:spPr>
+          <a:xfrm>
+            <a:off x="548640" y="5852160"/>
+            <a:ext cx="11094415" cy="365760"/>
+          </a:xfrm>
+          <a:prstGeom prst="rect">
+            <a:avLst/>
+          </a:prstGeom>
+          <a:noFill/>
+        </p:spPr>
+        <p:txBody>
+          <a:bodyPr wrap="square" anchor="t" lIns="0" rIns="0" tIns="0" bIns="0"/>
+          <a:lstStyle/>
+          <a:p>
+            <a:pPr algn="l"/>
+            <a:r>
+              <a:rPr sz="1300" b="0" i="1">
+                <a:solidFill>
+                  <a:srgbClr val="54595D"/>
+                </a:solidFill>
+                <a:latin typeface="Calibri"/>
+              </a:rPr>
+              <a:t>Answer on mini whiteboards or in your book. Answers are in the speaker notes.</a:t>
+            </a:r>
+          </a:p>
+        </p:txBody>
+      </p:sp>
+    </p:spTree>
+  </p:cSld>
+  <p:clrMapOvr>
+    <a:masterClrMapping/>
+  </p:clrMapOvr>
+</p:sld>
+</file>
+
+<file path=ppt/slides/slide13.xml><?xml version="1.0" encoding="utf-8"?>
+<p:sld xmlns:a="http://schemas.openxmlformats.org/drawingml/2006/main" xmlns:p="http://schemas.openxmlformats.org/presentationml/2006/main" xmlns:r="http://schemas.openxmlformats.org/officeDocument/2006/relationships">
+  <p:cSld>
+    <p:bg>
+      <p:bgPr>
+        <a:solidFill>
+          <a:srgbClr val="FFFFFF"/>
+        </a:solidFill>
+        <a:effectLst/>
+      </p:bgPr>
+    </p:bg>
+    <p:spTree>
+      <p:nvGrpSpPr>
+        <p:cNvPr id="1" name=""/>
+        <p:cNvGrpSpPr/>
+        <p:nvPr/>
+      </p:nvGrpSpPr>
+      <p:grpSpPr/>
+      <p:sp>
+        <p:nvSpPr>
+          <p:cNvPr id="2" name="TextBox 1"/>
+          <p:cNvSpPr txBox="1"/>
+          <p:nvPr/>
+        </p:nvSpPr>
+        <p:spPr>
+          <a:xfrm>
+            <a:off x="548640" y="320040"/>
+            <a:ext cx="11094415" cy="274320"/>
+          </a:xfrm>
+          <a:prstGeom prst="rect">
+            <a:avLst/>
+          </a:prstGeom>
+          <a:noFill/>
+        </p:spPr>
+        <p:txBody>
+          <a:bodyPr wrap="square" anchor="t" lIns="0" rIns="0" tIns="0" bIns="0"/>
+          <a:lstStyle/>
+          <a:p>
+            <a:pPr algn="l"/>
+            <a:r>
+              <a:rPr sz="1100" b="1" i="0">
+                <a:solidFill>
+                  <a:srgbClr val="54595D"/>
+                </a:solidFill>
+                <a:latin typeface="Calibri"/>
+              </a:rPr>
+              <a:t>OCCUPATIONAL SPECIALISM  ·  Specialism Content Area 8</a:t>
+            </a:r>
+          </a:p>
+        </p:txBody>
+      </p:sp>
+      <p:sp>
+        <p:nvSpPr>
+          <p:cNvPr id="3" name="TextBox 2"/>
+          <p:cNvSpPr txBox="1"/>
+          <p:nvPr/>
+        </p:nvSpPr>
+        <p:spPr>
+          <a:xfrm>
+            <a:off x="548640" y="566928"/>
+            <a:ext cx="11094415" cy="822960"/>
+          </a:xfrm>
+          <a:prstGeom prst="rect">
+            <a:avLst/>
+          </a:prstGeom>
+          <a:noFill/>
+        </p:spPr>
+        <p:txBody>
+          <a:bodyPr wrap="square" anchor="ctr" lIns="0" rIns="0" tIns="0" bIns="0"/>
+          <a:lstStyle/>
+          <a:p>
+            <a:pPr algn="l"/>
+            <a:r>
+              <a:rPr sz="3200" b="1" i="0">
+                <a:solidFill>
+                  <a:srgbClr val="03306E"/>
+                </a:solidFill>
+                <a:latin typeface="Cambria"/>
+              </a:rPr>
+              <a:t>Check your understanding</a:t>
+            </a:r>
+          </a:p>
+        </p:txBody>
+      </p:sp>
+      <p:sp>
+        <p:nvSpPr>
+          <p:cNvPr id="4" name="TextBox 3"/>
+          <p:cNvSpPr txBox="1"/>
+          <p:nvPr/>
+        </p:nvSpPr>
+        <p:spPr>
+          <a:xfrm>
+            <a:off x="548640" y="6446520"/>
+            <a:ext cx="8229600" cy="274320"/>
+          </a:xfrm>
+          <a:prstGeom prst="rect">
+            <a:avLst/>
+          </a:prstGeom>
+          <a:noFill/>
+        </p:spPr>
+        <p:txBody>
+          <a:bodyPr wrap="square" anchor="t" lIns="0" rIns="0" tIns="0" bIns="0"/>
+          <a:lstStyle/>
+          <a:p>
+            <a:pPr algn="l"/>
+            <a:r>
+              <a:rPr sz="1000" b="0" i="0">
+                <a:solidFill>
+                  <a:srgbClr val="54595D"/>
+                </a:solidFill>
+                <a:latin typeface="Calibri"/>
+              </a:rPr>
+              <a:t>Digital Software Development T Level  ·  Change, Maintain and Support Software</a:t>
+            </a:r>
+          </a:p>
+        </p:txBody>
+      </p:sp>
+      <p:sp>
+        <p:nvSpPr>
+          <p:cNvPr id="5" name="TextBox 4"/>
+          <p:cNvSpPr txBox="1"/>
+          <p:nvPr/>
+        </p:nvSpPr>
+        <p:spPr>
+          <a:xfrm>
+            <a:off x="10728655" y="6446520"/>
+            <a:ext cx="914400" cy="274320"/>
+          </a:xfrm>
+          <a:prstGeom prst="rect">
+            <a:avLst/>
+          </a:prstGeom>
+          <a:noFill/>
+        </p:spPr>
+        <p:txBody>
+          <a:bodyPr wrap="square" anchor="t" lIns="0" rIns="0" tIns="0" bIns="0"/>
+          <a:lstStyle/>
+          <a:p>
+            <a:pPr algn="r"/>
+            <a:r>
+              <a:rPr sz="1000" b="0" i="0">
+                <a:solidFill>
+                  <a:srgbClr val="54595D"/>
+                </a:solidFill>
+                <a:latin typeface="Calibri"/>
+              </a:rPr>
+              <a:t>13</a:t>
+            </a:r>
+          </a:p>
+        </p:txBody>
+      </p:sp>
+      <p:sp>
+        <p:nvSpPr>
+          <p:cNvPr id="6" name="Oval 5"/>
+          <p:cNvSpPr/>
+          <p:nvPr/>
+        </p:nvSpPr>
+        <p:spPr>
+          <a:xfrm>
+            <a:off x="548640" y="1618488"/>
+            <a:ext cx="411480" cy="411480"/>
+          </a:xfrm>
+          <a:prstGeom prst="ellipse">
+            <a:avLst/>
+          </a:prstGeom>
+          <a:solidFill>
+            <a:srgbClr val="33C17A"/>
+          </a:solidFill>
+          <a:ln>
+            <a:noFill/>
+          </a:ln>
+          <a:effectLst/>
+        </p:spPr>
+        <p:style>
+          <a:lnRef idx="1">
+            <a:schemeClr val="accent1"/>
+          </a:lnRef>
+          <a:fillRef idx="3">
+            <a:schemeClr val="accent1"/>
+          </a:fillRef>
+          <a:effectRef idx="2">
+            <a:schemeClr val="accent1"/>
+          </a:effectRef>
+          <a:fontRef idx="minor">
+            <a:schemeClr val="lt1"/>
+          </a:fontRef>
+        </p:style>
+        <p:txBody>
+          <a:bodyPr rtlCol="0" anchor="ctr" lIns="0" rIns="0" tIns="0" bIns="0"/>
+          <a:lstStyle/>
+          <a:p>
+            <a:pPr algn="ctr"/>
+            <a:r>
+              <a:rPr sz="1400" b="1">
+                <a:solidFill>
+                  <a:srgbClr val="202122"/>
+                </a:solidFill>
+                <a:latin typeface="Calibri"/>
+              </a:rPr>
+              <a:t>1</a:t>
+            </a:r>
+          </a:p>
+        </p:txBody>
+      </p:sp>
+      <p:sp>
+        <p:nvSpPr>
+          <p:cNvPr id="7" name="TextBox 6"/>
+          <p:cNvSpPr txBox="1"/>
+          <p:nvPr/>
+        </p:nvSpPr>
+        <p:spPr>
+          <a:xfrm>
+            <a:off x="1234440" y="1600200"/>
+            <a:ext cx="10408615" cy="1030986"/>
+          </a:xfrm>
+          <a:prstGeom prst="rect">
+            <a:avLst/>
+          </a:prstGeom>
+          <a:noFill/>
+        </p:spPr>
+        <p:txBody>
+          <a:bodyPr wrap="square" anchor="t" lIns="0" rIns="0" tIns="0" bIns="0"/>
+          <a:lstStyle/>
+          <a:p>
+            <a:pPr algn="l"/>
+            <a:r>
+              <a:rPr sz="2200" b="0" i="0">
+                <a:solidFill>
+                  <a:srgbClr val="202122"/>
+                </a:solidFill>
+                <a:latin typeface="Calibri"/>
+              </a:rPr>
+              <a:t>Fixing a zero-day vulnerability is which type of change?</a:t>
+            </a:r>
+          </a:p>
+        </p:txBody>
+      </p:sp>
+      <p:sp>
+        <p:nvSpPr>
+          <p:cNvPr id="8" name="Oval 7"/>
+          <p:cNvSpPr/>
+          <p:nvPr/>
+        </p:nvSpPr>
+        <p:spPr>
+          <a:xfrm>
+            <a:off x="548640" y="2814066"/>
+            <a:ext cx="411480" cy="411480"/>
+          </a:xfrm>
+          <a:prstGeom prst="ellipse">
+            <a:avLst/>
+          </a:prstGeom>
+          <a:solidFill>
+            <a:srgbClr val="33C17A"/>
+          </a:solidFill>
+          <a:ln>
+            <a:noFill/>
+          </a:ln>
+          <a:effectLst/>
+        </p:spPr>
+        <p:style>
+          <a:lnRef idx="1">
+            <a:schemeClr val="accent1"/>
+          </a:lnRef>
+          <a:fillRef idx="3">
+            <a:schemeClr val="accent1"/>
+          </a:fillRef>
+          <a:effectRef idx="2">
+            <a:schemeClr val="accent1"/>
+          </a:effectRef>
+          <a:fontRef idx="minor">
+            <a:schemeClr val="lt1"/>
+          </a:fontRef>
+        </p:style>
+        <p:txBody>
+          <a:bodyPr rtlCol="0" anchor="ctr" lIns="0" rIns="0" tIns="0" bIns="0"/>
+          <a:lstStyle/>
+          <a:p>
+            <a:pPr algn="ctr"/>
+            <a:r>
+              <a:rPr sz="1400" b="1">
+                <a:solidFill>
+                  <a:srgbClr val="202122"/>
+                </a:solidFill>
+                <a:latin typeface="Calibri"/>
+              </a:rPr>
+              <a:t>2</a:t>
+            </a:r>
+          </a:p>
+        </p:txBody>
+      </p:sp>
+      <p:sp>
+        <p:nvSpPr>
+          <p:cNvPr id="9" name="TextBox 8"/>
+          <p:cNvSpPr txBox="1"/>
+          <p:nvPr/>
+        </p:nvSpPr>
+        <p:spPr>
+          <a:xfrm>
+            <a:off x="1234440" y="2795778"/>
+            <a:ext cx="10408615" cy="1030986"/>
+          </a:xfrm>
+          <a:prstGeom prst="rect">
+            <a:avLst/>
+          </a:prstGeom>
+          <a:noFill/>
+        </p:spPr>
+        <p:txBody>
+          <a:bodyPr wrap="square" anchor="t" lIns="0" rIns="0" tIns="0" bIns="0"/>
+          <a:lstStyle/>
+          <a:p>
+            <a:pPr algn="l"/>
+            <a:r>
+              <a:rPr sz="2200" b="0" i="0">
+                <a:solidFill>
+                  <a:srgbClr val="202122"/>
+                </a:solidFill>
+                <a:latin typeface="Calibri"/>
+              </a:rPr>
+              <a:t>Why is regression testing part of change management?</a:t>
+            </a:r>
+          </a:p>
+        </p:txBody>
+      </p:sp>
+      <p:sp>
+        <p:nvSpPr>
+          <p:cNvPr id="10" name="Oval 9"/>
+          <p:cNvSpPr/>
+          <p:nvPr/>
+        </p:nvSpPr>
+        <p:spPr>
+          <a:xfrm>
+            <a:off x="548640" y="4009644"/>
+            <a:ext cx="411480" cy="411480"/>
+          </a:xfrm>
+          <a:prstGeom prst="ellipse">
+            <a:avLst/>
+          </a:prstGeom>
+          <a:solidFill>
+            <a:srgbClr val="33C17A"/>
+          </a:solidFill>
+          <a:ln>
+            <a:noFill/>
+          </a:ln>
+          <a:effectLst/>
+        </p:spPr>
+        <p:style>
+          <a:lnRef idx="1">
+            <a:schemeClr val="accent1"/>
+          </a:lnRef>
+          <a:fillRef idx="3">
+            <a:schemeClr val="accent1"/>
+          </a:fillRef>
+          <a:effectRef idx="2">
+            <a:schemeClr val="accent1"/>
+          </a:effectRef>
+          <a:fontRef idx="minor">
+            <a:schemeClr val="lt1"/>
+          </a:fontRef>
+        </p:style>
+        <p:txBody>
+          <a:bodyPr rtlCol="0" anchor="ctr" lIns="0" rIns="0" tIns="0" bIns="0"/>
+          <a:lstStyle/>
+          <a:p>
+            <a:pPr algn="ctr"/>
+            <a:r>
+              <a:rPr sz="1400" b="1">
+                <a:solidFill>
+                  <a:srgbClr val="202122"/>
+                </a:solidFill>
+                <a:latin typeface="Calibri"/>
+              </a:rPr>
+              <a:t>3</a:t>
+            </a:r>
+          </a:p>
+        </p:txBody>
+      </p:sp>
+      <p:sp>
+        <p:nvSpPr>
+          <p:cNvPr id="11" name="TextBox 10"/>
+          <p:cNvSpPr txBox="1"/>
+          <p:nvPr/>
+        </p:nvSpPr>
+        <p:spPr>
+          <a:xfrm>
+            <a:off x="1234440" y="3991356"/>
+            <a:ext cx="10408615" cy="1030986"/>
+          </a:xfrm>
+          <a:prstGeom prst="rect">
+            <a:avLst/>
+          </a:prstGeom>
+          <a:noFill/>
+        </p:spPr>
+        <p:txBody>
+          <a:bodyPr wrap="square" anchor="t" lIns="0" rIns="0" tIns="0" bIns="0"/>
+          <a:lstStyle/>
+          <a:p>
+            <a:pPr algn="l"/>
+            <a:r>
+              <a:rPr sz="2200" b="0" i="0">
+                <a:solidFill>
+                  <a:srgbClr val="202122"/>
+                </a:solidFill>
+                <a:latin typeface="Calibri"/>
+              </a:rPr>
+              <a:t>Name two written formats for communicating with users.</a:t>
+            </a:r>
+          </a:p>
+        </p:txBody>
+      </p:sp>
+      <p:sp>
+        <p:nvSpPr>
+          <p:cNvPr id="12" name="Oval 11"/>
+          <p:cNvSpPr/>
+          <p:nvPr/>
+        </p:nvSpPr>
+        <p:spPr>
+          <a:xfrm>
+            <a:off x="548640" y="5205221"/>
+            <a:ext cx="411480" cy="411480"/>
+          </a:xfrm>
+          <a:prstGeom prst="ellipse">
+            <a:avLst/>
+          </a:prstGeom>
+          <a:solidFill>
+            <a:srgbClr val="33C17A"/>
+          </a:solidFill>
+          <a:ln>
+            <a:noFill/>
+          </a:ln>
+          <a:effectLst/>
+        </p:spPr>
+        <p:style>
+          <a:lnRef idx="1">
+            <a:schemeClr val="accent1"/>
+          </a:lnRef>
+          <a:fillRef idx="3">
+            <a:schemeClr val="accent1"/>
+          </a:fillRef>
+          <a:effectRef idx="2">
+            <a:schemeClr val="accent1"/>
+          </a:effectRef>
+          <a:fontRef idx="minor">
+            <a:schemeClr val="lt1"/>
+          </a:fontRef>
+        </p:style>
+        <p:txBody>
+          <a:bodyPr rtlCol="0" anchor="ctr" lIns="0" rIns="0" tIns="0" bIns="0"/>
+          <a:lstStyle/>
+          <a:p>
+            <a:pPr algn="ctr"/>
+            <a:r>
+              <a:rPr sz="1400" b="1">
+                <a:solidFill>
+                  <a:srgbClr val="202122"/>
+                </a:solidFill>
+                <a:latin typeface="Calibri"/>
+              </a:rPr>
+              <a:t>4</a:t>
+            </a:r>
+          </a:p>
+        </p:txBody>
+      </p:sp>
+      <p:sp>
+        <p:nvSpPr>
+          <p:cNvPr id="13" name="TextBox 12"/>
+          <p:cNvSpPr txBox="1"/>
+          <p:nvPr/>
+        </p:nvSpPr>
+        <p:spPr>
+          <a:xfrm>
+            <a:off x="1234440" y="5186933"/>
+            <a:ext cx="10408615" cy="1030986"/>
+          </a:xfrm>
+          <a:prstGeom prst="rect">
+            <a:avLst/>
+          </a:prstGeom>
+          <a:noFill/>
+        </p:spPr>
+        <p:txBody>
+          <a:bodyPr wrap="square" anchor="t" lIns="0" rIns="0" tIns="0" bIns="0"/>
+          <a:lstStyle/>
+          <a:p>
+            <a:pPr algn="l"/>
+            <a:r>
+              <a:rPr sz="2200" b="0" i="0">
+                <a:solidFill>
+                  <a:srgbClr val="202122"/>
+                </a:solidFill>
+                <a:latin typeface="Calibri"/>
+              </a:rPr>
+              <a:t>What is the first step in resolving a user issue?</a:t>
+            </a:r>
+          </a:p>
+        </p:txBody>
+      </p:sp>
+    </p:spTree>
+  </p:cSld>
+  <p:clrMapOvr>
+    <a:masterClrMapping/>
+  </p:clrMapOvr>
+</p:sld>
+</file>
+
+<file path=ppt/slides/slide14.xml><?xml version="1.0" encoding="utf-8"?>
+<p:sld xmlns:a="http://schemas.openxmlformats.org/drawingml/2006/main" xmlns:p="http://schemas.openxmlformats.org/presentationml/2006/main" xmlns:r="http://schemas.openxmlformats.org/officeDocument/2006/relationships">
+  <p:cSld>
+    <p:bg>
+      <p:bgPr>
+        <a:solidFill>
+          <a:srgbClr val="FFFFFF"/>
+        </a:solidFill>
+        <a:effectLst/>
+      </p:bgPr>
+    </p:bg>
+    <p:spTree>
+      <p:nvGrpSpPr>
+        <p:cNvPr id="1" name=""/>
+        <p:cNvGrpSpPr/>
+        <p:nvPr/>
+      </p:nvGrpSpPr>
+      <p:grpSpPr/>
+      <p:sp>
+        <p:nvSpPr>
+          <p:cNvPr id="2" name="TextBox 1"/>
+          <p:cNvSpPr txBox="1"/>
+          <p:nvPr/>
+        </p:nvSpPr>
+        <p:spPr>
+          <a:xfrm>
+            <a:off x="548640" y="320040"/>
+            <a:ext cx="11094415" cy="274320"/>
+          </a:xfrm>
+          <a:prstGeom prst="rect">
+            <a:avLst/>
+          </a:prstGeom>
+          <a:noFill/>
+        </p:spPr>
+        <p:txBody>
+          <a:bodyPr wrap="square" anchor="t" lIns="0" rIns="0" tIns="0" bIns="0"/>
+          <a:lstStyle/>
+          <a:p>
+            <a:pPr algn="l"/>
+            <a:r>
+              <a:rPr sz="1100" b="1" i="0">
+                <a:solidFill>
+                  <a:srgbClr val="54595D"/>
+                </a:solidFill>
+                <a:latin typeface="Calibri"/>
+              </a:rPr>
+              <a:t>OCCUPATIONAL SPECIALISM  ·  Specialism Content Area 8</a:t>
+            </a:r>
+          </a:p>
+        </p:txBody>
+      </p:sp>
+      <p:sp>
+        <p:nvSpPr>
+          <p:cNvPr id="3" name="TextBox 2"/>
+          <p:cNvSpPr txBox="1"/>
+          <p:nvPr/>
+        </p:nvSpPr>
+        <p:spPr>
+          <a:xfrm>
+            <a:off x="548640" y="566928"/>
+            <a:ext cx="11094415" cy="822960"/>
+          </a:xfrm>
+          <a:prstGeom prst="rect">
+            <a:avLst/>
+          </a:prstGeom>
+          <a:noFill/>
+        </p:spPr>
+        <p:txBody>
+          <a:bodyPr wrap="square" anchor="ctr" lIns="0" rIns="0" tIns="0" bIns="0"/>
+          <a:lstStyle/>
+          <a:p>
+            <a:pPr algn="l"/>
+            <a:r>
+              <a:rPr sz="3200" b="1" i="0">
+                <a:solidFill>
+                  <a:srgbClr val="03306E"/>
+                </a:solidFill>
+                <a:latin typeface="Cambria"/>
+              </a:rPr>
+              <a:t>Answers</a:t>
+            </a:r>
+          </a:p>
+        </p:txBody>
+      </p:sp>
+      <p:sp>
+        <p:nvSpPr>
+          <p:cNvPr id="4" name="TextBox 3"/>
+          <p:cNvSpPr txBox="1"/>
+          <p:nvPr/>
+        </p:nvSpPr>
+        <p:spPr>
+          <a:xfrm>
+            <a:off x="548640" y="6446520"/>
+            <a:ext cx="8229600" cy="274320"/>
+          </a:xfrm>
+          <a:prstGeom prst="rect">
+            <a:avLst/>
+          </a:prstGeom>
+          <a:noFill/>
+        </p:spPr>
+        <p:txBody>
+          <a:bodyPr wrap="square" anchor="t" lIns="0" rIns="0" tIns="0" bIns="0"/>
+          <a:lstStyle/>
+          <a:p>
+            <a:pPr algn="l"/>
+            <a:r>
+              <a:rPr sz="1000" b="0" i="0">
+                <a:solidFill>
+                  <a:srgbClr val="54595D"/>
+                </a:solidFill>
+                <a:latin typeface="Calibri"/>
+              </a:rPr>
+              <a:t>Digital Software Development T Level  ·  Change, Maintain and Support Software</a:t>
+            </a:r>
+          </a:p>
+        </p:txBody>
+      </p:sp>
+      <p:sp>
+        <p:nvSpPr>
+          <p:cNvPr id="5" name="TextBox 4"/>
+          <p:cNvSpPr txBox="1"/>
+          <p:nvPr/>
+        </p:nvSpPr>
+        <p:spPr>
+          <a:xfrm>
+            <a:off x="10728655" y="6446520"/>
+            <a:ext cx="914400" cy="274320"/>
+          </a:xfrm>
+          <a:prstGeom prst="rect">
+            <a:avLst/>
+          </a:prstGeom>
+          <a:noFill/>
+        </p:spPr>
+        <p:txBody>
+          <a:bodyPr wrap="square" anchor="t" lIns="0" rIns="0" tIns="0" bIns="0"/>
+          <a:lstStyle/>
+          <a:p>
+            <a:pPr algn="r"/>
+            <a:r>
+              <a:rPr sz="1000" b="0" i="0">
+                <a:solidFill>
+                  <a:srgbClr val="54595D"/>
+                </a:solidFill>
+                <a:latin typeface="Calibri"/>
+              </a:rPr>
+              <a:t>14</a:t>
+            </a:r>
+          </a:p>
+        </p:txBody>
+      </p:sp>
+      <p:sp>
+        <p:nvSpPr>
+          <p:cNvPr id="6" name="Oval 5"/>
+          <p:cNvSpPr/>
+          <p:nvPr/>
+        </p:nvSpPr>
+        <p:spPr>
+          <a:xfrm>
+            <a:off x="548640" y="1618488"/>
+            <a:ext cx="411480" cy="411480"/>
+          </a:xfrm>
+          <a:prstGeom prst="ellipse">
+            <a:avLst/>
+          </a:prstGeom>
+          <a:solidFill>
+            <a:srgbClr val="33C17A"/>
+          </a:solidFill>
+          <a:ln>
+            <a:noFill/>
+          </a:ln>
+          <a:effectLst/>
+        </p:spPr>
+        <p:style>
+          <a:lnRef idx="1">
+            <a:schemeClr val="accent1"/>
+          </a:lnRef>
+          <a:fillRef idx="3">
+            <a:schemeClr val="accent1"/>
+          </a:fillRef>
+          <a:effectRef idx="2">
+            <a:schemeClr val="accent1"/>
+          </a:effectRef>
+          <a:fontRef idx="minor">
+            <a:schemeClr val="lt1"/>
+          </a:fontRef>
+        </p:style>
+        <p:txBody>
+          <a:bodyPr rtlCol="0" anchor="ctr" lIns="0" rIns="0" tIns="0" bIns="0"/>
+          <a:lstStyle/>
+          <a:p>
+            <a:pPr algn="ctr"/>
+            <a:r>
+              <a:rPr sz="1400" b="1">
+                <a:solidFill>
+                  <a:srgbClr val="202122"/>
+                </a:solidFill>
+                <a:latin typeface="Calibri"/>
+              </a:rPr>
+              <a:t>1</a:t>
+            </a:r>
+          </a:p>
+        </p:txBody>
+      </p:sp>
+      <p:sp>
+        <p:nvSpPr>
+          <p:cNvPr id="7" name="TextBox 6"/>
+          <p:cNvSpPr txBox="1"/>
+          <p:nvPr/>
+        </p:nvSpPr>
+        <p:spPr>
+          <a:xfrm>
+            <a:off x="1234440" y="1600200"/>
+            <a:ext cx="10408615" cy="1030986"/>
+          </a:xfrm>
+          <a:prstGeom prst="rect">
+            <a:avLst/>
+          </a:prstGeom>
+          <a:noFill/>
+        </p:spPr>
+        <p:txBody>
+          <a:bodyPr wrap="square" anchor="t" lIns="0" rIns="0" tIns="0" bIns="0"/>
+          <a:lstStyle/>
+          <a:p>
+            <a:pPr algn="l"/>
+            <a:r>
+              <a:rPr sz="1800" b="0" i="0">
+                <a:solidFill>
+                  <a:srgbClr val="54595D"/>
+                </a:solidFill>
+                <a:latin typeface="Calibri"/>
+              </a:rPr>
+              <a:t>Fixing a zero-day vulnerability is which type of change?</a:t>
+            </a:r>
+          </a:p>
+          <a:p>
+            <a:r>
+              <a:rPr sz="1800" b="1">
+                <a:solidFill>
+                  <a:srgbClr val="03306E"/>
+                </a:solidFill>
+                <a:latin typeface="Calibri"/>
+              </a:rPr>
+              <a:t>Correcting.</a:t>
+            </a:r>
+          </a:p>
+        </p:txBody>
+      </p:sp>
+      <p:sp>
+        <p:nvSpPr>
+          <p:cNvPr id="8" name="Oval 7"/>
+          <p:cNvSpPr/>
+          <p:nvPr/>
+        </p:nvSpPr>
+        <p:spPr>
+          <a:xfrm>
+            <a:off x="548640" y="2814066"/>
+            <a:ext cx="411480" cy="411480"/>
+          </a:xfrm>
+          <a:prstGeom prst="ellipse">
+            <a:avLst/>
+          </a:prstGeom>
+          <a:solidFill>
+            <a:srgbClr val="33C17A"/>
+          </a:solidFill>
+          <a:ln>
+            <a:noFill/>
+          </a:ln>
+          <a:effectLst/>
+        </p:spPr>
+        <p:style>
+          <a:lnRef idx="1">
+            <a:schemeClr val="accent1"/>
+          </a:lnRef>
+          <a:fillRef idx="3">
+            <a:schemeClr val="accent1"/>
+          </a:fillRef>
+          <a:effectRef idx="2">
+            <a:schemeClr val="accent1"/>
+          </a:effectRef>
+          <a:fontRef idx="minor">
+            <a:schemeClr val="lt1"/>
+          </a:fontRef>
+        </p:style>
+        <p:txBody>
+          <a:bodyPr rtlCol="0" anchor="ctr" lIns="0" rIns="0" tIns="0" bIns="0"/>
+          <a:lstStyle/>
+          <a:p>
+            <a:pPr algn="ctr"/>
+            <a:r>
+              <a:rPr sz="1400" b="1">
+                <a:solidFill>
+                  <a:srgbClr val="202122"/>
+                </a:solidFill>
+                <a:latin typeface="Calibri"/>
+              </a:rPr>
+              <a:t>2</a:t>
+            </a:r>
+          </a:p>
+        </p:txBody>
+      </p:sp>
+      <p:sp>
+        <p:nvSpPr>
+          <p:cNvPr id="9" name="TextBox 8"/>
+          <p:cNvSpPr txBox="1"/>
+          <p:nvPr/>
+        </p:nvSpPr>
+        <p:spPr>
+          <a:xfrm>
+            <a:off x="1234440" y="2795778"/>
+            <a:ext cx="10408615" cy="1030986"/>
+          </a:xfrm>
+          <a:prstGeom prst="rect">
+            <a:avLst/>
+          </a:prstGeom>
+          <a:noFill/>
+        </p:spPr>
+        <p:txBody>
+          <a:bodyPr wrap="square" anchor="t" lIns="0" rIns="0" tIns="0" bIns="0"/>
+          <a:lstStyle/>
+          <a:p>
+            <a:pPr algn="l"/>
+            <a:r>
+              <a:rPr sz="1800" b="0" i="0">
+                <a:solidFill>
+                  <a:srgbClr val="54595D"/>
+                </a:solidFill>
+                <a:latin typeface="Calibri"/>
+              </a:rPr>
+              <a:t>Why is regression testing part of change management?</a:t>
+            </a:r>
+          </a:p>
+          <a:p>
+            <a:r>
+              <a:rPr sz="1800" b="1">
+                <a:solidFill>
+                  <a:srgbClr val="03306E"/>
+                </a:solidFill>
+                <a:latin typeface="Calibri"/>
+              </a:rPr>
+              <a:t>To make sure the change hasn't broken other features.</a:t>
+            </a:r>
+          </a:p>
+        </p:txBody>
+      </p:sp>
+      <p:sp>
+        <p:nvSpPr>
+          <p:cNvPr id="10" name="Oval 9"/>
+          <p:cNvSpPr/>
+          <p:nvPr/>
+        </p:nvSpPr>
+        <p:spPr>
+          <a:xfrm>
+            <a:off x="548640" y="4009644"/>
+            <a:ext cx="411480" cy="411480"/>
+          </a:xfrm>
+          <a:prstGeom prst="ellipse">
+            <a:avLst/>
+          </a:prstGeom>
+          <a:solidFill>
+            <a:srgbClr val="33C17A"/>
+          </a:solidFill>
+          <a:ln>
+            <a:noFill/>
+          </a:ln>
+          <a:effectLst/>
+        </p:spPr>
+        <p:style>
+          <a:lnRef idx="1">
+            <a:schemeClr val="accent1"/>
+          </a:lnRef>
+          <a:fillRef idx="3">
+            <a:schemeClr val="accent1"/>
+          </a:fillRef>
+          <a:effectRef idx="2">
+            <a:schemeClr val="accent1"/>
+          </a:effectRef>
+          <a:fontRef idx="minor">
+            <a:schemeClr val="lt1"/>
+          </a:fontRef>
+        </p:style>
+        <p:txBody>
+          <a:bodyPr rtlCol="0" anchor="ctr" lIns="0" rIns="0" tIns="0" bIns="0"/>
+          <a:lstStyle/>
+          <a:p>
+            <a:pPr algn="ctr"/>
+            <a:r>
+              <a:rPr sz="1400" b="1">
+                <a:solidFill>
+                  <a:srgbClr val="202122"/>
+                </a:solidFill>
+                <a:latin typeface="Calibri"/>
+              </a:rPr>
+              <a:t>3</a:t>
+            </a:r>
+          </a:p>
+        </p:txBody>
+      </p:sp>
+      <p:sp>
+        <p:nvSpPr>
+          <p:cNvPr id="11" name="TextBox 10"/>
+          <p:cNvSpPr txBox="1"/>
+          <p:nvPr/>
+        </p:nvSpPr>
+        <p:spPr>
+          <a:xfrm>
+            <a:off x="1234440" y="3991356"/>
+            <a:ext cx="10408615" cy="1030986"/>
+          </a:xfrm>
+          <a:prstGeom prst="rect">
+            <a:avLst/>
+          </a:prstGeom>
+          <a:noFill/>
+        </p:spPr>
+        <p:txBody>
+          <a:bodyPr wrap="square" anchor="t" lIns="0" rIns="0" tIns="0" bIns="0"/>
+          <a:lstStyle/>
+          <a:p>
+            <a:pPr algn="l"/>
+            <a:r>
+              <a:rPr sz="1800" b="0" i="0">
+                <a:solidFill>
+                  <a:srgbClr val="54595D"/>
+                </a:solidFill>
+                <a:latin typeface="Calibri"/>
+              </a:rPr>
+              <a:t>Name two written formats for communicating with users.</a:t>
+            </a:r>
+          </a:p>
+          <a:p>
+            <a:r>
+              <a:rPr sz="1800" b="1">
+                <a:solidFill>
+                  <a:srgbClr val="03306E"/>
+                </a:solidFill>
+                <a:latin typeface="Calibri"/>
+              </a:rPr>
+              <a:t>Any two of: blogs, reports, technical documentation, release notes, user guides, FAQs.</a:t>
+            </a:r>
+          </a:p>
+        </p:txBody>
+      </p:sp>
+      <p:sp>
+        <p:nvSpPr>
+          <p:cNvPr id="12" name="Oval 11"/>
+          <p:cNvSpPr/>
+          <p:nvPr/>
+        </p:nvSpPr>
+        <p:spPr>
+          <a:xfrm>
+            <a:off x="548640" y="5205221"/>
+            <a:ext cx="411480" cy="411480"/>
+          </a:xfrm>
+          <a:prstGeom prst="ellipse">
+            <a:avLst/>
+          </a:prstGeom>
+          <a:solidFill>
+            <a:srgbClr val="33C17A"/>
+          </a:solidFill>
+          <a:ln>
+            <a:noFill/>
+          </a:ln>
+          <a:effectLst/>
+        </p:spPr>
+        <p:style>
+          <a:lnRef idx="1">
+            <a:schemeClr val="accent1"/>
+          </a:lnRef>
+          <a:fillRef idx="3">
+            <a:schemeClr val="accent1"/>
+          </a:fillRef>
+          <a:effectRef idx="2">
+            <a:schemeClr val="accent1"/>
+          </a:effectRef>
+          <a:fontRef idx="minor">
+            <a:schemeClr val="lt1"/>
+          </a:fontRef>
+        </p:style>
+        <p:txBody>
+          <a:bodyPr rtlCol="0" anchor="ctr" lIns="0" rIns="0" tIns="0" bIns="0"/>
+          <a:lstStyle/>
+          <a:p>
+            <a:pPr algn="ctr"/>
+            <a:r>
+              <a:rPr sz="1400" b="1">
+                <a:solidFill>
+                  <a:srgbClr val="202122"/>
+                </a:solidFill>
+                <a:latin typeface="Calibri"/>
+              </a:rPr>
+              <a:t>4</a:t>
+            </a:r>
+          </a:p>
+        </p:txBody>
+      </p:sp>
+      <p:sp>
+        <p:nvSpPr>
+          <p:cNvPr id="13" name="TextBox 12"/>
+          <p:cNvSpPr txBox="1"/>
+          <p:nvPr/>
+        </p:nvSpPr>
+        <p:spPr>
+          <a:xfrm>
+            <a:off x="1234440" y="5186933"/>
+            <a:ext cx="10408615" cy="1030986"/>
+          </a:xfrm>
+          <a:prstGeom prst="rect">
+            <a:avLst/>
+          </a:prstGeom>
+          <a:noFill/>
+        </p:spPr>
+        <p:txBody>
+          <a:bodyPr wrap="square" anchor="t" lIns="0" rIns="0" tIns="0" bIns="0"/>
+          <a:lstStyle/>
+          <a:p>
+            <a:pPr algn="l"/>
+            <a:r>
+              <a:rPr sz="1800" b="0" i="0">
+                <a:solidFill>
+                  <a:srgbClr val="54595D"/>
+                </a:solidFill>
+                <a:latin typeface="Calibri"/>
+              </a:rPr>
+              <a:t>What is the first step in resolving a user issue?</a:t>
+            </a:r>
+          </a:p>
+          <a:p>
+            <a:r>
+              <a:rPr sz="1800" b="1">
+                <a:solidFill>
+                  <a:srgbClr val="03306E"/>
+                </a:solidFill>
+                <a:latin typeface="Calibri"/>
+              </a:rPr>
+              <a:t>Identify or replicate it.</a:t>
+            </a:r>
+          </a:p>
+        </p:txBody>
+      </p:sp>
+    </p:spTree>
+  </p:cSld>
+  <p:clrMapOvr>
+    <a:masterClrMapping/>
+  </p:clrMapOvr>
+</p:sld>
+</file>
+
+<file path=ppt/slides/slide15.xml><?xml version="1.0" encoding="utf-8"?>
+<p:sld xmlns:a="http://schemas.openxmlformats.org/drawingml/2006/main" xmlns:p="http://schemas.openxmlformats.org/presentationml/2006/main" xmlns:r="http://schemas.openxmlformats.org/officeDocument/2006/relationships">
+  <p:cSld>
+    <p:bg>
+      <p:bgPr>
+        <a:solidFill>
+          <a:srgbClr val="FFFFFF"/>
+        </a:solidFill>
+        <a:effectLst/>
+      </p:bgPr>
+    </p:bg>
+    <p:spTree>
+      <p:nvGrpSpPr>
+        <p:cNvPr id="1" name=""/>
+        <p:cNvGrpSpPr/>
+        <p:nvPr/>
+      </p:nvGrpSpPr>
+      <p:grpSpPr/>
+      <p:sp>
+        <p:nvSpPr>
+          <p:cNvPr id="2" name="TextBox 1"/>
+          <p:cNvSpPr txBox="1"/>
+          <p:nvPr/>
+        </p:nvSpPr>
+        <p:spPr>
+          <a:xfrm>
+            <a:off x="548640" y="320040"/>
+            <a:ext cx="11094415" cy="274320"/>
+          </a:xfrm>
+          <a:prstGeom prst="rect">
+            <a:avLst/>
+          </a:prstGeom>
+          <a:noFill/>
+        </p:spPr>
+        <p:txBody>
+          <a:bodyPr wrap="square" anchor="t" lIns="0" rIns="0" tIns="0" bIns="0"/>
+          <a:lstStyle/>
+          <a:p>
+            <a:pPr algn="l"/>
+            <a:r>
+              <a:rPr sz="1100" b="1" i="0">
+                <a:solidFill>
+                  <a:srgbClr val="54595D"/>
+                </a:solidFill>
+                <a:latin typeface="Calibri"/>
+              </a:rPr>
+              <a:t>OCCUPATIONAL SPECIALISM  ·  Specialism Content Area 8</a:t>
+            </a:r>
+          </a:p>
+        </p:txBody>
+      </p:sp>
+      <p:sp>
+        <p:nvSpPr>
+          <p:cNvPr id="3" name="TextBox 2"/>
+          <p:cNvSpPr txBox="1"/>
+          <p:nvPr/>
+        </p:nvSpPr>
+        <p:spPr>
+          <a:xfrm>
+            <a:off x="548640" y="566928"/>
+            <a:ext cx="11094415" cy="822960"/>
+          </a:xfrm>
+          <a:prstGeom prst="rect">
+            <a:avLst/>
+          </a:prstGeom>
+          <a:noFill/>
+        </p:spPr>
+        <p:txBody>
+          <a:bodyPr wrap="square" anchor="ctr" lIns="0" rIns="0" tIns="0" bIns="0"/>
+          <a:lstStyle/>
+          <a:p>
+            <a:pPr algn="l"/>
+            <a:r>
+              <a:rPr sz="3200" b="1" i="0">
+                <a:solidFill>
+                  <a:srgbClr val="03306E"/>
+                </a:solidFill>
+                <a:latin typeface="Cambria"/>
+              </a:rPr>
+              <a:t>Activity: Release notes and support</a:t>
+            </a:r>
+          </a:p>
+        </p:txBody>
+      </p:sp>
+      <p:sp>
+        <p:nvSpPr>
+          <p:cNvPr id="4" name="TextBox 3"/>
+          <p:cNvSpPr txBox="1"/>
+          <p:nvPr/>
+        </p:nvSpPr>
+        <p:spPr>
+          <a:xfrm>
+            <a:off x="548640" y="6446520"/>
+            <a:ext cx="8229600" cy="274320"/>
+          </a:xfrm>
+          <a:prstGeom prst="rect">
+            <a:avLst/>
+          </a:prstGeom>
+          <a:noFill/>
+        </p:spPr>
+        <p:txBody>
+          <a:bodyPr wrap="square" anchor="t" lIns="0" rIns="0" tIns="0" bIns="0"/>
+          <a:lstStyle/>
+          <a:p>
+            <a:pPr algn="l"/>
+            <a:r>
+              <a:rPr sz="1000" b="0" i="0">
+                <a:solidFill>
+                  <a:srgbClr val="54595D"/>
+                </a:solidFill>
+                <a:latin typeface="Calibri"/>
+              </a:rPr>
+              <a:t>Digital Software Development T Level  ·  Change, Maintain and Support Software</a:t>
+            </a:r>
+          </a:p>
+        </p:txBody>
+      </p:sp>
+      <p:sp>
+        <p:nvSpPr>
+          <p:cNvPr id="5" name="TextBox 4"/>
+          <p:cNvSpPr txBox="1"/>
+          <p:nvPr/>
+        </p:nvSpPr>
+        <p:spPr>
+          <a:xfrm>
+            <a:off x="10728655" y="6446520"/>
+            <a:ext cx="914400" cy="274320"/>
+          </a:xfrm>
+          <a:prstGeom prst="rect">
+            <a:avLst/>
+          </a:prstGeom>
+          <a:noFill/>
+        </p:spPr>
+        <p:txBody>
+          <a:bodyPr wrap="square" anchor="t" lIns="0" rIns="0" tIns="0" bIns="0"/>
+          <a:lstStyle/>
+          <a:p>
+            <a:pPr algn="r"/>
+            <a:r>
+              <a:rPr sz="1000" b="0" i="0">
+                <a:solidFill>
+                  <a:srgbClr val="54595D"/>
+                </a:solidFill>
+                <a:latin typeface="Calibri"/>
+              </a:rPr>
+              <a:t>15</a:t>
+            </a:r>
+          </a:p>
+        </p:txBody>
+      </p:sp>
+      <p:sp>
+        <p:nvSpPr>
+          <p:cNvPr id="6" name="Rounded Rectangle 5"/>
+          <p:cNvSpPr/>
+          <p:nvPr/>
+        </p:nvSpPr>
+        <p:spPr>
+          <a:xfrm>
+            <a:off x="548640" y="1508760"/>
+            <a:ext cx="2011680" cy="457200"/>
+          </a:xfrm>
+          <a:prstGeom prst="roundRect">
+            <a:avLst>
+              <a:gd name="adj" fmla="val 50000"/>
+            </a:avLst>
+          </a:prstGeom>
+          <a:solidFill>
+            <a:srgbClr val="33C17A"/>
+          </a:solidFill>
+          <a:ln>
+            <a:noFill/>
+          </a:ln>
+          <a:effectLst/>
+        </p:spPr>
+        <p:style>
+          <a:lnRef idx="1">
+            <a:schemeClr val="accent1"/>
+          </a:lnRef>
+          <a:fillRef idx="3">
+            <a:schemeClr val="accent1"/>
+          </a:fillRef>
+          <a:effectRef idx="2">
+            <a:schemeClr val="accent1"/>
+          </a:effectRef>
+          <a:fontRef idx="minor">
+            <a:schemeClr val="lt1"/>
+          </a:fontRef>
+        </p:style>
+        <p:txBody>
+          <a:bodyPr rtlCol="0" anchor="ctr"/>
+          <a:lstStyle/>
+          <a:p/>
+        </p:txBody>
+      </p:sp>
+      <p:sp>
+        <p:nvSpPr>
+          <p:cNvPr id="7" name="TextBox 6"/>
+          <p:cNvSpPr txBox="1"/>
+          <p:nvPr/>
+        </p:nvSpPr>
+        <p:spPr>
+          <a:xfrm>
+            <a:off x="548640" y="1508760"/>
+            <a:ext cx="2011680" cy="457200"/>
+          </a:xfrm>
+          <a:prstGeom prst="rect">
+            <a:avLst/>
+          </a:prstGeom>
+          <a:noFill/>
+        </p:spPr>
+        <p:txBody>
+          <a:bodyPr wrap="square" anchor="ctr" lIns="0" rIns="0" tIns="0" bIns="0"/>
+          <a:lstStyle/>
+          <a:p>
+            <a:pPr algn="ctr"/>
+            <a:r>
+              <a:rPr sz="1400" b="1" i="0">
+                <a:solidFill>
+                  <a:srgbClr val="202122"/>
+                </a:solidFill>
+                <a:latin typeface="Calibri"/>
+              </a:rPr>
+              <a:t>30 minutes</a:t>
+            </a:r>
+          </a:p>
+        </p:txBody>
+      </p:sp>
+      <p:sp>
+        <p:nvSpPr>
+          <p:cNvPr id="8" name="TextBox 7"/>
+          <p:cNvSpPr txBox="1"/>
+          <p:nvPr/>
+        </p:nvSpPr>
+        <p:spPr>
+          <a:xfrm>
+            <a:off x="2743200" y="1508760"/>
+            <a:ext cx="4754880" cy="457200"/>
+          </a:xfrm>
+          <a:prstGeom prst="rect">
+            <a:avLst/>
+          </a:prstGeom>
+          <a:noFill/>
+        </p:spPr>
+        <p:txBody>
+          <a:bodyPr wrap="square" anchor="ctr" lIns="0" rIns="0" tIns="0" bIns="0"/>
+          <a:lstStyle/>
+          <a:p>
+            <a:pPr algn="l"/>
+            <a:r>
+              <a:rPr sz="1400" b="0" i="1">
+                <a:solidFill>
+                  <a:srgbClr val="54595D"/>
+                </a:solidFill>
+                <a:latin typeface="Calibri"/>
+              </a:rPr>
+              <a:t>Pairs</a:t>
+            </a:r>
+          </a:p>
+        </p:txBody>
+      </p:sp>
+      <p:sp>
+        <p:nvSpPr>
+          <p:cNvPr id="9" name="Oval 8"/>
+          <p:cNvSpPr/>
+          <p:nvPr/>
+        </p:nvSpPr>
+        <p:spPr>
+          <a:xfrm>
+            <a:off x="548640" y="2482596"/>
+            <a:ext cx="384048" cy="384048"/>
+          </a:xfrm>
+          <a:prstGeom prst="ellipse">
+            <a:avLst/>
+          </a:prstGeom>
+          <a:solidFill>
+            <a:srgbClr val="0645AD"/>
+          </a:solidFill>
+          <a:ln>
+            <a:noFill/>
+          </a:ln>
+          <a:effectLst/>
+        </p:spPr>
+        <p:style>
+          <a:lnRef idx="1">
+            <a:schemeClr val="accent1"/>
+          </a:lnRef>
+          <a:fillRef idx="3">
+            <a:schemeClr val="accent1"/>
+          </a:fillRef>
+          <a:effectRef idx="2">
+            <a:schemeClr val="accent1"/>
+          </a:effectRef>
+          <a:fontRef idx="minor">
+            <a:schemeClr val="lt1"/>
+          </a:fontRef>
+        </p:style>
+        <p:txBody>
+          <a:bodyPr rtlCol="0" anchor="ctr" lIns="0" rIns="0" tIns="0" bIns="0"/>
+          <a:lstStyle/>
+          <a:p>
+            <a:pPr algn="ctr"/>
+            <a:r>
+              <a:rPr sz="1300" b="1">
+                <a:solidFill>
+                  <a:srgbClr val="FFFFFF"/>
+                </a:solidFill>
+                <a:latin typeface="Calibri"/>
+              </a:rPr>
+              <a:t>1</a:t>
+            </a:r>
+          </a:p>
+        </p:txBody>
+      </p:sp>
+      <p:sp>
+        <p:nvSpPr>
+          <p:cNvPr id="10" name="TextBox 9"/>
+          <p:cNvSpPr txBox="1"/>
+          <p:nvPr/>
+        </p:nvSpPr>
+        <p:spPr>
+          <a:xfrm>
+            <a:off x="1143000" y="2240280"/>
+            <a:ext cx="5943600" cy="868680"/>
+          </a:xfrm>
+          <a:prstGeom prst="rect">
+            <a:avLst/>
+          </a:prstGeom>
+          <a:noFill/>
+        </p:spPr>
+        <p:txBody>
+          <a:bodyPr wrap="square" anchor="ctr" lIns="0" rIns="0" tIns="0" bIns="0"/>
+          <a:lstStyle/>
+          <a:p>
+            <a:pPr algn="l"/>
+            <a:r>
+              <a:rPr sz="1700" b="0" i="0">
+                <a:solidFill>
+                  <a:srgbClr val="202122"/>
+                </a:solidFill>
+                <a:latin typeface="Calibri"/>
+              </a:rPr>
+              <a:t>Your teacher gives you a bug report and a code change.</a:t>
+            </a:r>
+          </a:p>
+        </p:txBody>
+      </p:sp>
+      <p:sp>
+        <p:nvSpPr>
+          <p:cNvPr id="11" name="Oval 10"/>
+          <p:cNvSpPr/>
+          <p:nvPr/>
+        </p:nvSpPr>
+        <p:spPr>
+          <a:xfrm>
+            <a:off x="548640" y="3461004"/>
+            <a:ext cx="384048" cy="384048"/>
+          </a:xfrm>
+          <a:prstGeom prst="ellipse">
+            <a:avLst/>
+          </a:prstGeom>
+          <a:solidFill>
+            <a:srgbClr val="0645AD"/>
+          </a:solidFill>
+          <a:ln>
+            <a:noFill/>
+          </a:ln>
+          <a:effectLst/>
+        </p:spPr>
+        <p:style>
+          <a:lnRef idx="1">
+            <a:schemeClr val="accent1"/>
+          </a:lnRef>
+          <a:fillRef idx="3">
+            <a:schemeClr val="accent1"/>
+          </a:fillRef>
+          <a:effectRef idx="2">
+            <a:schemeClr val="accent1"/>
+          </a:effectRef>
+          <a:fontRef idx="minor">
+            <a:schemeClr val="lt1"/>
+          </a:fontRef>
+        </p:style>
+        <p:txBody>
+          <a:bodyPr rtlCol="0" anchor="ctr" lIns="0" rIns="0" tIns="0" bIns="0"/>
+          <a:lstStyle/>
+          <a:p>
+            <a:pPr algn="ctr"/>
+            <a:r>
+              <a:rPr sz="1300" b="1">
+                <a:solidFill>
+                  <a:srgbClr val="FFFFFF"/>
+                </a:solidFill>
+                <a:latin typeface="Calibri"/>
+              </a:rPr>
+              <a:t>2</a:t>
+            </a:r>
+          </a:p>
+        </p:txBody>
+      </p:sp>
+      <p:sp>
+        <p:nvSpPr>
+          <p:cNvPr id="12" name="TextBox 11"/>
+          <p:cNvSpPr txBox="1"/>
+          <p:nvPr/>
+        </p:nvSpPr>
+        <p:spPr>
+          <a:xfrm>
+            <a:off x="1143000" y="3218688"/>
+            <a:ext cx="5943600" cy="868680"/>
+          </a:xfrm>
+          <a:prstGeom prst="rect">
+            <a:avLst/>
+          </a:prstGeom>
+          <a:noFill/>
+        </p:spPr>
+        <p:txBody>
+          <a:bodyPr wrap="square" anchor="ctr" lIns="0" rIns="0" tIns="0" bIns="0"/>
+          <a:lstStyle/>
+          <a:p>
+            <a:pPr algn="l"/>
+            <a:r>
+              <a:rPr sz="1700" b="0" i="0">
+                <a:solidFill>
+                  <a:srgbClr val="202122"/>
+                </a:solidFill>
+                <a:latin typeface="Calibri"/>
+              </a:rPr>
+              <a:t>Replicate the bug, fix it and add a change log entry.</a:t>
+            </a:r>
+          </a:p>
+        </p:txBody>
+      </p:sp>
+      <p:sp>
+        <p:nvSpPr>
+          <p:cNvPr id="13" name="Oval 12"/>
+          <p:cNvSpPr/>
+          <p:nvPr/>
+        </p:nvSpPr>
+        <p:spPr>
+          <a:xfrm>
+            <a:off x="548640" y="4439412"/>
+            <a:ext cx="384048" cy="384048"/>
+          </a:xfrm>
+          <a:prstGeom prst="ellipse">
+            <a:avLst/>
+          </a:prstGeom>
+          <a:solidFill>
+            <a:srgbClr val="0645AD"/>
+          </a:solidFill>
+          <a:ln>
+            <a:noFill/>
+          </a:ln>
+          <a:effectLst/>
+        </p:spPr>
+        <p:style>
+          <a:lnRef idx="1">
+            <a:schemeClr val="accent1"/>
+          </a:lnRef>
+          <a:fillRef idx="3">
+            <a:schemeClr val="accent1"/>
+          </a:fillRef>
+          <a:effectRef idx="2">
+            <a:schemeClr val="accent1"/>
+          </a:effectRef>
+          <a:fontRef idx="minor">
+            <a:schemeClr val="lt1"/>
+          </a:fontRef>
+        </p:style>
+        <p:txBody>
+          <a:bodyPr rtlCol="0" anchor="ctr" lIns="0" rIns="0" tIns="0" bIns="0"/>
+          <a:lstStyle/>
+          <a:p>
+            <a:pPr algn="ctr"/>
+            <a:r>
+              <a:rPr sz="1300" b="1">
+                <a:solidFill>
+                  <a:srgbClr val="FFFFFF"/>
+                </a:solidFill>
+                <a:latin typeface="Calibri"/>
+              </a:rPr>
+              <a:t>3</a:t>
+            </a:r>
+          </a:p>
+        </p:txBody>
+      </p:sp>
+      <p:sp>
+        <p:nvSpPr>
+          <p:cNvPr id="14" name="TextBox 13"/>
+          <p:cNvSpPr txBox="1"/>
+          <p:nvPr/>
+        </p:nvSpPr>
+        <p:spPr>
+          <a:xfrm>
+            <a:off x="1143000" y="4197096"/>
+            <a:ext cx="5943600" cy="868680"/>
+          </a:xfrm>
+          <a:prstGeom prst="rect">
+            <a:avLst/>
+          </a:prstGeom>
+          <a:noFill/>
+        </p:spPr>
+        <p:txBody>
+          <a:bodyPr wrap="square" anchor="ctr" lIns="0" rIns="0" tIns="0" bIns="0"/>
+          <a:lstStyle/>
+          <a:p>
+            <a:pPr algn="l"/>
+            <a:r>
+              <a:rPr sz="1700" b="0" i="0">
+                <a:solidFill>
+                  <a:srgbClr val="202122"/>
+                </a:solidFill>
+                <a:latin typeface="Calibri"/>
+              </a:rPr>
+              <a:t>Write release notes for non-technical users.</a:t>
+            </a:r>
+          </a:p>
+        </p:txBody>
+      </p:sp>
+      <p:sp>
+        <p:nvSpPr>
+          <p:cNvPr id="15" name="Oval 14"/>
+          <p:cNvSpPr/>
+          <p:nvPr/>
+        </p:nvSpPr>
+        <p:spPr>
+          <a:xfrm>
+            <a:off x="548640" y="5417820"/>
+            <a:ext cx="384048" cy="384048"/>
+          </a:xfrm>
+          <a:prstGeom prst="ellipse">
+            <a:avLst/>
+          </a:prstGeom>
+          <a:solidFill>
+            <a:srgbClr val="0645AD"/>
+          </a:solidFill>
+          <a:ln>
+            <a:noFill/>
+          </a:ln>
+          <a:effectLst/>
+        </p:spPr>
+        <p:style>
+          <a:lnRef idx="1">
+            <a:schemeClr val="accent1"/>
+          </a:lnRef>
+          <a:fillRef idx="3">
+            <a:schemeClr val="accent1"/>
+          </a:fillRef>
+          <a:effectRef idx="2">
+            <a:schemeClr val="accent1"/>
+          </a:effectRef>
+          <a:fontRef idx="minor">
+            <a:schemeClr val="lt1"/>
+          </a:fontRef>
+        </p:style>
+        <p:txBody>
+          <a:bodyPr rtlCol="0" anchor="ctr" lIns="0" rIns="0" tIns="0" bIns="0"/>
+          <a:lstStyle/>
+          <a:p>
+            <a:pPr algn="ctr"/>
+            <a:r>
+              <a:rPr sz="1300" b="1">
+                <a:solidFill>
+                  <a:srgbClr val="FFFFFF"/>
+                </a:solidFill>
+                <a:latin typeface="Calibri"/>
+              </a:rPr>
+              <a:t>4</a:t>
+            </a:r>
+          </a:p>
+        </p:txBody>
+      </p:sp>
+      <p:sp>
+        <p:nvSpPr>
+          <p:cNvPr id="16" name="TextBox 15"/>
+          <p:cNvSpPr txBox="1"/>
+          <p:nvPr/>
+        </p:nvSpPr>
+        <p:spPr>
+          <a:xfrm>
+            <a:off x="1143000" y="5175504"/>
+            <a:ext cx="5943600" cy="868680"/>
+          </a:xfrm>
+          <a:prstGeom prst="rect">
+            <a:avLst/>
+          </a:prstGeom>
+          <a:noFill/>
+        </p:spPr>
+        <p:txBody>
+          <a:bodyPr wrap="square" anchor="ctr" lIns="0" rIns="0" tIns="0" bIns="0"/>
+          <a:lstStyle/>
+          <a:p>
+            <a:pPr algn="l"/>
+            <a:r>
+              <a:rPr sz="1700" b="0" i="0">
+                <a:solidFill>
+                  <a:srgbClr val="202122"/>
+                </a:solidFill>
+                <a:latin typeface="Calibri"/>
+              </a:rPr>
+              <a:t>Write a short technical note for other developers.</a:t>
+            </a:r>
+          </a:p>
+        </p:txBody>
+      </p:sp>
+      <p:sp>
+        <p:nvSpPr>
+          <p:cNvPr id="17" name="Rounded Rectangle 16"/>
+          <p:cNvSpPr/>
+          <p:nvPr/>
+        </p:nvSpPr>
+        <p:spPr>
+          <a:xfrm>
+            <a:off x="7772400" y="1508760"/>
+            <a:ext cx="3867912" cy="4572000"/>
+          </a:xfrm>
+          <a:prstGeom prst="roundRect">
+            <a:avLst>
+              <a:gd name="adj" fmla="val 8000"/>
+            </a:avLst>
+          </a:prstGeom>
+          <a:solidFill>
+            <a:srgbClr val="EAF3FF"/>
+          </a:solidFill>
+          <a:ln>
+            <a:noFill/>
+          </a:ln>
+          <a:effectLst/>
+        </p:spPr>
+        <p:style>
+          <a:lnRef idx="1">
+            <a:schemeClr val="accent1"/>
+          </a:lnRef>
+          <a:fillRef idx="3">
+            <a:schemeClr val="accent1"/>
+          </a:fillRef>
+          <a:effectRef idx="2">
+            <a:schemeClr val="accent1"/>
+          </a:effectRef>
+          <a:fontRef idx="minor">
+            <a:schemeClr val="lt1"/>
+          </a:fontRef>
+        </p:style>
+        <p:txBody>
+          <a:bodyPr rtlCol="0" anchor="ctr"/>
+          <a:lstStyle/>
+          <a:p/>
+        </p:txBody>
+      </p:sp>
+      <p:sp>
+        <p:nvSpPr>
+          <p:cNvPr id="18" name="TextBox 17"/>
+          <p:cNvSpPr txBox="1"/>
+          <p:nvPr/>
+        </p:nvSpPr>
+        <p:spPr>
+          <a:xfrm>
+            <a:off x="8046720" y="1737360"/>
+            <a:ext cx="3291840" cy="365760"/>
+          </a:xfrm>
+          <a:prstGeom prst="rect">
+            <a:avLst/>
+          </a:prstGeom>
+          <a:noFill/>
+        </p:spPr>
+        <p:txBody>
+          <a:bodyPr wrap="square" anchor="t" lIns="0" rIns="0" tIns="0" bIns="0"/>
+          <a:lstStyle/>
+          <a:p>
+            <a:pPr algn="l"/>
+            <a:r>
+              <a:rPr sz="1300" b="1" i="0">
+                <a:solidFill>
+                  <a:srgbClr val="0645AD"/>
+                </a:solidFill>
+                <a:latin typeface="Calibri"/>
+              </a:rPr>
+              <a:t>SUCCESS CRITERIA</a:t>
+            </a:r>
+          </a:p>
+        </p:txBody>
+      </p:sp>
+      <p:sp>
+        <p:nvSpPr>
+          <p:cNvPr id="19" name="TextBox 18"/>
+          <p:cNvSpPr txBox="1"/>
+          <p:nvPr/>
+        </p:nvSpPr>
+        <p:spPr>
+          <a:xfrm>
+            <a:off x="8046720" y="2240280"/>
+            <a:ext cx="3337560" cy="3657600"/>
+          </a:xfrm>
+          <a:prstGeom prst="rect">
+            <a:avLst/>
+          </a:prstGeom>
+          <a:noFill/>
+        </p:spPr>
+        <p:txBody>
+          <a:bodyPr wrap="square" lIns="0" rIns="0" tIns="0" bIns="0">
+            <a:spAutoFit/>
+          </a:bodyPr>
+          <a:lstStyle/>
+          <a:p>
+            <a:pPr marL="274320" indent="-274320">
+              <a:spcAft>
+                <a:spcPts val="810"/>
+              </a:spcAft>
+              <a:buClr>
+                <a:srgbClr val="0645AD"/>
+              </a:buClr>
+              <a:buFont typeface="Arial"/>
+              <a:buChar char="•"/>
+            </a:pPr>
+            <a:r>
+              <a:rPr sz="1800" b="0">
+                <a:solidFill>
+                  <a:srgbClr val="202122"/>
+                </a:solidFill>
+                <a:latin typeface="Calibri"/>
+              </a:rPr>
+              <a:t>Bug replicated before fixing</a:t>
+            </a:r>
+          </a:p>
+          <a:p>
+            <a:pPr marL="274320" indent="-274320">
+              <a:spcAft>
+                <a:spcPts val="810"/>
+              </a:spcAft>
+              <a:buClr>
+                <a:srgbClr val="0645AD"/>
+              </a:buClr>
+              <a:buFont typeface="Arial"/>
+              <a:buChar char="•"/>
+            </a:pPr>
+            <a:r>
+              <a:rPr sz="1800" b="0">
+                <a:solidFill>
+                  <a:srgbClr val="202122"/>
+                </a:solidFill>
+                <a:latin typeface="Calibri"/>
+              </a:rPr>
+              <a:t>Change log is clear</a:t>
+            </a:r>
+          </a:p>
+          <a:p>
+            <a:pPr marL="274320" indent="-274320">
+              <a:spcAft>
+                <a:spcPts val="810"/>
+              </a:spcAft>
+              <a:buClr>
+                <a:srgbClr val="0645AD"/>
+              </a:buClr>
+              <a:buFont typeface="Arial"/>
+              <a:buChar char="•"/>
+            </a:pPr>
+            <a:r>
+              <a:rPr sz="1800" b="0">
+                <a:solidFill>
+                  <a:srgbClr val="202122"/>
+                </a:solidFill>
+                <a:latin typeface="Calibri"/>
+              </a:rPr>
+              <a:t>Tone matches each audience</a:t>
+            </a:r>
+          </a:p>
+        </p:txBody>
+      </p:sp>
+    </p:spTree>
+  </p:cSld>
+  <p:clrMapOvr>
+    <a:masterClrMapping/>
+  </p:clrMapOvr>
+</p:sld>
+</file>
+
+<file path=ppt/slides/slide16.xml><?xml version="1.0" encoding="utf-8"?>
+<p:sld xmlns:a="http://schemas.openxmlformats.org/drawingml/2006/main" xmlns:p="http://schemas.openxmlformats.org/presentationml/2006/main" xmlns:r="http://schemas.openxmlformats.org/officeDocument/2006/relationships">
+  <p:cSld>
+    <p:bg>
+      <p:bgPr>
+        <a:solidFill>
           <a:srgbClr val="03306E"/>
         </a:solidFill>
         <a:effectLst/>
@@ -5299,22 +9239,136 @@
       </p:sp>
       <p:sp>
         <p:nvSpPr>
-          <p:cNvPr id="6" name="Rounded Rectangle 5"/>
+          <p:cNvPr id="6" name="TextBox 5"/>
+          <p:cNvSpPr txBox="1"/>
+          <p:nvPr/>
+        </p:nvSpPr>
+        <p:spPr>
+          <a:xfrm>
+            <a:off x="548640" y="1554480"/>
+            <a:ext cx="6720840" cy="4617720"/>
+          </a:xfrm>
+          <a:prstGeom prst="rect">
+            <a:avLst/>
+          </a:prstGeom>
+          <a:noFill/>
+        </p:spPr>
+        <p:txBody>
+          <a:bodyPr wrap="square" lIns="0" rIns="0" tIns="0" bIns="0">
+            <a:spAutoFit/>
+          </a:bodyPr>
+          <a:lstStyle/>
+          <a:p>
+            <a:pPr>
+              <a:spcAft>
+                <a:spcPts val="1320"/>
+              </a:spcAft>
+            </a:pPr>
+            <a:r>
+              <a:rPr sz="2200" b="0">
+                <a:solidFill>
+                  <a:srgbClr val="202122"/>
+                </a:solidFill>
+                <a:latin typeface="Calibri"/>
+              </a:rPr>
+              <a:t>Software keeps changing after release, for three reasons.</a:t>
+            </a:r>
+          </a:p>
+          <a:p>
+            <a:pPr>
+              <a:spcAft>
+                <a:spcPts val="1320"/>
+              </a:spcAft>
+            </a:pPr>
+            <a:r>
+              <a:rPr sz="2200" b="1">
+                <a:solidFill>
+                  <a:srgbClr val="202122"/>
+                </a:solidFill>
+                <a:latin typeface="Calibri"/>
+              </a:rPr>
+              <a:t>Preventing:</a:t>
+            </a:r>
+            <a:r>
+              <a:rPr sz="2200" b="0">
+                <a:solidFill>
+                  <a:srgbClr val="202122"/>
+                </a:solidFill>
+                <a:latin typeface="Calibri"/>
+              </a:rPr>
+              <a:t> dealing with foreseeable issues, such as new regulations, new devices, business changes or a new product.</a:t>
+            </a:r>
+          </a:p>
+          <a:p>
+            <a:pPr>
+              <a:spcAft>
+                <a:spcPts val="1320"/>
+              </a:spcAft>
+            </a:pPr>
+            <a:r>
+              <a:rPr sz="2200" b="1">
+                <a:solidFill>
+                  <a:srgbClr val="202122"/>
+                </a:solidFill>
+                <a:latin typeface="Calibri"/>
+              </a:rPr>
+              <a:t>Correcting:</a:t>
+            </a:r>
+            <a:r>
+              <a:rPr sz="2200" b="0">
+                <a:solidFill>
+                  <a:srgbClr val="202122"/>
+                </a:solidFill>
+                <a:latin typeface="Calibri"/>
+              </a:rPr>
+              <a:t> fixing unforeseen errors, such as zero-day vulnerabilities, targeted attacks, data corruption or system failures.</a:t>
+            </a:r>
+          </a:p>
+          <a:p>
+            <a:pPr>
+              <a:spcAft>
+                <a:spcPts val="1320"/>
+              </a:spcAft>
+            </a:pPr>
+            <a:r>
+              <a:rPr sz="2200" b="1">
+                <a:solidFill>
+                  <a:srgbClr val="202122"/>
+                </a:solidFill>
+                <a:latin typeface="Calibri"/>
+              </a:rPr>
+              <a:t>Iterating:</a:t>
+            </a:r>
+            <a:r>
+              <a:rPr sz="2200" b="0">
+                <a:solidFill>
+                  <a:srgbClr val="202122"/>
+                </a:solidFill>
+                <a:latin typeface="Calibri"/>
+              </a:rPr>
+              <a:t> keeping the product relevant, in response to user feedback, new technology, competitors, the need for efficiency, or future-proofing.</a:t>
+            </a:r>
+          </a:p>
+        </p:txBody>
+      </p:sp>
+      <p:sp>
+        <p:nvSpPr>
+          <p:cNvPr id="7" name="Rounded Rectangle 6"/>
           <p:cNvSpPr/>
           <p:nvPr/>
         </p:nvSpPr>
         <p:spPr>
           <a:xfrm>
-            <a:off x="548640" y="1600200"/>
-            <a:ext cx="3515258" cy="4572000"/>
+            <a:off x="7772400" y="1554480"/>
+            <a:ext cx="3867912" cy="4526280"/>
           </a:xfrm>
           <a:prstGeom prst="roundRect">
             <a:avLst>
-              <a:gd name="adj" fmla="val 6000"/>
+              <a:gd name="adj" fmla="val 8000"/>
             </a:avLst>
           </a:prstGeom>
           <a:solidFill>
-            <a:srgbClr val="EAF3FF"/>
+            <a:srgbClr val="03306E"/>
           </a:solidFill>
           <a:ln>
             <a:noFill/>
@@ -5343,14 +9397,14 @@
       </p:sp>
       <p:sp>
         <p:nvSpPr>
-          <p:cNvPr id="7" name="Oval 6"/>
+          <p:cNvPr id="8" name="Oval 7"/>
           <p:cNvSpPr/>
           <p:nvPr/>
         </p:nvSpPr>
         <p:spPr>
           <a:xfrm>
-            <a:off x="777240" y="1828800"/>
-            <a:ext cx="457200" cy="457200"/>
+            <a:off x="8046720" y="1828800"/>
+            <a:ext cx="548640" cy="548640"/>
           </a:xfrm>
           <a:prstGeom prst="ellipse">
             <a:avLst/>
@@ -5383,60 +9437,60 @@
           <a:p>
             <a:pPr algn="ctr"/>
             <a:r>
-              <a:rPr sz="1500" b="1">
+              <a:rPr sz="1300" b="1">
                 <a:solidFill>
                   <a:srgbClr val="202122"/>
                 </a:solidFill>
                 <a:latin typeface="Calibri"/>
               </a:rPr>
-              <a:t>1</a:t>
-            </a:r>
-          </a:p>
-        </p:txBody>
-      </p:sp>
-      <p:sp>
-        <p:nvSpPr>
-          <p:cNvPr id="8" name="TextBox 7"/>
-          <p:cNvSpPr txBox="1"/>
-          <p:nvPr/>
-        </p:nvSpPr>
-        <p:spPr>
-          <a:xfrm>
-            <a:off x="1371600" y="1801368"/>
-            <a:ext cx="2509418" cy="512064"/>
-          </a:xfrm>
-          <a:prstGeom prst="rect">
-            <a:avLst/>
-          </a:prstGeom>
-          <a:noFill/>
-        </p:spPr>
-        <p:txBody>
-          <a:bodyPr wrap="square" anchor="ctr" lIns="0" rIns="0" tIns="0" bIns="0"/>
+              <a:t>e.g.</a:t>
+            </a:r>
+          </a:p>
+        </p:txBody>
+      </p:sp>
+      <p:sp>
+        <p:nvSpPr>
+          <p:cNvPr id="9" name="TextBox 8"/>
+          <p:cNvSpPr txBox="1"/>
+          <p:nvPr/>
+        </p:nvSpPr>
+        <p:spPr>
+          <a:xfrm>
+            <a:off x="8046720" y="2560320"/>
+            <a:ext cx="3291840" cy="365760"/>
+          </a:xfrm>
+          <a:prstGeom prst="rect">
+            <a:avLst/>
+          </a:prstGeom>
+          <a:noFill/>
+        </p:spPr>
+        <p:txBody>
+          <a:bodyPr wrap="square" anchor="t" lIns="0" rIns="0" tIns="0" bIns="0"/>
           <a:lstStyle/>
           <a:p>
             <a:pPr algn="l"/>
             <a:r>
-              <a:rPr sz="1900" b="1" i="0">
-                <a:solidFill>
-                  <a:srgbClr val="03306E"/>
-                </a:solidFill>
-                <a:latin typeface="Calibri"/>
-              </a:rPr>
-              <a:t>Preventing</a:t>
-            </a:r>
-          </a:p>
-        </p:txBody>
-      </p:sp>
-      <p:sp>
-        <p:nvSpPr>
-          <p:cNvPr id="9" name="TextBox 8"/>
-          <p:cNvSpPr txBox="1"/>
-          <p:nvPr/>
-        </p:nvSpPr>
-        <p:spPr>
-          <a:xfrm>
-            <a:off x="777240" y="2468880"/>
-            <a:ext cx="3058058" cy="3566160"/>
+              <a:rPr sz="1300" b="1" i="0">
+                <a:solidFill>
+                  <a:srgbClr val="A9C8F0"/>
+                </a:solidFill>
+                <a:latin typeface="Calibri"/>
+              </a:rPr>
+              <a:t>EXAMPLE</a:t>
+            </a:r>
+          </a:p>
+        </p:txBody>
+      </p:sp>
+      <p:sp>
+        <p:nvSpPr>
+          <p:cNvPr id="10" name="TextBox 9"/>
+          <p:cNvSpPr txBox="1"/>
+          <p:nvPr/>
+        </p:nvSpPr>
+        <p:spPr>
+          <a:xfrm>
+            <a:off x="8046720" y="2971800"/>
+            <a:ext cx="3291840" cy="2971800"/>
           </a:xfrm>
           <a:prstGeom prst="rect">
             <a:avLst/>
@@ -5449,339 +9503,13 @@
           <a:p>
             <a:pPr algn="l"/>
             <a:r>
-              <a:rPr sz="2000" b="0" i="0">
-                <a:solidFill>
-                  <a:srgbClr val="202122"/>
-                </a:solidFill>
-                <a:latin typeface="Calibri"/>
-              </a:rPr>
-              <a:t>Foreseeable issues: new regulations, new technology, business changes.</a:t>
-            </a:r>
-          </a:p>
-        </p:txBody>
-      </p:sp>
-      <p:sp>
-        <p:nvSpPr>
-          <p:cNvPr id="10" name="Rounded Rectangle 9"/>
-          <p:cNvSpPr/>
-          <p:nvPr/>
-        </p:nvSpPr>
-        <p:spPr>
-          <a:xfrm>
-            <a:off x="4338218" y="1600200"/>
-            <a:ext cx="3515258" cy="4572000"/>
-          </a:xfrm>
-          <a:prstGeom prst="roundRect">
-            <a:avLst>
-              <a:gd name="adj" fmla="val 6000"/>
-            </a:avLst>
-          </a:prstGeom>
-          <a:solidFill>
-            <a:srgbClr val="EAF3FF"/>
-          </a:solidFill>
-          <a:ln>
-            <a:noFill/>
-          </a:ln>
-          <a:effectLst/>
-        </p:spPr>
-        <p:style>
-          <a:lnRef idx="1">
-            <a:schemeClr val="accent1"/>
-          </a:lnRef>
-          <a:fillRef idx="3">
-            <a:schemeClr val="accent1"/>
-          </a:fillRef>
-          <a:effectRef idx="2">
-            <a:schemeClr val="accent1"/>
-          </a:effectRef>
-          <a:fontRef idx="minor">
-            <a:schemeClr val="lt1"/>
-          </a:fontRef>
-        </p:style>
-        <p:txBody>
-          <a:bodyPr rtlCol="0" anchor="ctr"/>
-          <a:lstStyle/>
-          <a:p/>
-        </p:txBody>
-      </p:sp>
-      <p:sp>
-        <p:nvSpPr>
-          <p:cNvPr id="11" name="Oval 10"/>
-          <p:cNvSpPr/>
-          <p:nvPr/>
-        </p:nvSpPr>
-        <p:spPr>
-          <a:xfrm>
-            <a:off x="4566818" y="1828800"/>
-            <a:ext cx="457200" cy="457200"/>
-          </a:xfrm>
-          <a:prstGeom prst="ellipse">
-            <a:avLst/>
-          </a:prstGeom>
-          <a:solidFill>
-            <a:srgbClr val="33C17A"/>
-          </a:solidFill>
-          <a:ln>
-            <a:noFill/>
-          </a:ln>
-          <a:effectLst/>
-        </p:spPr>
-        <p:style>
-          <a:lnRef idx="1">
-            <a:schemeClr val="accent1"/>
-          </a:lnRef>
-          <a:fillRef idx="3">
-            <a:schemeClr val="accent1"/>
-          </a:fillRef>
-          <a:effectRef idx="2">
-            <a:schemeClr val="accent1"/>
-          </a:effectRef>
-          <a:fontRef idx="minor">
-            <a:schemeClr val="lt1"/>
-          </a:fontRef>
-        </p:style>
-        <p:txBody>
-          <a:bodyPr rtlCol="0" anchor="ctr" lIns="0" rIns="0" tIns="0" bIns="0"/>
-          <a:lstStyle/>
-          <a:p>
-            <a:pPr algn="ctr"/>
-            <a:r>
-              <a:rPr sz="1500" b="1">
-                <a:solidFill>
-                  <a:srgbClr val="202122"/>
-                </a:solidFill>
-                <a:latin typeface="Calibri"/>
-              </a:rPr>
-              <a:t>2</a:t>
-            </a:r>
-          </a:p>
-        </p:txBody>
-      </p:sp>
-      <p:sp>
-        <p:nvSpPr>
-          <p:cNvPr id="12" name="TextBox 11"/>
-          <p:cNvSpPr txBox="1"/>
-          <p:nvPr/>
-        </p:nvSpPr>
-        <p:spPr>
-          <a:xfrm>
-            <a:off x="5161178" y="1801368"/>
-            <a:ext cx="2509418" cy="512064"/>
-          </a:xfrm>
-          <a:prstGeom prst="rect">
-            <a:avLst/>
-          </a:prstGeom>
-          <a:noFill/>
-        </p:spPr>
-        <p:txBody>
-          <a:bodyPr wrap="square" anchor="ctr" lIns="0" rIns="0" tIns="0" bIns="0"/>
-          <a:lstStyle/>
-          <a:p>
-            <a:pPr algn="l"/>
-            <a:r>
-              <a:rPr sz="1900" b="1" i="0">
-                <a:solidFill>
-                  <a:srgbClr val="03306E"/>
-                </a:solidFill>
-                <a:latin typeface="Calibri"/>
-              </a:rPr>
-              <a:t>Correcting</a:t>
-            </a:r>
-          </a:p>
-        </p:txBody>
-      </p:sp>
-      <p:sp>
-        <p:nvSpPr>
-          <p:cNvPr id="13" name="TextBox 12"/>
-          <p:cNvSpPr txBox="1"/>
-          <p:nvPr/>
-        </p:nvSpPr>
-        <p:spPr>
-          <a:xfrm>
-            <a:off x="4566818" y="2468880"/>
-            <a:ext cx="3058058" cy="3566160"/>
-          </a:xfrm>
-          <a:prstGeom prst="rect">
-            <a:avLst/>
-          </a:prstGeom>
-          <a:noFill/>
-        </p:spPr>
-        <p:txBody>
-          <a:bodyPr wrap="square" anchor="t" lIns="0" rIns="0" tIns="0" bIns="0"/>
-          <a:lstStyle/>
-          <a:p>
-            <a:pPr algn="l"/>
-            <a:r>
-              <a:rPr sz="2000" b="0" i="0">
-                <a:solidFill>
-                  <a:srgbClr val="202122"/>
-                </a:solidFill>
-                <a:latin typeface="Calibri"/>
-              </a:rPr>
-              <a:t>Unforeseen errors: zero-days, attacks, data corruption, failures.</a:t>
-            </a:r>
-          </a:p>
-        </p:txBody>
-      </p:sp>
-      <p:sp>
-        <p:nvSpPr>
-          <p:cNvPr id="14" name="Rounded Rectangle 13"/>
-          <p:cNvSpPr/>
-          <p:nvPr/>
-        </p:nvSpPr>
-        <p:spPr>
-          <a:xfrm>
-            <a:off x="8127796" y="1600200"/>
-            <a:ext cx="3515258" cy="4572000"/>
-          </a:xfrm>
-          <a:prstGeom prst="roundRect">
-            <a:avLst>
-              <a:gd name="adj" fmla="val 6000"/>
-            </a:avLst>
-          </a:prstGeom>
-          <a:solidFill>
-            <a:srgbClr val="EAF3FF"/>
-          </a:solidFill>
-          <a:ln>
-            <a:noFill/>
-          </a:ln>
-          <a:effectLst/>
-        </p:spPr>
-        <p:style>
-          <a:lnRef idx="1">
-            <a:schemeClr val="accent1"/>
-          </a:lnRef>
-          <a:fillRef idx="3">
-            <a:schemeClr val="accent1"/>
-          </a:fillRef>
-          <a:effectRef idx="2">
-            <a:schemeClr val="accent1"/>
-          </a:effectRef>
-          <a:fontRef idx="minor">
-            <a:schemeClr val="lt1"/>
-          </a:fontRef>
-        </p:style>
-        <p:txBody>
-          <a:bodyPr rtlCol="0" anchor="ctr"/>
-          <a:lstStyle/>
-          <a:p/>
-        </p:txBody>
-      </p:sp>
-      <p:sp>
-        <p:nvSpPr>
-          <p:cNvPr id="15" name="Oval 14"/>
-          <p:cNvSpPr/>
-          <p:nvPr/>
-        </p:nvSpPr>
-        <p:spPr>
-          <a:xfrm>
-            <a:off x="8356396" y="1828800"/>
-            <a:ext cx="457200" cy="457200"/>
-          </a:xfrm>
-          <a:prstGeom prst="ellipse">
-            <a:avLst/>
-          </a:prstGeom>
-          <a:solidFill>
-            <a:srgbClr val="33C17A"/>
-          </a:solidFill>
-          <a:ln>
-            <a:noFill/>
-          </a:ln>
-          <a:effectLst/>
-        </p:spPr>
-        <p:style>
-          <a:lnRef idx="1">
-            <a:schemeClr val="accent1"/>
-          </a:lnRef>
-          <a:fillRef idx="3">
-            <a:schemeClr val="accent1"/>
-          </a:fillRef>
-          <a:effectRef idx="2">
-            <a:schemeClr val="accent1"/>
-          </a:effectRef>
-          <a:fontRef idx="minor">
-            <a:schemeClr val="lt1"/>
-          </a:fontRef>
-        </p:style>
-        <p:txBody>
-          <a:bodyPr rtlCol="0" anchor="ctr" lIns="0" rIns="0" tIns="0" bIns="0"/>
-          <a:lstStyle/>
-          <a:p>
-            <a:pPr algn="ctr"/>
-            <a:r>
-              <a:rPr sz="1500" b="1">
-                <a:solidFill>
-                  <a:srgbClr val="202122"/>
-                </a:solidFill>
-                <a:latin typeface="Calibri"/>
-              </a:rPr>
-              <a:t>3</a:t>
-            </a:r>
-          </a:p>
-        </p:txBody>
-      </p:sp>
-      <p:sp>
-        <p:nvSpPr>
-          <p:cNvPr id="16" name="TextBox 15"/>
-          <p:cNvSpPr txBox="1"/>
-          <p:nvPr/>
-        </p:nvSpPr>
-        <p:spPr>
-          <a:xfrm>
-            <a:off x="8950756" y="1801368"/>
-            <a:ext cx="2509418" cy="512064"/>
-          </a:xfrm>
-          <a:prstGeom prst="rect">
-            <a:avLst/>
-          </a:prstGeom>
-          <a:noFill/>
-        </p:spPr>
-        <p:txBody>
-          <a:bodyPr wrap="square" anchor="ctr" lIns="0" rIns="0" tIns="0" bIns="0"/>
-          <a:lstStyle/>
-          <a:p>
-            <a:pPr algn="l"/>
-            <a:r>
-              <a:rPr sz="1900" b="1" i="0">
-                <a:solidFill>
-                  <a:srgbClr val="03306E"/>
-                </a:solidFill>
-                <a:latin typeface="Calibri"/>
-              </a:rPr>
-              <a:t>Iterating</a:t>
-            </a:r>
-          </a:p>
-        </p:txBody>
-      </p:sp>
-      <p:sp>
-        <p:nvSpPr>
-          <p:cNvPr id="17" name="TextBox 16"/>
-          <p:cNvSpPr txBox="1"/>
-          <p:nvPr/>
-        </p:nvSpPr>
-        <p:spPr>
-          <a:xfrm>
-            <a:off x="8356396" y="2468880"/>
-            <a:ext cx="3058058" cy="3566160"/>
-          </a:xfrm>
-          <a:prstGeom prst="rect">
-            <a:avLst/>
-          </a:prstGeom>
-          <a:noFill/>
-        </p:spPr>
-        <p:txBody>
-          <a:bodyPr wrap="square" anchor="t" lIns="0" rIns="0" tIns="0" bIns="0"/>
-          <a:lstStyle/>
-          <a:p>
-            <a:pPr algn="l"/>
-            <a:r>
-              <a:rPr sz="2000" b="0" i="0">
-                <a:solidFill>
-                  <a:srgbClr val="202122"/>
-                </a:solidFill>
-                <a:latin typeface="Calibri"/>
-              </a:rPr>
-              <a:t>Staying relevant: feedback, new tech, competition, efficiency, future-proofing.</a:t>
+              <a:rPr sz="1900" b="0" i="0">
+                <a:solidFill>
+                  <a:srgbClr val="FFFFFF"/>
+                </a:solidFill>
+                <a:latin typeface="Cambria"/>
+              </a:rPr>
+              <a:t>A banking app updates for new security rules (preventing), patches a login bug (correcting), and adds dark mode because users asked (iterating).</a:t>
             </a:r>
           </a:p>
         </p:txBody>
@@ -5873,7 +9601,7 @@
                 </a:solidFill>
                 <a:latin typeface="Cambria"/>
               </a:rPr>
-              <a:t>Software change management</a:t>
+              <a:t>Why products change</a:t>
             </a:r>
           </a:p>
         </p:txBody>
@@ -5946,20 +9674,22 @@
       </p:sp>
       <p:sp>
         <p:nvSpPr>
-          <p:cNvPr id="6" name="Rectangle 5"/>
+          <p:cNvPr id="6" name="Rounded Rectangle 5"/>
           <p:cNvSpPr/>
           <p:nvPr/>
         </p:nvSpPr>
         <p:spPr>
           <a:xfrm>
-            <a:off x="1282315" y="2686812"/>
-            <a:ext cx="9627064" cy="36576"/>
-          </a:xfrm>
-          <a:prstGeom prst="rect">
-            <a:avLst/>
+            <a:off x="548640" y="1600200"/>
+            <a:ext cx="3515258" cy="4572000"/>
+          </a:xfrm>
+          <a:prstGeom prst="roundRect">
+            <a:avLst>
+              <a:gd name="adj" fmla="val 6000"/>
+            </a:avLst>
           </a:prstGeom>
           <a:solidFill>
-            <a:srgbClr val="A9C8F0"/>
+            <a:srgbClr val="EAF3FF"/>
           </a:solidFill>
           <a:ln>
             <a:noFill/>
@@ -5994,8 +9724,8 @@
         </p:nvSpPr>
         <p:spPr>
           <a:xfrm>
-            <a:off x="962275" y="2385060"/>
-            <a:ext cx="640080" cy="640080"/>
+            <a:off x="777240" y="1828800"/>
+            <a:ext cx="457200" cy="457200"/>
           </a:xfrm>
           <a:prstGeom prst="ellipse">
             <a:avLst/>
@@ -6028,7 +9758,7 @@
           <a:p>
             <a:pPr algn="ctr"/>
             <a:r>
-              <a:rPr sz="2000" b="1">
+              <a:rPr sz="1500" b="1">
                 <a:solidFill>
                   <a:srgbClr val="202122"/>
                 </a:solidFill>
@@ -6047,8 +9777,41 @@
         </p:nvSpPr>
         <p:spPr>
           <a:xfrm>
-            <a:off x="548640" y="3162300"/>
-            <a:ext cx="1467350" cy="731520"/>
+            <a:off x="1371600" y="1801368"/>
+            <a:ext cx="2509418" cy="512064"/>
+          </a:xfrm>
+          <a:prstGeom prst="rect">
+            <a:avLst/>
+          </a:prstGeom>
+          <a:noFill/>
+        </p:spPr>
+        <p:txBody>
+          <a:bodyPr wrap="square" anchor="ctr" lIns="0" rIns="0" tIns="0" bIns="0"/>
+          <a:lstStyle/>
+          <a:p>
+            <a:pPr algn="l"/>
+            <a:r>
+              <a:rPr sz="1900" b="1" i="0">
+                <a:solidFill>
+                  <a:srgbClr val="03306E"/>
+                </a:solidFill>
+                <a:latin typeface="Calibri"/>
+              </a:rPr>
+              <a:t>Preventing</a:t>
+            </a:r>
+          </a:p>
+        </p:txBody>
+      </p:sp>
+      <p:sp>
+        <p:nvSpPr>
+          <p:cNvPr id="9" name="TextBox 8"/>
+          <p:cNvSpPr txBox="1"/>
+          <p:nvPr/>
+        </p:nvSpPr>
+        <p:spPr>
+          <a:xfrm>
+            <a:off x="777240" y="2468880"/>
+            <a:ext cx="3058058" cy="3566160"/>
           </a:xfrm>
           <a:prstGeom prst="rect">
             <a:avLst/>
@@ -6059,29 +9822,29 @@
           <a:bodyPr wrap="square" anchor="t" lIns="0" rIns="0" tIns="0" bIns="0"/>
           <a:lstStyle/>
           <a:p>
-            <a:pPr algn="ctr"/>
-            <a:r>
-              <a:rPr sz="1600" b="1" i="0">
-                <a:solidFill>
-                  <a:srgbClr val="03306E"/>
-                </a:solidFill>
-                <a:latin typeface="Calibri"/>
-              </a:rPr>
-              <a:t>Identify</a:t>
-            </a:r>
-          </a:p>
-        </p:txBody>
-      </p:sp>
-      <p:sp>
-        <p:nvSpPr>
-          <p:cNvPr id="9" name="Rounded Rectangle 8"/>
+            <a:pPr algn="l"/>
+            <a:r>
+              <a:rPr sz="2000" b="0" i="0">
+                <a:solidFill>
+                  <a:srgbClr val="202122"/>
+                </a:solidFill>
+                <a:latin typeface="Calibri"/>
+              </a:rPr>
+              <a:t>Foreseeable issues: new regulations, new technology, business changes.</a:t>
+            </a:r>
+          </a:p>
+        </p:txBody>
+      </p:sp>
+      <p:sp>
+        <p:nvSpPr>
+          <p:cNvPr id="10" name="Rounded Rectangle 9"/>
           <p:cNvSpPr/>
           <p:nvPr/>
         </p:nvSpPr>
         <p:spPr>
           <a:xfrm>
-            <a:off x="548640" y="3939540"/>
-            <a:ext cx="1467350" cy="1447800"/>
+            <a:off x="4338218" y="1600200"/>
+            <a:ext cx="3515258" cy="4572000"/>
           </a:xfrm>
           <a:prstGeom prst="roundRect">
             <a:avLst>
@@ -6118,47 +9881,14 @@
       </p:sp>
       <p:sp>
         <p:nvSpPr>
-          <p:cNvPr id="10" name="TextBox 9"/>
-          <p:cNvSpPr txBox="1"/>
-          <p:nvPr/>
-        </p:nvSpPr>
-        <p:spPr>
-          <a:xfrm>
-            <a:off x="685800" y="4076700"/>
-            <a:ext cx="1193030" cy="1173480"/>
-          </a:xfrm>
-          <a:prstGeom prst="rect">
-            <a:avLst/>
-          </a:prstGeom>
-          <a:noFill/>
-        </p:spPr>
-        <p:txBody>
-          <a:bodyPr wrap="square" anchor="t" lIns="0" rIns="0" tIns="0" bIns="0"/>
-          <a:lstStyle/>
-          <a:p>
-            <a:pPr algn="l"/>
-            <a:r>
-              <a:rPr sz="1700" b="0" i="0">
-                <a:solidFill>
-                  <a:srgbClr val="202122"/>
-                </a:solidFill>
-                <a:latin typeface="Calibri"/>
-              </a:rPr>
-              <a:t>Issues from feedback or review.</a:t>
-            </a:r>
-          </a:p>
-        </p:txBody>
-      </p:sp>
-      <p:sp>
-        <p:nvSpPr>
           <p:cNvPr id="11" name="Oval 10"/>
           <p:cNvSpPr/>
           <p:nvPr/>
         </p:nvSpPr>
         <p:spPr>
           <a:xfrm>
-            <a:off x="2566786" y="2385060"/>
-            <a:ext cx="640080" cy="640080"/>
+            <a:off x="4566818" y="1828800"/>
+            <a:ext cx="457200" cy="457200"/>
           </a:xfrm>
           <a:prstGeom prst="ellipse">
             <a:avLst/>
@@ -6191,7 +9921,7 @@
           <a:p>
             <a:pPr algn="ctr"/>
             <a:r>
-              <a:rPr sz="2000" b="1">
+              <a:rPr sz="1500" b="1">
                 <a:solidFill>
                   <a:srgbClr val="202122"/>
                 </a:solidFill>
@@ -6210,8 +9940,41 @@
         </p:nvSpPr>
         <p:spPr>
           <a:xfrm>
-            <a:off x="2153150" y="3162300"/>
-            <a:ext cx="1467350" cy="731520"/>
+            <a:off x="5161178" y="1801368"/>
+            <a:ext cx="2509418" cy="512064"/>
+          </a:xfrm>
+          <a:prstGeom prst="rect">
+            <a:avLst/>
+          </a:prstGeom>
+          <a:noFill/>
+        </p:spPr>
+        <p:txBody>
+          <a:bodyPr wrap="square" anchor="ctr" lIns="0" rIns="0" tIns="0" bIns="0"/>
+          <a:lstStyle/>
+          <a:p>
+            <a:pPr algn="l"/>
+            <a:r>
+              <a:rPr sz="1900" b="1" i="0">
+                <a:solidFill>
+                  <a:srgbClr val="03306E"/>
+                </a:solidFill>
+                <a:latin typeface="Calibri"/>
+              </a:rPr>
+              <a:t>Correcting</a:t>
+            </a:r>
+          </a:p>
+        </p:txBody>
+      </p:sp>
+      <p:sp>
+        <p:nvSpPr>
+          <p:cNvPr id="13" name="TextBox 12"/>
+          <p:cNvSpPr txBox="1"/>
+          <p:nvPr/>
+        </p:nvSpPr>
+        <p:spPr>
+          <a:xfrm>
+            <a:off x="4566818" y="2468880"/>
+            <a:ext cx="3058058" cy="3566160"/>
           </a:xfrm>
           <a:prstGeom prst="rect">
             <a:avLst/>
@@ -6222,29 +9985,29 @@
           <a:bodyPr wrap="square" anchor="t" lIns="0" rIns="0" tIns="0" bIns="0"/>
           <a:lstStyle/>
           <a:p>
-            <a:pPr algn="ctr"/>
-            <a:r>
-              <a:rPr sz="1600" b="1" i="0">
-                <a:solidFill>
-                  <a:srgbClr val="03306E"/>
-                </a:solidFill>
-                <a:latin typeface="Calibri"/>
-              </a:rPr>
-              <a:t>Document</a:t>
-            </a:r>
-          </a:p>
-        </p:txBody>
-      </p:sp>
-      <p:sp>
-        <p:nvSpPr>
-          <p:cNvPr id="13" name="Rounded Rectangle 12"/>
+            <a:pPr algn="l"/>
+            <a:r>
+              <a:rPr sz="2000" b="0" i="0">
+                <a:solidFill>
+                  <a:srgbClr val="202122"/>
+                </a:solidFill>
+                <a:latin typeface="Calibri"/>
+              </a:rPr>
+              <a:t>Unforeseen errors: zero-days, attacks, data corruption, failures.</a:t>
+            </a:r>
+          </a:p>
+        </p:txBody>
+      </p:sp>
+      <p:sp>
+        <p:nvSpPr>
+          <p:cNvPr id="14" name="Rounded Rectangle 13"/>
           <p:cNvSpPr/>
           <p:nvPr/>
         </p:nvSpPr>
         <p:spPr>
           <a:xfrm>
-            <a:off x="2153150" y="3939540"/>
-            <a:ext cx="1467350" cy="1447800"/>
+            <a:off x="8127796" y="1600200"/>
+            <a:ext cx="3515258" cy="4572000"/>
           </a:xfrm>
           <a:prstGeom prst="roundRect">
             <a:avLst>
@@ -6281,47 +10044,14 @@
       </p:sp>
       <p:sp>
         <p:nvSpPr>
-          <p:cNvPr id="14" name="TextBox 13"/>
-          <p:cNvSpPr txBox="1"/>
-          <p:nvPr/>
-        </p:nvSpPr>
-        <p:spPr>
-          <a:xfrm>
-            <a:off x="2290310" y="4076700"/>
-            <a:ext cx="1193030" cy="1173480"/>
-          </a:xfrm>
-          <a:prstGeom prst="rect">
-            <a:avLst/>
-          </a:prstGeom>
-          <a:noFill/>
-        </p:spPr>
-        <p:txBody>
-          <a:bodyPr wrap="square" anchor="t" lIns="0" rIns="0" tIns="0" bIns="0"/>
-          <a:lstStyle/>
-          <a:p>
-            <a:pPr algn="l"/>
-            <a:r>
-              <a:rPr sz="1700" b="0" i="0">
-                <a:solidFill>
-                  <a:srgbClr val="202122"/>
-                </a:solidFill>
-                <a:latin typeface="Calibri"/>
-              </a:rPr>
-              <a:t>Record the changes.</a:t>
-            </a:r>
-          </a:p>
-        </p:txBody>
-      </p:sp>
-      <p:sp>
-        <p:nvSpPr>
           <p:cNvPr id="15" name="Oval 14"/>
           <p:cNvSpPr/>
           <p:nvPr/>
         </p:nvSpPr>
         <p:spPr>
           <a:xfrm>
-            <a:off x="4171296" y="2385060"/>
-            <a:ext cx="640080" cy="640080"/>
+            <a:off x="8356396" y="1828800"/>
+            <a:ext cx="457200" cy="457200"/>
           </a:xfrm>
           <a:prstGeom prst="ellipse">
             <a:avLst/>
@@ -6354,7 +10084,7 @@
           <a:p>
             <a:pPr algn="ctr"/>
             <a:r>
-              <a:rPr sz="2000" b="1">
+              <a:rPr sz="1500" b="1">
                 <a:solidFill>
                   <a:srgbClr val="202122"/>
                 </a:solidFill>
@@ -6373,8 +10103,41 @@
         </p:nvSpPr>
         <p:spPr>
           <a:xfrm>
-            <a:off x="3757661" y="3162300"/>
-            <a:ext cx="1467350" cy="731520"/>
+            <a:off x="8950756" y="1801368"/>
+            <a:ext cx="2509418" cy="512064"/>
+          </a:xfrm>
+          <a:prstGeom prst="rect">
+            <a:avLst/>
+          </a:prstGeom>
+          <a:noFill/>
+        </p:spPr>
+        <p:txBody>
+          <a:bodyPr wrap="square" anchor="ctr" lIns="0" rIns="0" tIns="0" bIns="0"/>
+          <a:lstStyle/>
+          <a:p>
+            <a:pPr algn="l"/>
+            <a:r>
+              <a:rPr sz="1900" b="1" i="0">
+                <a:solidFill>
+                  <a:srgbClr val="03306E"/>
+                </a:solidFill>
+                <a:latin typeface="Calibri"/>
+              </a:rPr>
+              <a:t>Iterating</a:t>
+            </a:r>
+          </a:p>
+        </p:txBody>
+      </p:sp>
+      <p:sp>
+        <p:nvSpPr>
+          <p:cNvPr id="17" name="TextBox 16"/>
+          <p:cNvSpPr txBox="1"/>
+          <p:nvPr/>
+        </p:nvSpPr>
+        <p:spPr>
+          <a:xfrm>
+            <a:off x="8356396" y="2468880"/>
+            <a:ext cx="3058058" cy="3566160"/>
           </a:xfrm>
           <a:prstGeom prst="rect">
             <a:avLst/>
@@ -6385,744 +10148,15 @@
           <a:bodyPr wrap="square" anchor="t" lIns="0" rIns="0" tIns="0" bIns="0"/>
           <a:lstStyle/>
           <a:p>
-            <a:pPr algn="ctr"/>
-            <a:r>
-              <a:rPr sz="1600" b="1" i="0">
-                <a:solidFill>
-                  <a:srgbClr val="03306E"/>
-                </a:solidFill>
-                <a:latin typeface="Calibri"/>
-              </a:rPr>
-              <a:t>Communicate</a:t>
-            </a:r>
-          </a:p>
-        </p:txBody>
-      </p:sp>
-      <p:sp>
-        <p:nvSpPr>
-          <p:cNvPr id="17" name="Rounded Rectangle 16"/>
-          <p:cNvSpPr/>
-          <p:nvPr/>
-        </p:nvSpPr>
-        <p:spPr>
-          <a:xfrm>
-            <a:off x="3757661" y="3939540"/>
-            <a:ext cx="1467350" cy="1447800"/>
-          </a:xfrm>
-          <a:prstGeom prst="roundRect">
-            <a:avLst>
-              <a:gd name="adj" fmla="val 6000"/>
-            </a:avLst>
-          </a:prstGeom>
-          <a:solidFill>
-            <a:srgbClr val="EAF3FF"/>
-          </a:solidFill>
-          <a:ln>
-            <a:noFill/>
-          </a:ln>
-          <a:effectLst/>
-        </p:spPr>
-        <p:style>
-          <a:lnRef idx="1">
-            <a:schemeClr val="accent1"/>
-          </a:lnRef>
-          <a:fillRef idx="3">
-            <a:schemeClr val="accent1"/>
-          </a:fillRef>
-          <a:effectRef idx="2">
-            <a:schemeClr val="accent1"/>
-          </a:effectRef>
-          <a:fontRef idx="minor">
-            <a:schemeClr val="lt1"/>
-          </a:fontRef>
-        </p:style>
-        <p:txBody>
-          <a:bodyPr rtlCol="0" anchor="ctr"/>
-          <a:lstStyle/>
-          <a:p/>
-        </p:txBody>
-      </p:sp>
-      <p:sp>
-        <p:nvSpPr>
-          <p:cNvPr id="18" name="TextBox 17"/>
-          <p:cNvSpPr txBox="1"/>
-          <p:nvPr/>
-        </p:nvSpPr>
-        <p:spPr>
-          <a:xfrm>
-            <a:off x="3894821" y="4076700"/>
-            <a:ext cx="1193030" cy="1173480"/>
-          </a:xfrm>
-          <a:prstGeom prst="rect">
-            <a:avLst/>
-          </a:prstGeom>
-          <a:noFill/>
-        </p:spPr>
-        <p:txBody>
-          <a:bodyPr wrap="square" anchor="t" lIns="0" rIns="0" tIns="0" bIns="0"/>
-          <a:lstStyle/>
-          <a:p>
             <a:pPr algn="l"/>
             <a:r>
-              <a:rPr sz="1700" b="0" i="0">
+              <a:rPr sz="2000" b="0" i="0">
                 <a:solidFill>
                   <a:srgbClr val="202122"/>
                 </a:solidFill>
                 <a:latin typeface="Calibri"/>
               </a:rPr>
-              <a:t>To technical and non-technical audiences.</a:t>
-            </a:r>
-          </a:p>
-        </p:txBody>
-      </p:sp>
-      <p:sp>
-        <p:nvSpPr>
-          <p:cNvPr id="19" name="Oval 18"/>
-          <p:cNvSpPr/>
-          <p:nvPr/>
-        </p:nvSpPr>
-        <p:spPr>
-          <a:xfrm>
-            <a:off x="5775807" y="2385060"/>
-            <a:ext cx="640080" cy="640080"/>
-          </a:xfrm>
-          <a:prstGeom prst="ellipse">
-            <a:avLst/>
-          </a:prstGeom>
-          <a:solidFill>
-            <a:srgbClr val="33C17A"/>
-          </a:solidFill>
-          <a:ln>
-            <a:noFill/>
-          </a:ln>
-          <a:effectLst/>
-        </p:spPr>
-        <p:style>
-          <a:lnRef idx="1">
-            <a:schemeClr val="accent1"/>
-          </a:lnRef>
-          <a:fillRef idx="3">
-            <a:schemeClr val="accent1"/>
-          </a:fillRef>
-          <a:effectRef idx="2">
-            <a:schemeClr val="accent1"/>
-          </a:effectRef>
-          <a:fontRef idx="minor">
-            <a:schemeClr val="lt1"/>
-          </a:fontRef>
-        </p:style>
-        <p:txBody>
-          <a:bodyPr rtlCol="0" anchor="ctr" lIns="0" rIns="0" tIns="0" bIns="0"/>
-          <a:lstStyle/>
-          <a:p>
-            <a:pPr algn="ctr"/>
-            <a:r>
-              <a:rPr sz="2000" b="1">
-                <a:solidFill>
-                  <a:srgbClr val="202122"/>
-                </a:solidFill>
-                <a:latin typeface="Calibri"/>
-              </a:rPr>
-              <a:t>4</a:t>
-            </a:r>
-          </a:p>
-        </p:txBody>
-      </p:sp>
-      <p:sp>
-        <p:nvSpPr>
-          <p:cNvPr id="20" name="TextBox 19"/>
-          <p:cNvSpPr txBox="1"/>
-          <p:nvPr/>
-        </p:nvSpPr>
-        <p:spPr>
-          <a:xfrm>
-            <a:off x="5362172" y="3162300"/>
-            <a:ext cx="1467350" cy="731520"/>
-          </a:xfrm>
-          <a:prstGeom prst="rect">
-            <a:avLst/>
-          </a:prstGeom>
-          <a:noFill/>
-        </p:spPr>
-        <p:txBody>
-          <a:bodyPr wrap="square" anchor="t" lIns="0" rIns="0" tIns="0" bIns="0"/>
-          <a:lstStyle/>
-          <a:p>
-            <a:pPr algn="ctr"/>
-            <a:r>
-              <a:rPr sz="1600" b="1" i="0">
-                <a:solidFill>
-                  <a:srgbClr val="03306E"/>
-                </a:solidFill>
-                <a:latin typeface="Calibri"/>
-              </a:rPr>
-              <a:t>Plan</a:t>
-            </a:r>
-          </a:p>
-        </p:txBody>
-      </p:sp>
-      <p:sp>
-        <p:nvSpPr>
-          <p:cNvPr id="21" name="Rounded Rectangle 20"/>
-          <p:cNvSpPr/>
-          <p:nvPr/>
-        </p:nvSpPr>
-        <p:spPr>
-          <a:xfrm>
-            <a:off x="5362172" y="3939540"/>
-            <a:ext cx="1467350" cy="1447800"/>
-          </a:xfrm>
-          <a:prstGeom prst="roundRect">
-            <a:avLst>
-              <a:gd name="adj" fmla="val 6000"/>
-            </a:avLst>
-          </a:prstGeom>
-          <a:solidFill>
-            <a:srgbClr val="EAF3FF"/>
-          </a:solidFill>
-          <a:ln>
-            <a:noFill/>
-          </a:ln>
-          <a:effectLst/>
-        </p:spPr>
-        <p:style>
-          <a:lnRef idx="1">
-            <a:schemeClr val="accent1"/>
-          </a:lnRef>
-          <a:fillRef idx="3">
-            <a:schemeClr val="accent1"/>
-          </a:fillRef>
-          <a:effectRef idx="2">
-            <a:schemeClr val="accent1"/>
-          </a:effectRef>
-          <a:fontRef idx="minor">
-            <a:schemeClr val="lt1"/>
-          </a:fontRef>
-        </p:style>
-        <p:txBody>
-          <a:bodyPr rtlCol="0" anchor="ctr"/>
-          <a:lstStyle/>
-          <a:p/>
-        </p:txBody>
-      </p:sp>
-      <p:sp>
-        <p:nvSpPr>
-          <p:cNvPr id="22" name="TextBox 21"/>
-          <p:cNvSpPr txBox="1"/>
-          <p:nvPr/>
-        </p:nvSpPr>
-        <p:spPr>
-          <a:xfrm>
-            <a:off x="5499332" y="4076700"/>
-            <a:ext cx="1193030" cy="1173480"/>
-          </a:xfrm>
-          <a:prstGeom prst="rect">
-            <a:avLst/>
-          </a:prstGeom>
-          <a:noFill/>
-        </p:spPr>
-        <p:txBody>
-          <a:bodyPr wrap="square" anchor="t" lIns="0" rIns="0" tIns="0" bIns="0"/>
-          <a:lstStyle/>
-          <a:p>
-            <a:pPr algn="l"/>
-            <a:r>
-              <a:rPr sz="1700" b="0" i="0">
-                <a:solidFill>
-                  <a:srgbClr val="202122"/>
-                </a:solidFill>
-                <a:latin typeface="Calibri"/>
-              </a:rPr>
-              <a:t>What must change.</a:t>
-            </a:r>
-          </a:p>
-        </p:txBody>
-      </p:sp>
-      <p:sp>
-        <p:nvSpPr>
-          <p:cNvPr id="23" name="Oval 22"/>
-          <p:cNvSpPr/>
-          <p:nvPr/>
-        </p:nvSpPr>
-        <p:spPr>
-          <a:xfrm>
-            <a:off x="7380318" y="2385060"/>
-            <a:ext cx="640080" cy="640080"/>
-          </a:xfrm>
-          <a:prstGeom prst="ellipse">
-            <a:avLst/>
-          </a:prstGeom>
-          <a:solidFill>
-            <a:srgbClr val="33C17A"/>
-          </a:solidFill>
-          <a:ln>
-            <a:noFill/>
-          </a:ln>
-          <a:effectLst/>
-        </p:spPr>
-        <p:style>
-          <a:lnRef idx="1">
-            <a:schemeClr val="accent1"/>
-          </a:lnRef>
-          <a:fillRef idx="3">
-            <a:schemeClr val="accent1"/>
-          </a:fillRef>
-          <a:effectRef idx="2">
-            <a:schemeClr val="accent1"/>
-          </a:effectRef>
-          <a:fontRef idx="minor">
-            <a:schemeClr val="lt1"/>
-          </a:fontRef>
-        </p:style>
-        <p:txBody>
-          <a:bodyPr rtlCol="0" anchor="ctr" lIns="0" rIns="0" tIns="0" bIns="0"/>
-          <a:lstStyle/>
-          <a:p>
-            <a:pPr algn="ctr"/>
-            <a:r>
-              <a:rPr sz="2000" b="1">
-                <a:solidFill>
-                  <a:srgbClr val="202122"/>
-                </a:solidFill>
-                <a:latin typeface="Calibri"/>
-              </a:rPr>
-              <a:t>5</a:t>
-            </a:r>
-          </a:p>
-        </p:txBody>
-      </p:sp>
-      <p:sp>
-        <p:nvSpPr>
-          <p:cNvPr id="24" name="TextBox 23"/>
-          <p:cNvSpPr txBox="1"/>
-          <p:nvPr/>
-        </p:nvSpPr>
-        <p:spPr>
-          <a:xfrm>
-            <a:off x="6966682" y="3162300"/>
-            <a:ext cx="1467350" cy="731520"/>
-          </a:xfrm>
-          <a:prstGeom prst="rect">
-            <a:avLst/>
-          </a:prstGeom>
-          <a:noFill/>
-        </p:spPr>
-        <p:txBody>
-          <a:bodyPr wrap="square" anchor="t" lIns="0" rIns="0" tIns="0" bIns="0"/>
-          <a:lstStyle/>
-          <a:p>
-            <a:pPr algn="ctr"/>
-            <a:r>
-              <a:rPr sz="1600" b="1" i="0">
-                <a:solidFill>
-                  <a:srgbClr val="03306E"/>
-                </a:solidFill>
-                <a:latin typeface="Calibri"/>
-              </a:rPr>
-              <a:t>Schedule</a:t>
-            </a:r>
-          </a:p>
-        </p:txBody>
-      </p:sp>
-      <p:sp>
-        <p:nvSpPr>
-          <p:cNvPr id="25" name="Rounded Rectangle 24"/>
-          <p:cNvSpPr/>
-          <p:nvPr/>
-        </p:nvSpPr>
-        <p:spPr>
-          <a:xfrm>
-            <a:off x="6966682" y="3939540"/>
-            <a:ext cx="1467350" cy="1447800"/>
-          </a:xfrm>
-          <a:prstGeom prst="roundRect">
-            <a:avLst>
-              <a:gd name="adj" fmla="val 6000"/>
-            </a:avLst>
-          </a:prstGeom>
-          <a:solidFill>
-            <a:srgbClr val="EAF3FF"/>
-          </a:solidFill>
-          <a:ln>
-            <a:noFill/>
-          </a:ln>
-          <a:effectLst/>
-        </p:spPr>
-        <p:style>
-          <a:lnRef idx="1">
-            <a:schemeClr val="accent1"/>
-          </a:lnRef>
-          <a:fillRef idx="3">
-            <a:schemeClr val="accent1"/>
-          </a:fillRef>
-          <a:effectRef idx="2">
-            <a:schemeClr val="accent1"/>
-          </a:effectRef>
-          <a:fontRef idx="minor">
-            <a:schemeClr val="lt1"/>
-          </a:fontRef>
-        </p:style>
-        <p:txBody>
-          <a:bodyPr rtlCol="0" anchor="ctr"/>
-          <a:lstStyle/>
-          <a:p/>
-        </p:txBody>
-      </p:sp>
-      <p:sp>
-        <p:nvSpPr>
-          <p:cNvPr id="26" name="TextBox 25"/>
-          <p:cNvSpPr txBox="1"/>
-          <p:nvPr/>
-        </p:nvSpPr>
-        <p:spPr>
-          <a:xfrm>
-            <a:off x="7103842" y="4076700"/>
-            <a:ext cx="1193030" cy="1173480"/>
-          </a:xfrm>
-          <a:prstGeom prst="rect">
-            <a:avLst/>
-          </a:prstGeom>
-          <a:noFill/>
-        </p:spPr>
-        <p:txBody>
-          <a:bodyPr wrap="square" anchor="t" lIns="0" rIns="0" tIns="0" bIns="0"/>
-          <a:lstStyle/>
-          <a:p>
-            <a:pPr algn="l"/>
-            <a:r>
-              <a:rPr sz="1700" b="0" i="0">
-                <a:solidFill>
-                  <a:srgbClr val="202122"/>
-                </a:solidFill>
-                <a:latin typeface="Calibri"/>
-              </a:rPr>
-              <a:t>When it will change.</a:t>
-            </a:r>
-          </a:p>
-        </p:txBody>
-      </p:sp>
-      <p:sp>
-        <p:nvSpPr>
-          <p:cNvPr id="27" name="Oval 26"/>
-          <p:cNvSpPr/>
-          <p:nvPr/>
-        </p:nvSpPr>
-        <p:spPr>
-          <a:xfrm>
-            <a:off x="8984829" y="2385060"/>
-            <a:ext cx="640080" cy="640080"/>
-          </a:xfrm>
-          <a:prstGeom prst="ellipse">
-            <a:avLst/>
-          </a:prstGeom>
-          <a:solidFill>
-            <a:srgbClr val="33C17A"/>
-          </a:solidFill>
-          <a:ln>
-            <a:noFill/>
-          </a:ln>
-          <a:effectLst/>
-        </p:spPr>
-        <p:style>
-          <a:lnRef idx="1">
-            <a:schemeClr val="accent1"/>
-          </a:lnRef>
-          <a:fillRef idx="3">
-            <a:schemeClr val="accent1"/>
-          </a:fillRef>
-          <a:effectRef idx="2">
-            <a:schemeClr val="accent1"/>
-          </a:effectRef>
-          <a:fontRef idx="minor">
-            <a:schemeClr val="lt1"/>
-          </a:fontRef>
-        </p:style>
-        <p:txBody>
-          <a:bodyPr rtlCol="0" anchor="ctr" lIns="0" rIns="0" tIns="0" bIns="0"/>
-          <a:lstStyle/>
-          <a:p>
-            <a:pPr algn="ctr"/>
-            <a:r>
-              <a:rPr sz="2000" b="1">
-                <a:solidFill>
-                  <a:srgbClr val="202122"/>
-                </a:solidFill>
-                <a:latin typeface="Calibri"/>
-              </a:rPr>
-              <a:t>6</a:t>
-            </a:r>
-          </a:p>
-        </p:txBody>
-      </p:sp>
-      <p:sp>
-        <p:nvSpPr>
-          <p:cNvPr id="28" name="TextBox 27"/>
-          <p:cNvSpPr txBox="1"/>
-          <p:nvPr/>
-        </p:nvSpPr>
-        <p:spPr>
-          <a:xfrm>
-            <a:off x="8571193" y="3162300"/>
-            <a:ext cx="1467350" cy="731520"/>
-          </a:xfrm>
-          <a:prstGeom prst="rect">
-            <a:avLst/>
-          </a:prstGeom>
-          <a:noFill/>
-        </p:spPr>
-        <p:txBody>
-          <a:bodyPr wrap="square" anchor="t" lIns="0" rIns="0" tIns="0" bIns="0"/>
-          <a:lstStyle/>
-          <a:p>
-            <a:pPr algn="ctr"/>
-            <a:r>
-              <a:rPr sz="1600" b="1" i="0">
-                <a:solidFill>
-                  <a:srgbClr val="03306E"/>
-                </a:solidFill>
-                <a:latin typeface="Calibri"/>
-              </a:rPr>
-              <a:t>Regression test</a:t>
-            </a:r>
-          </a:p>
-        </p:txBody>
-      </p:sp>
-      <p:sp>
-        <p:nvSpPr>
-          <p:cNvPr id="29" name="Rounded Rectangle 28"/>
-          <p:cNvSpPr/>
-          <p:nvPr/>
-        </p:nvSpPr>
-        <p:spPr>
-          <a:xfrm>
-            <a:off x="8571193" y="3939540"/>
-            <a:ext cx="1467350" cy="1447800"/>
-          </a:xfrm>
-          <a:prstGeom prst="roundRect">
-            <a:avLst>
-              <a:gd name="adj" fmla="val 6000"/>
-            </a:avLst>
-          </a:prstGeom>
-          <a:solidFill>
-            <a:srgbClr val="EAF3FF"/>
-          </a:solidFill>
-          <a:ln>
-            <a:noFill/>
-          </a:ln>
-          <a:effectLst/>
-        </p:spPr>
-        <p:style>
-          <a:lnRef idx="1">
-            <a:schemeClr val="accent1"/>
-          </a:lnRef>
-          <a:fillRef idx="3">
-            <a:schemeClr val="accent1"/>
-          </a:fillRef>
-          <a:effectRef idx="2">
-            <a:schemeClr val="accent1"/>
-          </a:effectRef>
-          <a:fontRef idx="minor">
-            <a:schemeClr val="lt1"/>
-          </a:fontRef>
-        </p:style>
-        <p:txBody>
-          <a:bodyPr rtlCol="0" anchor="ctr"/>
-          <a:lstStyle/>
-          <a:p/>
-        </p:txBody>
-      </p:sp>
-      <p:sp>
-        <p:nvSpPr>
-          <p:cNvPr id="30" name="TextBox 29"/>
-          <p:cNvSpPr txBox="1"/>
-          <p:nvPr/>
-        </p:nvSpPr>
-        <p:spPr>
-          <a:xfrm>
-            <a:off x="8708353" y="4076700"/>
-            <a:ext cx="1193030" cy="1173480"/>
-          </a:xfrm>
-          <a:prstGeom prst="rect">
-            <a:avLst/>
-          </a:prstGeom>
-          <a:noFill/>
-        </p:spPr>
-        <p:txBody>
-          <a:bodyPr wrap="square" anchor="t" lIns="0" rIns="0" tIns="0" bIns="0"/>
-          <a:lstStyle/>
-          <a:p>
-            <a:pPr algn="l"/>
-            <a:r>
-              <a:rPr sz="1700" b="0" i="0">
-                <a:solidFill>
-                  <a:srgbClr val="202122"/>
-                </a:solidFill>
-                <a:latin typeface="Calibri"/>
-              </a:rPr>
-              <a:t>Check nothing else broke.</a:t>
-            </a:r>
-          </a:p>
-        </p:txBody>
-      </p:sp>
-      <p:sp>
-        <p:nvSpPr>
-          <p:cNvPr id="31" name="Oval 30"/>
-          <p:cNvSpPr/>
-          <p:nvPr/>
-        </p:nvSpPr>
-        <p:spPr>
-          <a:xfrm>
-            <a:off x="10589339" y="2385060"/>
-            <a:ext cx="640080" cy="640080"/>
-          </a:xfrm>
-          <a:prstGeom prst="ellipse">
-            <a:avLst/>
-          </a:prstGeom>
-          <a:solidFill>
-            <a:srgbClr val="33C17A"/>
-          </a:solidFill>
-          <a:ln>
-            <a:noFill/>
-          </a:ln>
-          <a:effectLst/>
-        </p:spPr>
-        <p:style>
-          <a:lnRef idx="1">
-            <a:schemeClr val="accent1"/>
-          </a:lnRef>
-          <a:fillRef idx="3">
-            <a:schemeClr val="accent1"/>
-          </a:fillRef>
-          <a:effectRef idx="2">
-            <a:schemeClr val="accent1"/>
-          </a:effectRef>
-          <a:fontRef idx="minor">
-            <a:schemeClr val="lt1"/>
-          </a:fontRef>
-        </p:style>
-        <p:txBody>
-          <a:bodyPr rtlCol="0" anchor="ctr" lIns="0" rIns="0" tIns="0" bIns="0"/>
-          <a:lstStyle/>
-          <a:p>
-            <a:pPr algn="ctr"/>
-            <a:r>
-              <a:rPr sz="2000" b="1">
-                <a:solidFill>
-                  <a:srgbClr val="202122"/>
-                </a:solidFill>
-                <a:latin typeface="Calibri"/>
-              </a:rPr>
-              <a:t>7</a:t>
-            </a:r>
-          </a:p>
-        </p:txBody>
-      </p:sp>
-      <p:sp>
-        <p:nvSpPr>
-          <p:cNvPr id="32" name="TextBox 31"/>
-          <p:cNvSpPr txBox="1"/>
-          <p:nvPr/>
-        </p:nvSpPr>
-        <p:spPr>
-          <a:xfrm>
-            <a:off x="10175704" y="3162300"/>
-            <a:ext cx="1467350" cy="731520"/>
-          </a:xfrm>
-          <a:prstGeom prst="rect">
-            <a:avLst/>
-          </a:prstGeom>
-          <a:noFill/>
-        </p:spPr>
-        <p:txBody>
-          <a:bodyPr wrap="square" anchor="t" lIns="0" rIns="0" tIns="0" bIns="0"/>
-          <a:lstStyle/>
-          <a:p>
-            <a:pPr algn="ctr"/>
-            <a:r>
-              <a:rPr sz="1600" b="1" i="0">
-                <a:solidFill>
-                  <a:srgbClr val="03306E"/>
-                </a:solidFill>
-                <a:latin typeface="Calibri"/>
-              </a:rPr>
-              <a:t>Release</a:t>
-            </a:r>
-          </a:p>
-        </p:txBody>
-      </p:sp>
-      <p:sp>
-        <p:nvSpPr>
-          <p:cNvPr id="33" name="Rounded Rectangle 32"/>
-          <p:cNvSpPr/>
-          <p:nvPr/>
-        </p:nvSpPr>
-        <p:spPr>
-          <a:xfrm>
-            <a:off x="10175704" y="3939540"/>
-            <a:ext cx="1467350" cy="1447800"/>
-          </a:xfrm>
-          <a:prstGeom prst="roundRect">
-            <a:avLst>
-              <a:gd name="adj" fmla="val 6000"/>
-            </a:avLst>
-          </a:prstGeom>
-          <a:solidFill>
-            <a:srgbClr val="EAF3FF"/>
-          </a:solidFill>
-          <a:ln>
-            <a:noFill/>
-          </a:ln>
-          <a:effectLst/>
-        </p:spPr>
-        <p:style>
-          <a:lnRef idx="1">
-            <a:schemeClr val="accent1"/>
-          </a:lnRef>
-          <a:fillRef idx="3">
-            <a:schemeClr val="accent1"/>
-          </a:fillRef>
-          <a:effectRef idx="2">
-            <a:schemeClr val="accent1"/>
-          </a:effectRef>
-          <a:fontRef idx="minor">
-            <a:schemeClr val="lt1"/>
-          </a:fontRef>
-        </p:style>
-        <p:txBody>
-          <a:bodyPr rtlCol="0" anchor="ctr"/>
-          <a:lstStyle/>
-          <a:p/>
-        </p:txBody>
-      </p:sp>
-      <p:sp>
-        <p:nvSpPr>
-          <p:cNvPr id="34" name="TextBox 33"/>
-          <p:cNvSpPr txBox="1"/>
-          <p:nvPr/>
-        </p:nvSpPr>
-        <p:spPr>
-          <a:xfrm>
-            <a:off x="10312864" y="4076700"/>
-            <a:ext cx="1193030" cy="1173480"/>
-          </a:xfrm>
-          <a:prstGeom prst="rect">
-            <a:avLst/>
-          </a:prstGeom>
-          <a:noFill/>
-        </p:spPr>
-        <p:txBody>
-          <a:bodyPr wrap="square" anchor="t" lIns="0" rIns="0" tIns="0" bIns="0"/>
-          <a:lstStyle/>
-          <a:p>
-            <a:pPr algn="l"/>
-            <a:r>
-              <a:rPr sz="1700" b="0" i="0">
-                <a:solidFill>
-                  <a:srgbClr val="202122"/>
-                </a:solidFill>
-                <a:latin typeface="Calibri"/>
-              </a:rPr>
-              <a:t>Planned or emergency.</a:t>
+              <a:t>Staying relevant: feedback, new tech, competition, efficiency, future-proofing.</a:t>
             </a:r>
           </a:p>
         </p:txBody>
@@ -7214,7 +10248,7 @@
                 </a:solidFill>
                 <a:latin typeface="Cambria"/>
               </a:rPr>
-              <a:t>Maintaining code and supporting users</a:t>
+              <a:t>Quick check: Why products change</a:t>
             </a:r>
           </a:p>
         </p:txBody>
@@ -7287,22 +10321,20 @@
       </p:sp>
       <p:sp>
         <p:nvSpPr>
-          <p:cNvPr id="6" name="Rounded Rectangle 5"/>
+          <p:cNvPr id="6" name="Oval 5"/>
           <p:cNvSpPr/>
           <p:nvPr/>
         </p:nvSpPr>
         <p:spPr>
           <a:xfrm>
-            <a:off x="548640" y="1600200"/>
-            <a:ext cx="5364327" cy="640080"/>
-          </a:xfrm>
-          <a:prstGeom prst="roundRect">
-            <a:avLst>
-              <a:gd name="adj" fmla="val 15000"/>
-            </a:avLst>
+            <a:off x="548640" y="1691640"/>
+            <a:ext cx="502920" cy="502920"/>
+          </a:xfrm>
+          <a:prstGeom prst="ellipse">
+            <a:avLst/>
           </a:prstGeom>
           <a:solidFill>
-            <a:srgbClr val="03306E"/>
+            <a:srgbClr val="33C17A"/>
           </a:solidFill>
           <a:ln>
             <a:noFill/>
@@ -7324,9 +10356,20 @@
           </a:fontRef>
         </p:style>
         <p:txBody>
-          <a:bodyPr rtlCol="0" anchor="ctr"/>
-          <a:lstStyle/>
-          <a:p/>
+          <a:bodyPr rtlCol="0" anchor="ctr" lIns="0" rIns="0" tIns="0" bIns="0"/>
+          <a:lstStyle/>
+          <a:p>
+            <a:pPr algn="ctr"/>
+            <a:r>
+              <a:rPr sz="1600" b="1">
+                <a:solidFill>
+                  <a:srgbClr val="202122"/>
+                </a:solidFill>
+                <a:latin typeface="Calibri"/>
+              </a:rPr>
+              <a:t>1</a:t>
+            </a:r>
+          </a:p>
         </p:txBody>
       </p:sp>
       <p:sp>
@@ -7337,49 +10380,47 @@
         </p:nvSpPr>
         <p:spPr>
           <a:xfrm>
-            <a:off x="777240" y="1600200"/>
-            <a:ext cx="4907127" cy="640080"/>
-          </a:xfrm>
-          <a:prstGeom prst="rect">
-            <a:avLst/>
-          </a:prstGeom>
-          <a:noFill/>
-        </p:spPr>
-        <p:txBody>
-          <a:bodyPr wrap="square" anchor="ctr" lIns="0" rIns="0" tIns="0" bIns="0"/>
+            <a:off x="1371600" y="1645920"/>
+            <a:ext cx="10271455" cy="1188720"/>
+          </a:xfrm>
+          <a:prstGeom prst="rect">
+            <a:avLst/>
+          </a:prstGeom>
+          <a:noFill/>
+        </p:spPr>
+        <p:txBody>
+          <a:bodyPr wrap="square" anchor="t" lIns="0" rIns="0" tIns="0" bIns="0"/>
           <a:lstStyle/>
           <a:p>
             <a:pPr algn="l"/>
             <a:r>
-              <a:rPr sz="2000" b="1" i="0">
-                <a:solidFill>
-                  <a:srgbClr val="FFFFFF"/>
-                </a:solidFill>
-                <a:latin typeface="Calibri"/>
-              </a:rPr>
-              <a:t>Maintaining code in a team</a:t>
-            </a:r>
-          </a:p>
-        </p:txBody>
-      </p:sp>
-      <p:sp>
-        <p:nvSpPr>
-          <p:cNvPr id="8" name="Rounded Rectangle 7"/>
+              <a:rPr sz="2400" b="0" i="0">
+                <a:solidFill>
+                  <a:srgbClr val="202122"/>
+                </a:solidFill>
+                <a:latin typeface="Calibri"/>
+              </a:rPr>
+              <a:t>Fixing a zero-day is which type of change?</a:t>
+            </a:r>
+          </a:p>
+        </p:txBody>
+      </p:sp>
+      <p:sp>
+        <p:nvSpPr>
+          <p:cNvPr id="8" name="Oval 7"/>
           <p:cNvSpPr/>
           <p:nvPr/>
         </p:nvSpPr>
         <p:spPr>
           <a:xfrm>
-            <a:off x="548640" y="2377440"/>
-            <a:ext cx="5364327" cy="3794760"/>
-          </a:xfrm>
-          <a:prstGeom prst="roundRect">
-            <a:avLst>
-              <a:gd name="adj" fmla="val 4000"/>
-            </a:avLst>
+            <a:off x="548640" y="3108960"/>
+            <a:ext cx="502920" cy="502920"/>
+          </a:xfrm>
+          <a:prstGeom prst="ellipse">
+            <a:avLst/>
           </a:prstGeom>
           <a:solidFill>
-            <a:srgbClr val="EAF3FF"/>
+            <a:srgbClr val="33C17A"/>
           </a:solidFill>
           <a:ln>
             <a:noFill/>
@@ -7401,9 +10442,20 @@
           </a:fontRef>
         </p:style>
         <p:txBody>
-          <a:bodyPr rtlCol="0" anchor="ctr"/>
-          <a:lstStyle/>
-          <a:p/>
+          <a:bodyPr rtlCol="0" anchor="ctr" lIns="0" rIns="0" tIns="0" bIns="0"/>
+          <a:lstStyle/>
+          <a:p>
+            <a:pPr algn="ctr"/>
+            <a:r>
+              <a:rPr sz="1600" b="1">
+                <a:solidFill>
+                  <a:srgbClr val="202122"/>
+                </a:solidFill>
+                <a:latin typeface="Calibri"/>
+              </a:rPr>
+              <a:t>2</a:t>
+            </a:r>
+          </a:p>
         </p:txBody>
       </p:sp>
       <p:sp>
@@ -7414,144 +10466,47 @@
         </p:nvSpPr>
         <p:spPr>
           <a:xfrm>
-            <a:off x="822959" y="2606040"/>
-            <a:ext cx="4815687" cy="3337560"/>
-          </a:xfrm>
-          <a:prstGeom prst="rect">
-            <a:avLst/>
-          </a:prstGeom>
-          <a:noFill/>
-        </p:spPr>
-        <p:txBody>
-          <a:bodyPr wrap="square" lIns="0" rIns="0" tIns="0" bIns="0">
-            <a:spAutoFit/>
-          </a:bodyPr>
-          <a:lstStyle/>
-          <a:p>
-            <a:pPr marL="274320" indent="-274320">
-              <a:spcAft>
-                <a:spcPts val="990"/>
-              </a:spcAft>
-              <a:buClr>
-                <a:srgbClr val="0645AD"/>
-              </a:buClr>
-              <a:buFont typeface="Arial"/>
-              <a:buChar char="•"/>
-            </a:pPr>
-            <a:r>
-              <a:rPr sz="2200" b="0">
+            <a:off x="1371600" y="3063240"/>
+            <a:ext cx="10271455" cy="1188720"/>
+          </a:xfrm>
+          <a:prstGeom prst="rect">
+            <a:avLst/>
+          </a:prstGeom>
+          <a:noFill/>
+        </p:spPr>
+        <p:txBody>
+          <a:bodyPr wrap="square" anchor="t" lIns="0" rIns="0" tIns="0" bIns="0"/>
+          <a:lstStyle/>
+          <a:p>
+            <a:pPr algn="l"/>
+            <a:r>
+              <a:rPr sz="2400" b="0" i="0">
                 <a:solidFill>
                   <a:srgbClr val="202122"/>
                 </a:solidFill>
                 <a:latin typeface="Calibri"/>
               </a:rPr>
-              <a:t>Separate code into modules</a:t>
-            </a:r>
-          </a:p>
-          <a:p>
-            <a:pPr marL="274320" indent="-274320">
-              <a:spcAft>
-                <a:spcPts val="990"/>
-              </a:spcAft>
-              <a:buClr>
-                <a:srgbClr val="0645AD"/>
-              </a:buClr>
-              <a:buFont typeface="Arial"/>
-              <a:buChar char="•"/>
-            </a:pPr>
-            <a:r>
-              <a:rPr sz="2200" b="0">
-                <a:solidFill>
-                  <a:srgbClr val="202122"/>
-                </a:solidFill>
-                <a:latin typeface="Calibri"/>
-              </a:rPr>
-              <a:t>Write readable code</a:t>
-            </a:r>
-          </a:p>
-          <a:p>
-            <a:pPr marL="274320" indent="-274320">
-              <a:spcAft>
-                <a:spcPts val="990"/>
-              </a:spcAft>
-              <a:buClr>
-                <a:srgbClr val="0645AD"/>
-              </a:buClr>
-              <a:buFont typeface="Arial"/>
-              <a:buChar char="•"/>
-            </a:pPr>
-            <a:r>
-              <a:rPr sz="2200" b="0">
-                <a:solidFill>
-                  <a:srgbClr val="202122"/>
-                </a:solidFill>
-                <a:latin typeface="Calibri"/>
-              </a:rPr>
-              <a:t>Follow agreed conventions</a:t>
-            </a:r>
-          </a:p>
-          <a:p>
-            <a:pPr marL="274320" indent="-274320">
-              <a:spcAft>
-                <a:spcPts val="990"/>
-              </a:spcAft>
-              <a:buClr>
-                <a:srgbClr val="0645AD"/>
-              </a:buClr>
-              <a:buFont typeface="Arial"/>
-              <a:buChar char="•"/>
-            </a:pPr>
-            <a:r>
-              <a:rPr sz="2200" b="0">
-                <a:solidFill>
-                  <a:srgbClr val="202122"/>
-                </a:solidFill>
-                <a:latin typeface="Calibri"/>
-              </a:rPr>
-              <a:t>Comment helpfully</a:t>
-            </a:r>
-          </a:p>
-          <a:p>
-            <a:pPr marL="274320" indent="-274320">
-              <a:spcAft>
-                <a:spcPts val="990"/>
-              </a:spcAft>
-              <a:buClr>
-                <a:srgbClr val="0645AD"/>
-              </a:buClr>
-              <a:buFont typeface="Arial"/>
-              <a:buChar char="•"/>
-            </a:pPr>
-            <a:r>
-              <a:rPr sz="2200" b="0">
-                <a:solidFill>
-                  <a:srgbClr val="202122"/>
-                </a:solidFill>
-                <a:latin typeface="Calibri"/>
-              </a:rPr>
-              <a:t>Keep change logs up to date</a:t>
-            </a:r>
-          </a:p>
-        </p:txBody>
-      </p:sp>
-      <p:sp>
-        <p:nvSpPr>
-          <p:cNvPr id="10" name="Rounded Rectangle 9"/>
+              <a:t>Adding a feature users requested is which type?</a:t>
+            </a:r>
+          </a:p>
+        </p:txBody>
+      </p:sp>
+      <p:sp>
+        <p:nvSpPr>
+          <p:cNvPr id="10" name="Oval 9"/>
           <p:cNvSpPr/>
           <p:nvPr/>
         </p:nvSpPr>
         <p:spPr>
           <a:xfrm>
-            <a:off x="6278727" y="1600200"/>
-            <a:ext cx="5364327" cy="640080"/>
-          </a:xfrm>
-          <a:prstGeom prst="roundRect">
-            <a:avLst>
-              <a:gd name="adj" fmla="val 15000"/>
-            </a:avLst>
+            <a:off x="548640" y="4526280"/>
+            <a:ext cx="502920" cy="502920"/>
+          </a:xfrm>
+          <a:prstGeom prst="ellipse">
+            <a:avLst/>
           </a:prstGeom>
           <a:solidFill>
-            <a:srgbClr val="0645AD"/>
+            <a:srgbClr val="33C17A"/>
           </a:solidFill>
           <a:ln>
             <a:noFill/>
@@ -7573,9 +10528,20 @@
           </a:fontRef>
         </p:style>
         <p:txBody>
-          <a:bodyPr rtlCol="0" anchor="ctr"/>
-          <a:lstStyle/>
-          <a:p/>
+          <a:bodyPr rtlCol="0" anchor="ctr" lIns="0" rIns="0" tIns="0" bIns="0"/>
+          <a:lstStyle/>
+          <a:p>
+            <a:pPr algn="ctr"/>
+            <a:r>
+              <a:rPr sz="1600" b="1">
+                <a:solidFill>
+                  <a:srgbClr val="202122"/>
+                </a:solidFill>
+                <a:latin typeface="Calibri"/>
+              </a:rPr>
+              <a:t>3</a:t>
+            </a:r>
+          </a:p>
         </p:txBody>
       </p:sp>
       <p:sp>
@@ -7586,178 +10552,60 @@
         </p:nvSpPr>
         <p:spPr>
           <a:xfrm>
-            <a:off x="6507327" y="1600200"/>
-            <a:ext cx="4907127" cy="640080"/>
-          </a:xfrm>
-          <a:prstGeom prst="rect">
-            <a:avLst/>
-          </a:prstGeom>
-          <a:noFill/>
-        </p:spPr>
-        <p:txBody>
-          <a:bodyPr wrap="square" anchor="ctr" lIns="0" rIns="0" tIns="0" bIns="0"/>
+            <a:off x="1371600" y="4480560"/>
+            <a:ext cx="10271455" cy="1188720"/>
+          </a:xfrm>
+          <a:prstGeom prst="rect">
+            <a:avLst/>
+          </a:prstGeom>
+          <a:noFill/>
+        </p:spPr>
+        <p:txBody>
+          <a:bodyPr wrap="square" anchor="t" lIns="0" rIns="0" tIns="0" bIns="0"/>
           <a:lstStyle/>
           <a:p>
             <a:pPr algn="l"/>
             <a:r>
-              <a:rPr sz="2000" b="1" i="0">
-                <a:solidFill>
-                  <a:srgbClr val="FFFFFF"/>
-                </a:solidFill>
-                <a:latin typeface="Calibri"/>
-              </a:rPr>
-              <a:t>Communicating with users</a:t>
-            </a:r>
-          </a:p>
-        </p:txBody>
-      </p:sp>
-      <p:sp>
-        <p:nvSpPr>
-          <p:cNvPr id="12" name="Rounded Rectangle 11"/>
-          <p:cNvSpPr/>
-          <p:nvPr/>
-        </p:nvSpPr>
-        <p:spPr>
-          <a:xfrm>
-            <a:off x="6278727" y="2377440"/>
-            <a:ext cx="5364327" cy="3794760"/>
-          </a:xfrm>
-          <a:prstGeom prst="roundRect">
-            <a:avLst>
-              <a:gd name="adj" fmla="val 4000"/>
-            </a:avLst>
-          </a:prstGeom>
-          <a:solidFill>
-            <a:srgbClr val="EAF3FF"/>
-          </a:solidFill>
-          <a:ln>
-            <a:noFill/>
-          </a:ln>
-          <a:effectLst/>
-        </p:spPr>
-        <p:style>
-          <a:lnRef idx="1">
-            <a:schemeClr val="accent1"/>
-          </a:lnRef>
-          <a:fillRef idx="3">
-            <a:schemeClr val="accent1"/>
-          </a:fillRef>
-          <a:effectRef idx="2">
-            <a:schemeClr val="accent1"/>
-          </a:effectRef>
-          <a:fontRef idx="minor">
-            <a:schemeClr val="lt1"/>
-          </a:fontRef>
-        </p:style>
-        <p:txBody>
-          <a:bodyPr rtlCol="0" anchor="ctr"/>
-          <a:lstStyle/>
-          <a:p/>
-        </p:txBody>
-      </p:sp>
-      <p:sp>
-        <p:nvSpPr>
-          <p:cNvPr id="13" name="TextBox 12"/>
-          <p:cNvSpPr txBox="1"/>
-          <p:nvPr/>
-        </p:nvSpPr>
-        <p:spPr>
-          <a:xfrm>
-            <a:off x="6553047" y="2606040"/>
-            <a:ext cx="4815687" cy="3337560"/>
-          </a:xfrm>
-          <a:prstGeom prst="rect">
-            <a:avLst/>
-          </a:prstGeom>
-          <a:noFill/>
-        </p:spPr>
-        <p:txBody>
-          <a:bodyPr wrap="square" lIns="0" rIns="0" tIns="0" bIns="0">
-            <a:spAutoFit/>
-          </a:bodyPr>
-          <a:lstStyle/>
-          <a:p>
-            <a:pPr marL="274320" indent="-274320">
-              <a:spcAft>
-                <a:spcPts val="990"/>
-              </a:spcAft>
-              <a:buClr>
-                <a:srgbClr val="0645AD"/>
-              </a:buClr>
-              <a:buFont typeface="Arial"/>
-              <a:buChar char="•"/>
-            </a:pPr>
-            <a:r>
-              <a:rPr sz="2200" b="0">
+              <a:rPr sz="2400" b="0" i="0">
                 <a:solidFill>
                   <a:srgbClr val="202122"/>
                 </a:solidFill>
                 <a:latin typeface="Calibri"/>
               </a:rPr>
-              <a:t>Face to face and remote calls</a:t>
-            </a:r>
-          </a:p>
-          <a:p>
-            <a:pPr marL="274320" indent="-274320">
-              <a:spcAft>
-                <a:spcPts val="990"/>
-              </a:spcAft>
-              <a:buClr>
-                <a:srgbClr val="0645AD"/>
-              </a:buClr>
-              <a:buFont typeface="Arial"/>
-              <a:buChar char="•"/>
-            </a:pPr>
-            <a:r>
-              <a:rPr sz="2200" b="0">
-                <a:solidFill>
-                  <a:srgbClr val="202122"/>
-                </a:solidFill>
-                <a:latin typeface="Calibri"/>
-              </a:rPr>
-              <a:t>Blogs, reports, release notes, guides, FAQs</a:t>
-            </a:r>
-          </a:p>
-          <a:p>
-            <a:pPr marL="274320" indent="-274320">
-              <a:spcAft>
-                <a:spcPts val="990"/>
-              </a:spcAft>
-              <a:buClr>
-                <a:srgbClr val="0645AD"/>
-              </a:buClr>
-              <a:buFont typeface="Arial"/>
-              <a:buChar char="•"/>
-            </a:pPr>
-            <a:r>
-              <a:rPr sz="2200" b="0">
-                <a:solidFill>
-                  <a:srgbClr val="202122"/>
-                </a:solidFill>
-                <a:latin typeface="Calibri"/>
-              </a:rPr>
-              <a:t>Demonstrations, screencasts, narration</a:t>
-            </a:r>
-          </a:p>
-          <a:p>
-            <a:pPr marL="274320" indent="-274320">
-              <a:spcAft>
-                <a:spcPts val="990"/>
-              </a:spcAft>
-              <a:buClr>
-                <a:srgbClr val="0645AD"/>
-              </a:buClr>
-              <a:buFont typeface="Arial"/>
-              <a:buChar char="•"/>
-            </a:pPr>
-            <a:r>
-              <a:rPr sz="2200" b="0">
-                <a:solidFill>
-                  <a:srgbClr val="202122"/>
-                </a:solidFill>
-                <a:latin typeface="Calibri"/>
-              </a:rPr>
-              <a:t>Machine-readable API contracts</a:t>
+              <a:t>Give an example of a preventing change.</a:t>
+            </a:r>
+          </a:p>
+        </p:txBody>
+      </p:sp>
+      <p:sp>
+        <p:nvSpPr>
+          <p:cNvPr id="12" name="TextBox 11"/>
+          <p:cNvSpPr txBox="1"/>
+          <p:nvPr/>
+        </p:nvSpPr>
+        <p:spPr>
+          <a:xfrm>
+            <a:off x="548640" y="5852160"/>
+            <a:ext cx="11094415" cy="365760"/>
+          </a:xfrm>
+          <a:prstGeom prst="rect">
+            <a:avLst/>
+          </a:prstGeom>
+          <a:noFill/>
+        </p:spPr>
+        <p:txBody>
+          <a:bodyPr wrap="square" anchor="t" lIns="0" rIns="0" tIns="0" bIns="0"/>
+          <a:lstStyle/>
+          <a:p>
+            <a:pPr algn="l"/>
+            <a:r>
+              <a:rPr sz="1300" b="0" i="1">
+                <a:solidFill>
+                  <a:srgbClr val="54595D"/>
+                </a:solidFill>
+                <a:latin typeface="Calibri"/>
+              </a:rPr>
+              <a:t>Answer on mini whiteboards or in your book. Answers are in the speaker notes.</a:t>
             </a:r>
           </a:p>
         </p:txBody>
@@ -7849,7 +10697,7 @@
                 </a:solidFill>
                 <a:latin typeface="Cambria"/>
               </a:rPr>
-              <a:t>Resolving user issues</a:t>
+              <a:t>Software change management</a:t>
             </a:r>
           </a:p>
         </p:txBody>
@@ -7922,20 +10770,77 @@
       </p:sp>
       <p:sp>
         <p:nvSpPr>
-          <p:cNvPr id="6" name="Rectangle 5"/>
+          <p:cNvPr id="6" name="TextBox 5"/>
+          <p:cNvSpPr txBox="1"/>
+          <p:nvPr/>
+        </p:nvSpPr>
+        <p:spPr>
+          <a:xfrm>
+            <a:off x="548640" y="1554480"/>
+            <a:ext cx="6720840" cy="4617720"/>
+          </a:xfrm>
+          <a:prstGeom prst="rect">
+            <a:avLst/>
+          </a:prstGeom>
+          <a:noFill/>
+        </p:spPr>
+        <p:txBody>
+          <a:bodyPr wrap="square" lIns="0" rIns="0" tIns="0" bIns="0">
+            <a:spAutoFit/>
+          </a:bodyPr>
+          <a:lstStyle/>
+          <a:p>
+            <a:pPr>
+              <a:spcAft>
+                <a:spcPts val="1320"/>
+              </a:spcAft>
+            </a:pPr>
+            <a:r>
+              <a:rPr sz="2200" b="0">
+                <a:solidFill>
+                  <a:srgbClr val="202122"/>
+                </a:solidFill>
+                <a:latin typeface="Calibri"/>
+              </a:rPr>
+              <a:t>Changing live software is managed in stages.</a:t>
+            </a:r>
+          </a:p>
+          <a:p>
+            <a:pPr>
+              <a:spcAft>
+                <a:spcPts val="1320"/>
+              </a:spcAft>
+            </a:pPr>
+            <a:r>
+              <a:rPr sz="2200" b="0">
+                <a:solidFill>
+                  <a:srgbClr val="202122"/>
+                </a:solidFill>
+                <a:latin typeface="Calibri"/>
+              </a:rPr>
+              <a:t>Identify the changes needed from feedback or review. Document the developments. Communicate with technical and non-technical audiences. Plan the changes. Schedule them. Regression test to make sure nothing else broke. Control and release the update, whether it's planned or an emergency fix.</a:t>
+            </a:r>
+          </a:p>
+        </p:txBody>
+      </p:sp>
+      <p:sp>
+        <p:nvSpPr>
+          <p:cNvPr id="7" name="Rounded Rectangle 6"/>
           <p:cNvSpPr/>
           <p:nvPr/>
         </p:nvSpPr>
         <p:spPr>
           <a:xfrm>
-            <a:off x="1603217" y="2656332"/>
-            <a:ext cx="8985260" cy="36576"/>
-          </a:xfrm>
-          <a:prstGeom prst="rect">
-            <a:avLst/>
+            <a:off x="7772400" y="1554480"/>
+            <a:ext cx="3867912" cy="4526280"/>
+          </a:xfrm>
+          <a:prstGeom prst="roundRect">
+            <a:avLst>
+              <a:gd name="adj" fmla="val 8000"/>
+            </a:avLst>
           </a:prstGeom>
           <a:solidFill>
-            <a:srgbClr val="A9C8F0"/>
+            <a:srgbClr val="03306E"/>
           </a:solidFill>
           <a:ln>
             <a:noFill/>
@@ -7964,14 +10869,14 @@
       </p:sp>
       <p:sp>
         <p:nvSpPr>
-          <p:cNvPr id="7" name="Oval 6"/>
+          <p:cNvPr id="8" name="Oval 7"/>
           <p:cNvSpPr/>
           <p:nvPr/>
         </p:nvSpPr>
         <p:spPr>
           <a:xfrm>
-            <a:off x="1283177" y="2354580"/>
-            <a:ext cx="640080" cy="640080"/>
+            <a:off x="8046720" y="1828800"/>
+            <a:ext cx="548640" cy="548640"/>
           </a:xfrm>
           <a:prstGeom prst="ellipse">
             <a:avLst/>
@@ -8004,27 +10909,27 @@
           <a:p>
             <a:pPr algn="ctr"/>
             <a:r>
-              <a:rPr sz="2000" b="1">
+              <a:rPr sz="1300" b="1">
                 <a:solidFill>
                   <a:srgbClr val="202122"/>
                 </a:solidFill>
                 <a:latin typeface="Calibri"/>
               </a:rPr>
-              <a:t>1</a:t>
-            </a:r>
-          </a:p>
-        </p:txBody>
-      </p:sp>
-      <p:sp>
-        <p:nvSpPr>
-          <p:cNvPr id="8" name="TextBox 7"/>
-          <p:cNvSpPr txBox="1"/>
-          <p:nvPr/>
-        </p:nvSpPr>
-        <p:spPr>
-          <a:xfrm>
-            <a:off x="548640" y="3131820"/>
-            <a:ext cx="2109155" cy="731520"/>
+              <a:t>e.g.</a:t>
+            </a:r>
+          </a:p>
+        </p:txBody>
+      </p:sp>
+      <p:sp>
+        <p:nvSpPr>
+          <p:cNvPr id="9" name="TextBox 8"/>
+          <p:cNvSpPr txBox="1"/>
+          <p:nvPr/>
+        </p:nvSpPr>
+        <p:spPr>
+          <a:xfrm>
+            <a:off x="8046720" y="2560320"/>
+            <a:ext cx="3291840" cy="365760"/>
           </a:xfrm>
           <a:prstGeom prst="rect">
             <a:avLst/>
@@ -8035,61 +10940,17 @@
           <a:bodyPr wrap="square" anchor="t" lIns="0" rIns="0" tIns="0" bIns="0"/>
           <a:lstStyle/>
           <a:p>
-            <a:pPr algn="ctr"/>
-            <a:r>
-              <a:rPr sz="1700" b="1" i="0">
-                <a:solidFill>
-                  <a:srgbClr val="03306E"/>
-                </a:solidFill>
-                <a:latin typeface="Calibri"/>
-              </a:rPr>
-              <a:t>Replicate</a:t>
-            </a:r>
-          </a:p>
-        </p:txBody>
-      </p:sp>
-      <p:sp>
-        <p:nvSpPr>
-          <p:cNvPr id="9" name="Rounded Rectangle 8"/>
-          <p:cNvSpPr/>
-          <p:nvPr/>
-        </p:nvSpPr>
-        <p:spPr>
-          <a:xfrm>
-            <a:off x="548640" y="3909060"/>
-            <a:ext cx="2109155" cy="1508760"/>
-          </a:xfrm>
-          <a:prstGeom prst="roundRect">
-            <a:avLst>
-              <a:gd name="adj" fmla="val 6000"/>
-            </a:avLst>
-          </a:prstGeom>
-          <a:solidFill>
-            <a:srgbClr val="EAF3FF"/>
-          </a:solidFill>
-          <a:ln>
-            <a:noFill/>
-          </a:ln>
-          <a:effectLst/>
-        </p:spPr>
-        <p:style>
-          <a:lnRef idx="1">
-            <a:schemeClr val="accent1"/>
-          </a:lnRef>
-          <a:fillRef idx="3">
-            <a:schemeClr val="accent1"/>
-          </a:fillRef>
-          <a:effectRef idx="2">
-            <a:schemeClr val="accent1"/>
-          </a:effectRef>
-          <a:fontRef idx="minor">
-            <a:schemeClr val="lt1"/>
-          </a:fontRef>
-        </p:style>
-        <p:txBody>
-          <a:bodyPr rtlCol="0" anchor="ctr"/>
-          <a:lstStyle/>
-          <a:p/>
+            <a:pPr algn="l"/>
+            <a:r>
+              <a:rPr sz="1300" b="1" i="0">
+                <a:solidFill>
+                  <a:srgbClr val="A9C8F0"/>
+                </a:solidFill>
+                <a:latin typeface="Calibri"/>
+              </a:rPr>
+              <a:t>EXAMPLE</a:t>
+            </a:r>
+          </a:p>
         </p:txBody>
       </p:sp>
       <p:sp>
@@ -8100,8 +10961,8 @@
         </p:nvSpPr>
         <p:spPr>
           <a:xfrm>
-            <a:off x="685800" y="4046220"/>
-            <a:ext cx="1834835" cy="1234439"/>
+            <a:off x="8046720" y="2971800"/>
+            <a:ext cx="3291840" cy="2971800"/>
           </a:xfrm>
           <a:prstGeom prst="rect">
             <a:avLst/>
@@ -8114,665 +10975,13 @@
           <a:p>
             <a:pPr algn="l"/>
             <a:r>
-              <a:rPr sz="1800" b="0" i="0">
-                <a:solidFill>
-                  <a:srgbClr val="202122"/>
-                </a:solidFill>
-                <a:latin typeface="Calibri"/>
-              </a:rPr>
-              <a:t>Identify or reproduce the issue.</a:t>
-            </a:r>
-          </a:p>
-        </p:txBody>
-      </p:sp>
-      <p:sp>
-        <p:nvSpPr>
-          <p:cNvPr id="11" name="Oval 10"/>
-          <p:cNvSpPr/>
-          <p:nvPr/>
-        </p:nvSpPr>
-        <p:spPr>
-          <a:xfrm>
-            <a:off x="3529492" y="2354580"/>
-            <a:ext cx="640080" cy="640080"/>
-          </a:xfrm>
-          <a:prstGeom prst="ellipse">
-            <a:avLst/>
-          </a:prstGeom>
-          <a:solidFill>
-            <a:srgbClr val="33C17A"/>
-          </a:solidFill>
-          <a:ln>
-            <a:noFill/>
-          </a:ln>
-          <a:effectLst/>
-        </p:spPr>
-        <p:style>
-          <a:lnRef idx="1">
-            <a:schemeClr val="accent1"/>
-          </a:lnRef>
-          <a:fillRef idx="3">
-            <a:schemeClr val="accent1"/>
-          </a:fillRef>
-          <a:effectRef idx="2">
-            <a:schemeClr val="accent1"/>
-          </a:effectRef>
-          <a:fontRef idx="minor">
-            <a:schemeClr val="lt1"/>
-          </a:fontRef>
-        </p:style>
-        <p:txBody>
-          <a:bodyPr rtlCol="0" anchor="ctr" lIns="0" rIns="0" tIns="0" bIns="0"/>
-          <a:lstStyle/>
-          <a:p>
-            <a:pPr algn="ctr"/>
-            <a:r>
-              <a:rPr sz="2000" b="1">
-                <a:solidFill>
-                  <a:srgbClr val="202122"/>
-                </a:solidFill>
-                <a:latin typeface="Calibri"/>
-              </a:rPr>
-              <a:t>2</a:t>
-            </a:r>
-          </a:p>
-        </p:txBody>
-      </p:sp>
-      <p:sp>
-        <p:nvSpPr>
-          <p:cNvPr id="12" name="TextBox 11"/>
-          <p:cNvSpPr txBox="1"/>
-          <p:nvPr/>
-        </p:nvSpPr>
-        <p:spPr>
-          <a:xfrm>
-            <a:off x="2794955" y="3131820"/>
-            <a:ext cx="2109155" cy="731520"/>
-          </a:xfrm>
-          <a:prstGeom prst="rect">
-            <a:avLst/>
-          </a:prstGeom>
-          <a:noFill/>
-        </p:spPr>
-        <p:txBody>
-          <a:bodyPr wrap="square" anchor="t" lIns="0" rIns="0" tIns="0" bIns="0"/>
-          <a:lstStyle/>
-          <a:p>
-            <a:pPr algn="ctr"/>
-            <a:r>
-              <a:rPr sz="1700" b="1" i="0">
-                <a:solidFill>
-                  <a:srgbClr val="03306E"/>
-                </a:solidFill>
-                <a:latin typeface="Calibri"/>
-              </a:rPr>
-              <a:t>Investigate</a:t>
-            </a:r>
-          </a:p>
-        </p:txBody>
-      </p:sp>
-      <p:sp>
-        <p:nvSpPr>
-          <p:cNvPr id="13" name="Rounded Rectangle 12"/>
-          <p:cNvSpPr/>
-          <p:nvPr/>
-        </p:nvSpPr>
-        <p:spPr>
-          <a:xfrm>
-            <a:off x="2794955" y="3909060"/>
-            <a:ext cx="2109155" cy="1508760"/>
-          </a:xfrm>
-          <a:prstGeom prst="roundRect">
-            <a:avLst>
-              <a:gd name="adj" fmla="val 6000"/>
-            </a:avLst>
-          </a:prstGeom>
-          <a:solidFill>
-            <a:srgbClr val="EAF3FF"/>
-          </a:solidFill>
-          <a:ln>
-            <a:noFill/>
-          </a:ln>
-          <a:effectLst/>
-        </p:spPr>
-        <p:style>
-          <a:lnRef idx="1">
-            <a:schemeClr val="accent1"/>
-          </a:lnRef>
-          <a:fillRef idx="3">
-            <a:schemeClr val="accent1"/>
-          </a:fillRef>
-          <a:effectRef idx="2">
-            <a:schemeClr val="accent1"/>
-          </a:effectRef>
-          <a:fontRef idx="minor">
-            <a:schemeClr val="lt1"/>
-          </a:fontRef>
-        </p:style>
-        <p:txBody>
-          <a:bodyPr rtlCol="0" anchor="ctr"/>
-          <a:lstStyle/>
-          <a:p/>
-        </p:txBody>
-      </p:sp>
-      <p:sp>
-        <p:nvSpPr>
-          <p:cNvPr id="14" name="TextBox 13"/>
-          <p:cNvSpPr txBox="1"/>
-          <p:nvPr/>
-        </p:nvSpPr>
-        <p:spPr>
-          <a:xfrm>
-            <a:off x="2932115" y="4046220"/>
-            <a:ext cx="1834835" cy="1234439"/>
-          </a:xfrm>
-          <a:prstGeom prst="rect">
-            <a:avLst/>
-          </a:prstGeom>
-          <a:noFill/>
-        </p:spPr>
-        <p:txBody>
-          <a:bodyPr wrap="square" anchor="t" lIns="0" rIns="0" tIns="0" bIns="0"/>
-          <a:lstStyle/>
-          <a:p>
-            <a:pPr algn="l"/>
-            <a:r>
-              <a:rPr sz="1800" b="0" i="0">
-                <a:solidFill>
-                  <a:srgbClr val="202122"/>
-                </a:solidFill>
-                <a:latin typeface="Calibri"/>
-              </a:rPr>
-              <a:t>User, system or application error, or a breach?</a:t>
-            </a:r>
-          </a:p>
-        </p:txBody>
-      </p:sp>
-      <p:sp>
-        <p:nvSpPr>
-          <p:cNvPr id="15" name="Oval 14"/>
-          <p:cNvSpPr/>
-          <p:nvPr/>
-        </p:nvSpPr>
-        <p:spPr>
-          <a:xfrm>
-            <a:off x="5775807" y="2354580"/>
-            <a:ext cx="640080" cy="640080"/>
-          </a:xfrm>
-          <a:prstGeom prst="ellipse">
-            <a:avLst/>
-          </a:prstGeom>
-          <a:solidFill>
-            <a:srgbClr val="33C17A"/>
-          </a:solidFill>
-          <a:ln>
-            <a:noFill/>
-          </a:ln>
-          <a:effectLst/>
-        </p:spPr>
-        <p:style>
-          <a:lnRef idx="1">
-            <a:schemeClr val="accent1"/>
-          </a:lnRef>
-          <a:fillRef idx="3">
-            <a:schemeClr val="accent1"/>
-          </a:fillRef>
-          <a:effectRef idx="2">
-            <a:schemeClr val="accent1"/>
-          </a:effectRef>
-          <a:fontRef idx="minor">
-            <a:schemeClr val="lt1"/>
-          </a:fontRef>
-        </p:style>
-        <p:txBody>
-          <a:bodyPr rtlCol="0" anchor="ctr" lIns="0" rIns="0" tIns="0" bIns="0"/>
-          <a:lstStyle/>
-          <a:p>
-            <a:pPr algn="ctr"/>
-            <a:r>
-              <a:rPr sz="2000" b="1">
-                <a:solidFill>
-                  <a:srgbClr val="202122"/>
-                </a:solidFill>
-                <a:latin typeface="Calibri"/>
-              </a:rPr>
-              <a:t>3</a:t>
-            </a:r>
-          </a:p>
-        </p:txBody>
-      </p:sp>
-      <p:sp>
-        <p:nvSpPr>
-          <p:cNvPr id="16" name="TextBox 15"/>
-          <p:cNvSpPr txBox="1"/>
-          <p:nvPr/>
-        </p:nvSpPr>
-        <p:spPr>
-          <a:xfrm>
-            <a:off x="5041270" y="3131820"/>
-            <a:ext cx="2109155" cy="731520"/>
-          </a:xfrm>
-          <a:prstGeom prst="rect">
-            <a:avLst/>
-          </a:prstGeom>
-          <a:noFill/>
-        </p:spPr>
-        <p:txBody>
-          <a:bodyPr wrap="square" anchor="t" lIns="0" rIns="0" tIns="0" bIns="0"/>
-          <a:lstStyle/>
-          <a:p>
-            <a:pPr algn="ctr"/>
-            <a:r>
-              <a:rPr sz="1700" b="1" i="0">
-                <a:solidFill>
-                  <a:srgbClr val="03306E"/>
-                </a:solidFill>
-                <a:latin typeface="Calibri"/>
-              </a:rPr>
-              <a:t>Fix and test</a:t>
-            </a:r>
-          </a:p>
-        </p:txBody>
-      </p:sp>
-      <p:sp>
-        <p:nvSpPr>
-          <p:cNvPr id="17" name="Rounded Rectangle 16"/>
-          <p:cNvSpPr/>
-          <p:nvPr/>
-        </p:nvSpPr>
-        <p:spPr>
-          <a:xfrm>
-            <a:off x="5041270" y="3909060"/>
-            <a:ext cx="2109155" cy="1508760"/>
-          </a:xfrm>
-          <a:prstGeom prst="roundRect">
-            <a:avLst>
-              <a:gd name="adj" fmla="val 6000"/>
-            </a:avLst>
-          </a:prstGeom>
-          <a:solidFill>
-            <a:srgbClr val="EAF3FF"/>
-          </a:solidFill>
-          <a:ln>
-            <a:noFill/>
-          </a:ln>
-          <a:effectLst/>
-        </p:spPr>
-        <p:style>
-          <a:lnRef idx="1">
-            <a:schemeClr val="accent1"/>
-          </a:lnRef>
-          <a:fillRef idx="3">
-            <a:schemeClr val="accent1"/>
-          </a:fillRef>
-          <a:effectRef idx="2">
-            <a:schemeClr val="accent1"/>
-          </a:effectRef>
-          <a:fontRef idx="minor">
-            <a:schemeClr val="lt1"/>
-          </a:fontRef>
-        </p:style>
-        <p:txBody>
-          <a:bodyPr rtlCol="0" anchor="ctr"/>
-          <a:lstStyle/>
-          <a:p/>
-        </p:txBody>
-      </p:sp>
-      <p:sp>
-        <p:nvSpPr>
-          <p:cNvPr id="18" name="TextBox 17"/>
-          <p:cNvSpPr txBox="1"/>
-          <p:nvPr/>
-        </p:nvSpPr>
-        <p:spPr>
-          <a:xfrm>
-            <a:off x="5178430" y="4046220"/>
-            <a:ext cx="1834835" cy="1234439"/>
-          </a:xfrm>
-          <a:prstGeom prst="rect">
-            <a:avLst/>
-          </a:prstGeom>
-          <a:noFill/>
-        </p:spPr>
-        <p:txBody>
-          <a:bodyPr wrap="square" anchor="t" lIns="0" rIns="0" tIns="0" bIns="0"/>
-          <a:lstStyle/>
-          <a:p>
-            <a:pPr algn="l"/>
-            <a:r>
-              <a:rPr sz="1800" b="0" i="0">
-                <a:solidFill>
-                  <a:srgbClr val="202122"/>
-                </a:solidFill>
-                <a:latin typeface="Calibri"/>
-              </a:rPr>
-              <a:t>Make the change, confirm it stays fixed with no new issues.</a:t>
-            </a:r>
-          </a:p>
-        </p:txBody>
-      </p:sp>
-      <p:sp>
-        <p:nvSpPr>
-          <p:cNvPr id="19" name="Oval 18"/>
-          <p:cNvSpPr/>
-          <p:nvPr/>
-        </p:nvSpPr>
-        <p:spPr>
-          <a:xfrm>
-            <a:off x="8022122" y="2354580"/>
-            <a:ext cx="640080" cy="640080"/>
-          </a:xfrm>
-          <a:prstGeom prst="ellipse">
-            <a:avLst/>
-          </a:prstGeom>
-          <a:solidFill>
-            <a:srgbClr val="33C17A"/>
-          </a:solidFill>
-          <a:ln>
-            <a:noFill/>
-          </a:ln>
-          <a:effectLst/>
-        </p:spPr>
-        <p:style>
-          <a:lnRef idx="1">
-            <a:schemeClr val="accent1"/>
-          </a:lnRef>
-          <a:fillRef idx="3">
-            <a:schemeClr val="accent1"/>
-          </a:fillRef>
-          <a:effectRef idx="2">
-            <a:schemeClr val="accent1"/>
-          </a:effectRef>
-          <a:fontRef idx="minor">
-            <a:schemeClr val="lt1"/>
-          </a:fontRef>
-        </p:style>
-        <p:txBody>
-          <a:bodyPr rtlCol="0" anchor="ctr" lIns="0" rIns="0" tIns="0" bIns="0"/>
-          <a:lstStyle/>
-          <a:p>
-            <a:pPr algn="ctr"/>
-            <a:r>
-              <a:rPr sz="2000" b="1">
-                <a:solidFill>
-                  <a:srgbClr val="202122"/>
-                </a:solidFill>
-                <a:latin typeface="Calibri"/>
-              </a:rPr>
-              <a:t>4</a:t>
-            </a:r>
-          </a:p>
-        </p:txBody>
-      </p:sp>
-      <p:sp>
-        <p:nvSpPr>
-          <p:cNvPr id="20" name="TextBox 19"/>
-          <p:cNvSpPr txBox="1"/>
-          <p:nvPr/>
-        </p:nvSpPr>
-        <p:spPr>
-          <a:xfrm>
-            <a:off x="7287585" y="3131820"/>
-            <a:ext cx="2109155" cy="731520"/>
-          </a:xfrm>
-          <a:prstGeom prst="rect">
-            <a:avLst/>
-          </a:prstGeom>
-          <a:noFill/>
-        </p:spPr>
-        <p:txBody>
-          <a:bodyPr wrap="square" anchor="t" lIns="0" rIns="0" tIns="0" bIns="0"/>
-          <a:lstStyle/>
-          <a:p>
-            <a:pPr algn="ctr"/>
-            <a:r>
-              <a:rPr sz="1700" b="1" i="0">
-                <a:solidFill>
-                  <a:srgbClr val="03306E"/>
-                </a:solidFill>
-                <a:latin typeface="Calibri"/>
-              </a:rPr>
-              <a:t>Communicate</a:t>
-            </a:r>
-          </a:p>
-        </p:txBody>
-      </p:sp>
-      <p:sp>
-        <p:nvSpPr>
-          <p:cNvPr id="21" name="Rounded Rectangle 20"/>
-          <p:cNvSpPr/>
-          <p:nvPr/>
-        </p:nvSpPr>
-        <p:spPr>
-          <a:xfrm>
-            <a:off x="7287585" y="3909060"/>
-            <a:ext cx="2109155" cy="1508760"/>
-          </a:xfrm>
-          <a:prstGeom prst="roundRect">
-            <a:avLst>
-              <a:gd name="adj" fmla="val 6000"/>
-            </a:avLst>
-          </a:prstGeom>
-          <a:solidFill>
-            <a:srgbClr val="EAF3FF"/>
-          </a:solidFill>
-          <a:ln>
-            <a:noFill/>
-          </a:ln>
-          <a:effectLst/>
-        </p:spPr>
-        <p:style>
-          <a:lnRef idx="1">
-            <a:schemeClr val="accent1"/>
-          </a:lnRef>
-          <a:fillRef idx="3">
-            <a:schemeClr val="accent1"/>
-          </a:fillRef>
-          <a:effectRef idx="2">
-            <a:schemeClr val="accent1"/>
-          </a:effectRef>
-          <a:fontRef idx="minor">
-            <a:schemeClr val="lt1"/>
-          </a:fontRef>
-        </p:style>
-        <p:txBody>
-          <a:bodyPr rtlCol="0" anchor="ctr"/>
-          <a:lstStyle/>
-          <a:p/>
-        </p:txBody>
-      </p:sp>
-      <p:sp>
-        <p:nvSpPr>
-          <p:cNvPr id="22" name="TextBox 21"/>
-          <p:cNvSpPr txBox="1"/>
-          <p:nvPr/>
-        </p:nvSpPr>
-        <p:spPr>
-          <a:xfrm>
-            <a:off x="7424745" y="4046220"/>
-            <a:ext cx="1834835" cy="1234439"/>
-          </a:xfrm>
-          <a:prstGeom prst="rect">
-            <a:avLst/>
-          </a:prstGeom>
-          <a:noFill/>
-        </p:spPr>
-        <p:txBody>
-          <a:bodyPr wrap="square" anchor="t" lIns="0" rIns="0" tIns="0" bIns="0"/>
-          <a:lstStyle/>
-          <a:p>
-            <a:pPr algn="l"/>
-            <a:r>
-              <a:rPr sz="1800" b="0" i="0">
-                <a:solidFill>
-                  <a:srgbClr val="202122"/>
-                </a:solidFill>
-                <a:latin typeface="Calibri"/>
-              </a:rPr>
-              <a:t>Tell stakeholders how and when.</a:t>
-            </a:r>
-          </a:p>
-        </p:txBody>
-      </p:sp>
-      <p:sp>
-        <p:nvSpPr>
-          <p:cNvPr id="23" name="Oval 22"/>
-          <p:cNvSpPr/>
-          <p:nvPr/>
-        </p:nvSpPr>
-        <p:spPr>
-          <a:xfrm>
-            <a:off x="10268437" y="2354580"/>
-            <a:ext cx="640080" cy="640080"/>
-          </a:xfrm>
-          <a:prstGeom prst="ellipse">
-            <a:avLst/>
-          </a:prstGeom>
-          <a:solidFill>
-            <a:srgbClr val="33C17A"/>
-          </a:solidFill>
-          <a:ln>
-            <a:noFill/>
-          </a:ln>
-          <a:effectLst/>
-        </p:spPr>
-        <p:style>
-          <a:lnRef idx="1">
-            <a:schemeClr val="accent1"/>
-          </a:lnRef>
-          <a:fillRef idx="3">
-            <a:schemeClr val="accent1"/>
-          </a:fillRef>
-          <a:effectRef idx="2">
-            <a:schemeClr val="accent1"/>
-          </a:effectRef>
-          <a:fontRef idx="minor">
-            <a:schemeClr val="lt1"/>
-          </a:fontRef>
-        </p:style>
-        <p:txBody>
-          <a:bodyPr rtlCol="0" anchor="ctr" lIns="0" rIns="0" tIns="0" bIns="0"/>
-          <a:lstStyle/>
-          <a:p>
-            <a:pPr algn="ctr"/>
-            <a:r>
-              <a:rPr sz="2000" b="1">
-                <a:solidFill>
-                  <a:srgbClr val="202122"/>
-                </a:solidFill>
-                <a:latin typeface="Calibri"/>
-              </a:rPr>
-              <a:t>5</a:t>
-            </a:r>
-          </a:p>
-        </p:txBody>
-      </p:sp>
-      <p:sp>
-        <p:nvSpPr>
-          <p:cNvPr id="24" name="TextBox 23"/>
-          <p:cNvSpPr txBox="1"/>
-          <p:nvPr/>
-        </p:nvSpPr>
-        <p:spPr>
-          <a:xfrm>
-            <a:off x="9533900" y="3131820"/>
-            <a:ext cx="2109155" cy="731520"/>
-          </a:xfrm>
-          <a:prstGeom prst="rect">
-            <a:avLst/>
-          </a:prstGeom>
-          <a:noFill/>
-        </p:spPr>
-        <p:txBody>
-          <a:bodyPr wrap="square" anchor="t" lIns="0" rIns="0" tIns="0" bIns="0"/>
-          <a:lstStyle/>
-          <a:p>
-            <a:pPr algn="ctr"/>
-            <a:r>
-              <a:rPr sz="1700" b="1" i="0">
-                <a:solidFill>
-                  <a:srgbClr val="03306E"/>
-                </a:solidFill>
-                <a:latin typeface="Calibri"/>
-              </a:rPr>
-              <a:t>Learn</a:t>
-            </a:r>
-          </a:p>
-        </p:txBody>
-      </p:sp>
-      <p:sp>
-        <p:nvSpPr>
-          <p:cNvPr id="25" name="Rounded Rectangle 24"/>
-          <p:cNvSpPr/>
-          <p:nvPr/>
-        </p:nvSpPr>
-        <p:spPr>
-          <a:xfrm>
-            <a:off x="9533900" y="3909060"/>
-            <a:ext cx="2109155" cy="1508760"/>
-          </a:xfrm>
-          <a:prstGeom prst="roundRect">
-            <a:avLst>
-              <a:gd name="adj" fmla="val 6000"/>
-            </a:avLst>
-          </a:prstGeom>
-          <a:solidFill>
-            <a:srgbClr val="EAF3FF"/>
-          </a:solidFill>
-          <a:ln>
-            <a:noFill/>
-          </a:ln>
-          <a:effectLst/>
-        </p:spPr>
-        <p:style>
-          <a:lnRef idx="1">
-            <a:schemeClr val="accent1"/>
-          </a:lnRef>
-          <a:fillRef idx="3">
-            <a:schemeClr val="accent1"/>
-          </a:fillRef>
-          <a:effectRef idx="2">
-            <a:schemeClr val="accent1"/>
-          </a:effectRef>
-          <a:fontRef idx="minor">
-            <a:schemeClr val="lt1"/>
-          </a:fontRef>
-        </p:style>
-        <p:txBody>
-          <a:bodyPr rtlCol="0" anchor="ctr"/>
-          <a:lstStyle/>
-          <a:p/>
-        </p:txBody>
-      </p:sp>
-      <p:sp>
-        <p:nvSpPr>
-          <p:cNvPr id="26" name="TextBox 25"/>
-          <p:cNvSpPr txBox="1"/>
-          <p:nvPr/>
-        </p:nvSpPr>
-        <p:spPr>
-          <a:xfrm>
-            <a:off x="9671060" y="4046220"/>
-            <a:ext cx="1834835" cy="1234439"/>
-          </a:xfrm>
-          <a:prstGeom prst="rect">
-            <a:avLst/>
-          </a:prstGeom>
-          <a:noFill/>
-        </p:spPr>
-        <p:txBody>
-          <a:bodyPr wrap="square" anchor="t" lIns="0" rIns="0" tIns="0" bIns="0"/>
-          <a:lstStyle/>
-          <a:p>
-            <a:pPr algn="l"/>
-            <a:r>
-              <a:rPr sz="1800" b="0" i="0">
-                <a:solidFill>
-                  <a:srgbClr val="202122"/>
-                </a:solidFill>
-                <a:latin typeface="Calibri"/>
-              </a:rPr>
-              <a:t>Document the lessons.</a:t>
+              <a:rPr sz="1900" b="0" i="0">
+                <a:solidFill>
+                  <a:srgbClr val="FFFFFF"/>
+                </a:solidFill>
+                <a:latin typeface="Cambria"/>
+              </a:rPr>
+              <a:t>An emergency security fix skips the usual monthly release, but it's still documented, regression tested and announced in release notes.</a:t>
             </a:r>
           </a:p>
         </p:txBody>
@@ -8864,7 +11073,7 @@
                 </a:solidFill>
                 <a:latin typeface="Cambria"/>
               </a:rPr>
-              <a:t>Check your understanding</a:t>
+              <a:t>Software change management</a:t>
             </a:r>
           </a:p>
         </p:txBody>
@@ -8937,14 +11146,56 @@
       </p:sp>
       <p:sp>
         <p:nvSpPr>
-          <p:cNvPr id="6" name="Oval 5"/>
+          <p:cNvPr id="6" name="Rectangle 5"/>
           <p:cNvSpPr/>
           <p:nvPr/>
         </p:nvSpPr>
         <p:spPr>
           <a:xfrm>
-            <a:off x="548640" y="1618488"/>
-            <a:ext cx="411480" cy="411480"/>
+            <a:off x="1282315" y="2686812"/>
+            <a:ext cx="9627064" cy="36576"/>
+          </a:xfrm>
+          <a:prstGeom prst="rect">
+            <a:avLst/>
+          </a:prstGeom>
+          <a:solidFill>
+            <a:srgbClr val="A9C8F0"/>
+          </a:solidFill>
+          <a:ln>
+            <a:noFill/>
+          </a:ln>
+          <a:effectLst/>
+        </p:spPr>
+        <p:style>
+          <a:lnRef idx="1">
+            <a:schemeClr val="accent1"/>
+          </a:lnRef>
+          <a:fillRef idx="3">
+            <a:schemeClr val="accent1"/>
+          </a:fillRef>
+          <a:effectRef idx="2">
+            <a:schemeClr val="accent1"/>
+          </a:effectRef>
+          <a:fontRef idx="minor">
+            <a:schemeClr val="lt1"/>
+          </a:fontRef>
+        </p:style>
+        <p:txBody>
+          <a:bodyPr rtlCol="0" anchor="ctr"/>
+          <a:lstStyle/>
+          <a:p/>
+        </p:txBody>
+      </p:sp>
+      <p:sp>
+        <p:nvSpPr>
+          <p:cNvPr id="7" name="Oval 6"/>
+          <p:cNvSpPr/>
+          <p:nvPr/>
+        </p:nvSpPr>
+        <p:spPr>
+          <a:xfrm>
+            <a:off x="962275" y="2385060"/>
+            <a:ext cx="640080" cy="640080"/>
           </a:xfrm>
           <a:prstGeom prst="ellipse">
             <a:avLst/>
@@ -8977,7 +11228,7 @@
           <a:p>
             <a:pPr algn="ctr"/>
             <a:r>
-              <a:rPr sz="1400" b="1">
+              <a:rPr sz="2000" b="1">
                 <a:solidFill>
                   <a:srgbClr val="202122"/>
                 </a:solidFill>
@@ -8990,14 +11241,14 @@
       </p:sp>
       <p:sp>
         <p:nvSpPr>
-          <p:cNvPr id="7" name="TextBox 6"/>
-          <p:cNvSpPr txBox="1"/>
-          <p:nvPr/>
-        </p:nvSpPr>
-        <p:spPr>
-          <a:xfrm>
-            <a:off x="1234440" y="1600200"/>
-            <a:ext cx="10408615" cy="1030986"/>
+          <p:cNvPr id="8" name="TextBox 7"/>
+          <p:cNvSpPr txBox="1"/>
+          <p:nvPr/>
+        </p:nvSpPr>
+        <p:spPr>
+          <a:xfrm>
+            <a:off x="548640" y="3162300"/>
+            <a:ext cx="1467350" cy="731520"/>
           </a:xfrm>
           <a:prstGeom prst="rect">
             <a:avLst/>
@@ -9008,29 +11259,106 @@
           <a:bodyPr wrap="square" anchor="t" lIns="0" rIns="0" tIns="0" bIns="0"/>
           <a:lstStyle/>
           <a:p>
+            <a:pPr algn="ctr"/>
+            <a:r>
+              <a:rPr sz="1600" b="1" i="0">
+                <a:solidFill>
+                  <a:srgbClr val="03306E"/>
+                </a:solidFill>
+                <a:latin typeface="Calibri"/>
+              </a:rPr>
+              <a:t>Identify</a:t>
+            </a:r>
+          </a:p>
+        </p:txBody>
+      </p:sp>
+      <p:sp>
+        <p:nvSpPr>
+          <p:cNvPr id="9" name="Rounded Rectangle 8"/>
+          <p:cNvSpPr/>
+          <p:nvPr/>
+        </p:nvSpPr>
+        <p:spPr>
+          <a:xfrm>
+            <a:off x="548640" y="3939540"/>
+            <a:ext cx="1467350" cy="1447800"/>
+          </a:xfrm>
+          <a:prstGeom prst="roundRect">
+            <a:avLst>
+              <a:gd name="adj" fmla="val 6000"/>
+            </a:avLst>
+          </a:prstGeom>
+          <a:solidFill>
+            <a:srgbClr val="EAF3FF"/>
+          </a:solidFill>
+          <a:ln>
+            <a:noFill/>
+          </a:ln>
+          <a:effectLst/>
+        </p:spPr>
+        <p:style>
+          <a:lnRef idx="1">
+            <a:schemeClr val="accent1"/>
+          </a:lnRef>
+          <a:fillRef idx="3">
+            <a:schemeClr val="accent1"/>
+          </a:fillRef>
+          <a:effectRef idx="2">
+            <a:schemeClr val="accent1"/>
+          </a:effectRef>
+          <a:fontRef idx="minor">
+            <a:schemeClr val="lt1"/>
+          </a:fontRef>
+        </p:style>
+        <p:txBody>
+          <a:bodyPr rtlCol="0" anchor="ctr"/>
+          <a:lstStyle/>
+          <a:p/>
+        </p:txBody>
+      </p:sp>
+      <p:sp>
+        <p:nvSpPr>
+          <p:cNvPr id="10" name="TextBox 9"/>
+          <p:cNvSpPr txBox="1"/>
+          <p:nvPr/>
+        </p:nvSpPr>
+        <p:spPr>
+          <a:xfrm>
+            <a:off x="685800" y="4076700"/>
+            <a:ext cx="1193030" cy="1173480"/>
+          </a:xfrm>
+          <a:prstGeom prst="rect">
+            <a:avLst/>
+          </a:prstGeom>
+          <a:noFill/>
+        </p:spPr>
+        <p:txBody>
+          <a:bodyPr wrap="square" anchor="t" lIns="0" rIns="0" tIns="0" bIns="0"/>
+          <a:lstStyle/>
+          <a:p>
             <a:pPr algn="l"/>
             <a:r>
-              <a:rPr sz="2200" b="0" i="0">
+              <a:rPr sz="1700" b="0" i="0">
                 <a:solidFill>
                   <a:srgbClr val="202122"/>
                 </a:solidFill>
                 <a:latin typeface="Calibri"/>
               </a:rPr>
-              <a:t>Fixing a zero-day vulnerability is which type of change?</a:t>
-            </a:r>
-          </a:p>
-        </p:txBody>
-      </p:sp>
-      <p:sp>
-        <p:nvSpPr>
-          <p:cNvPr id="8" name="Oval 7"/>
+              <a:t>Issues from feedback or review.</a:t>
+            </a:r>
+          </a:p>
+        </p:txBody>
+      </p:sp>
+      <p:sp>
+        <p:nvSpPr>
+          <p:cNvPr id="11" name="Oval 10"/>
           <p:cNvSpPr/>
           <p:nvPr/>
         </p:nvSpPr>
         <p:spPr>
           <a:xfrm>
-            <a:off x="548640" y="2814066"/>
-            <a:ext cx="411480" cy="411480"/>
+            <a:off x="2566786" y="2385060"/>
+            <a:ext cx="640080" cy="640080"/>
           </a:xfrm>
           <a:prstGeom prst="ellipse">
             <a:avLst/>
@@ -9063,7 +11391,7 @@
           <a:p>
             <a:pPr algn="ctr"/>
             <a:r>
-              <a:rPr sz="1400" b="1">
+              <a:rPr sz="2000" b="1">
                 <a:solidFill>
                   <a:srgbClr val="202122"/>
                 </a:solidFill>
@@ -9076,14 +11404,14 @@
       </p:sp>
       <p:sp>
         <p:nvSpPr>
-          <p:cNvPr id="9" name="TextBox 8"/>
-          <p:cNvSpPr txBox="1"/>
-          <p:nvPr/>
-        </p:nvSpPr>
-        <p:spPr>
-          <a:xfrm>
-            <a:off x="1234440" y="2795778"/>
-            <a:ext cx="10408615" cy="1030986"/>
+          <p:cNvPr id="12" name="TextBox 11"/>
+          <p:cNvSpPr txBox="1"/>
+          <p:nvPr/>
+        </p:nvSpPr>
+        <p:spPr>
+          <a:xfrm>
+            <a:off x="2153150" y="3162300"/>
+            <a:ext cx="1467350" cy="731520"/>
           </a:xfrm>
           <a:prstGeom prst="rect">
             <a:avLst/>
@@ -9094,29 +11422,106 @@
           <a:bodyPr wrap="square" anchor="t" lIns="0" rIns="0" tIns="0" bIns="0"/>
           <a:lstStyle/>
           <a:p>
+            <a:pPr algn="ctr"/>
+            <a:r>
+              <a:rPr sz="1600" b="1" i="0">
+                <a:solidFill>
+                  <a:srgbClr val="03306E"/>
+                </a:solidFill>
+                <a:latin typeface="Calibri"/>
+              </a:rPr>
+              <a:t>Document</a:t>
+            </a:r>
+          </a:p>
+        </p:txBody>
+      </p:sp>
+      <p:sp>
+        <p:nvSpPr>
+          <p:cNvPr id="13" name="Rounded Rectangle 12"/>
+          <p:cNvSpPr/>
+          <p:nvPr/>
+        </p:nvSpPr>
+        <p:spPr>
+          <a:xfrm>
+            <a:off x="2153150" y="3939540"/>
+            <a:ext cx="1467350" cy="1447800"/>
+          </a:xfrm>
+          <a:prstGeom prst="roundRect">
+            <a:avLst>
+              <a:gd name="adj" fmla="val 6000"/>
+            </a:avLst>
+          </a:prstGeom>
+          <a:solidFill>
+            <a:srgbClr val="EAF3FF"/>
+          </a:solidFill>
+          <a:ln>
+            <a:noFill/>
+          </a:ln>
+          <a:effectLst/>
+        </p:spPr>
+        <p:style>
+          <a:lnRef idx="1">
+            <a:schemeClr val="accent1"/>
+          </a:lnRef>
+          <a:fillRef idx="3">
+            <a:schemeClr val="accent1"/>
+          </a:fillRef>
+          <a:effectRef idx="2">
+            <a:schemeClr val="accent1"/>
+          </a:effectRef>
+          <a:fontRef idx="minor">
+            <a:schemeClr val="lt1"/>
+          </a:fontRef>
+        </p:style>
+        <p:txBody>
+          <a:bodyPr rtlCol="0" anchor="ctr"/>
+          <a:lstStyle/>
+          <a:p/>
+        </p:txBody>
+      </p:sp>
+      <p:sp>
+        <p:nvSpPr>
+          <p:cNvPr id="14" name="TextBox 13"/>
+          <p:cNvSpPr txBox="1"/>
+          <p:nvPr/>
+        </p:nvSpPr>
+        <p:spPr>
+          <a:xfrm>
+            <a:off x="2290310" y="4076700"/>
+            <a:ext cx="1193030" cy="1173480"/>
+          </a:xfrm>
+          <a:prstGeom prst="rect">
+            <a:avLst/>
+          </a:prstGeom>
+          <a:noFill/>
+        </p:spPr>
+        <p:txBody>
+          <a:bodyPr wrap="square" anchor="t" lIns="0" rIns="0" tIns="0" bIns="0"/>
+          <a:lstStyle/>
+          <a:p>
             <a:pPr algn="l"/>
             <a:r>
-              <a:rPr sz="2200" b="0" i="0">
+              <a:rPr sz="1700" b="0" i="0">
                 <a:solidFill>
                   <a:srgbClr val="202122"/>
                 </a:solidFill>
                 <a:latin typeface="Calibri"/>
               </a:rPr>
-              <a:t>Why is regression testing part of change management?</a:t>
-            </a:r>
-          </a:p>
-        </p:txBody>
-      </p:sp>
-      <p:sp>
-        <p:nvSpPr>
-          <p:cNvPr id="10" name="Oval 9"/>
+              <a:t>Record the changes.</a:t>
+            </a:r>
+          </a:p>
+        </p:txBody>
+      </p:sp>
+      <p:sp>
+        <p:nvSpPr>
+          <p:cNvPr id="15" name="Oval 14"/>
           <p:cNvSpPr/>
           <p:nvPr/>
         </p:nvSpPr>
         <p:spPr>
           <a:xfrm>
-            <a:off x="548640" y="4009644"/>
-            <a:ext cx="411480" cy="411480"/>
+            <a:off x="4171296" y="2385060"/>
+            <a:ext cx="640080" cy="640080"/>
           </a:xfrm>
           <a:prstGeom prst="ellipse">
             <a:avLst/>
@@ -9149,7 +11554,7 @@
           <a:p>
             <a:pPr algn="ctr"/>
             <a:r>
-              <a:rPr sz="1400" b="1">
+              <a:rPr sz="2000" b="1">
                 <a:solidFill>
                   <a:srgbClr val="202122"/>
                 </a:solidFill>
@@ -9162,14 +11567,14 @@
       </p:sp>
       <p:sp>
         <p:nvSpPr>
-          <p:cNvPr id="11" name="TextBox 10"/>
-          <p:cNvSpPr txBox="1"/>
-          <p:nvPr/>
-        </p:nvSpPr>
-        <p:spPr>
-          <a:xfrm>
-            <a:off x="1234440" y="3991356"/>
-            <a:ext cx="10408615" cy="1030986"/>
+          <p:cNvPr id="16" name="TextBox 15"/>
+          <p:cNvSpPr txBox="1"/>
+          <p:nvPr/>
+        </p:nvSpPr>
+        <p:spPr>
+          <a:xfrm>
+            <a:off x="3757661" y="3162300"/>
+            <a:ext cx="1467350" cy="731520"/>
           </a:xfrm>
           <a:prstGeom prst="rect">
             <a:avLst/>
@@ -9180,29 +11585,106 @@
           <a:bodyPr wrap="square" anchor="t" lIns="0" rIns="0" tIns="0" bIns="0"/>
           <a:lstStyle/>
           <a:p>
+            <a:pPr algn="ctr"/>
+            <a:r>
+              <a:rPr sz="1600" b="1" i="0">
+                <a:solidFill>
+                  <a:srgbClr val="03306E"/>
+                </a:solidFill>
+                <a:latin typeface="Calibri"/>
+              </a:rPr>
+              <a:t>Communicate</a:t>
+            </a:r>
+          </a:p>
+        </p:txBody>
+      </p:sp>
+      <p:sp>
+        <p:nvSpPr>
+          <p:cNvPr id="17" name="Rounded Rectangle 16"/>
+          <p:cNvSpPr/>
+          <p:nvPr/>
+        </p:nvSpPr>
+        <p:spPr>
+          <a:xfrm>
+            <a:off x="3757661" y="3939540"/>
+            <a:ext cx="1467350" cy="1447800"/>
+          </a:xfrm>
+          <a:prstGeom prst="roundRect">
+            <a:avLst>
+              <a:gd name="adj" fmla="val 6000"/>
+            </a:avLst>
+          </a:prstGeom>
+          <a:solidFill>
+            <a:srgbClr val="EAF3FF"/>
+          </a:solidFill>
+          <a:ln>
+            <a:noFill/>
+          </a:ln>
+          <a:effectLst/>
+        </p:spPr>
+        <p:style>
+          <a:lnRef idx="1">
+            <a:schemeClr val="accent1"/>
+          </a:lnRef>
+          <a:fillRef idx="3">
+            <a:schemeClr val="accent1"/>
+          </a:fillRef>
+          <a:effectRef idx="2">
+            <a:schemeClr val="accent1"/>
+          </a:effectRef>
+          <a:fontRef idx="minor">
+            <a:schemeClr val="lt1"/>
+          </a:fontRef>
+        </p:style>
+        <p:txBody>
+          <a:bodyPr rtlCol="0" anchor="ctr"/>
+          <a:lstStyle/>
+          <a:p/>
+        </p:txBody>
+      </p:sp>
+      <p:sp>
+        <p:nvSpPr>
+          <p:cNvPr id="18" name="TextBox 17"/>
+          <p:cNvSpPr txBox="1"/>
+          <p:nvPr/>
+        </p:nvSpPr>
+        <p:spPr>
+          <a:xfrm>
+            <a:off x="3894821" y="4076700"/>
+            <a:ext cx="1193030" cy="1173480"/>
+          </a:xfrm>
+          <a:prstGeom prst="rect">
+            <a:avLst/>
+          </a:prstGeom>
+          <a:noFill/>
+        </p:spPr>
+        <p:txBody>
+          <a:bodyPr wrap="square" anchor="t" lIns="0" rIns="0" tIns="0" bIns="0"/>
+          <a:lstStyle/>
+          <a:p>
             <a:pPr algn="l"/>
             <a:r>
-              <a:rPr sz="2200" b="0" i="0">
+              <a:rPr sz="1700" b="0" i="0">
                 <a:solidFill>
                   <a:srgbClr val="202122"/>
                 </a:solidFill>
                 <a:latin typeface="Calibri"/>
               </a:rPr>
-              <a:t>Name two written formats for communicating with users.</a:t>
-            </a:r>
-          </a:p>
-        </p:txBody>
-      </p:sp>
-      <p:sp>
-        <p:nvSpPr>
-          <p:cNvPr id="12" name="Oval 11"/>
+              <a:t>To technical and non-technical audiences.</a:t>
+            </a:r>
+          </a:p>
+        </p:txBody>
+      </p:sp>
+      <p:sp>
+        <p:nvSpPr>
+          <p:cNvPr id="19" name="Oval 18"/>
           <p:cNvSpPr/>
           <p:nvPr/>
         </p:nvSpPr>
         <p:spPr>
           <a:xfrm>
-            <a:off x="548640" y="5205221"/>
-            <a:ext cx="411480" cy="411480"/>
+            <a:off x="5775807" y="2385060"/>
+            <a:ext cx="640080" cy="640080"/>
           </a:xfrm>
           <a:prstGeom prst="ellipse">
             <a:avLst/>
@@ -9235,7 +11717,7 @@
           <a:p>
             <a:pPr algn="ctr"/>
             <a:r>
-              <a:rPr sz="1400" b="1">
+              <a:rPr sz="2000" b="1">
                 <a:solidFill>
                   <a:srgbClr val="202122"/>
                 </a:solidFill>
@@ -9248,14 +11730,14 @@
       </p:sp>
       <p:sp>
         <p:nvSpPr>
-          <p:cNvPr id="13" name="TextBox 12"/>
-          <p:cNvSpPr txBox="1"/>
-          <p:nvPr/>
-        </p:nvSpPr>
-        <p:spPr>
-          <a:xfrm>
-            <a:off x="1234440" y="5186933"/>
-            <a:ext cx="10408615" cy="1030986"/>
+          <p:cNvPr id="20" name="TextBox 19"/>
+          <p:cNvSpPr txBox="1"/>
+          <p:nvPr/>
+        </p:nvSpPr>
+        <p:spPr>
+          <a:xfrm>
+            <a:off x="5362172" y="3162300"/>
+            <a:ext cx="1467350" cy="731520"/>
           </a:xfrm>
           <a:prstGeom prst="rect">
             <a:avLst/>
@@ -9266,15 +11748,581 @@
           <a:bodyPr wrap="square" anchor="t" lIns="0" rIns="0" tIns="0" bIns="0"/>
           <a:lstStyle/>
           <a:p>
+            <a:pPr algn="ctr"/>
+            <a:r>
+              <a:rPr sz="1600" b="1" i="0">
+                <a:solidFill>
+                  <a:srgbClr val="03306E"/>
+                </a:solidFill>
+                <a:latin typeface="Calibri"/>
+              </a:rPr>
+              <a:t>Plan</a:t>
+            </a:r>
+          </a:p>
+        </p:txBody>
+      </p:sp>
+      <p:sp>
+        <p:nvSpPr>
+          <p:cNvPr id="21" name="Rounded Rectangle 20"/>
+          <p:cNvSpPr/>
+          <p:nvPr/>
+        </p:nvSpPr>
+        <p:spPr>
+          <a:xfrm>
+            <a:off x="5362172" y="3939540"/>
+            <a:ext cx="1467350" cy="1447800"/>
+          </a:xfrm>
+          <a:prstGeom prst="roundRect">
+            <a:avLst>
+              <a:gd name="adj" fmla="val 6000"/>
+            </a:avLst>
+          </a:prstGeom>
+          <a:solidFill>
+            <a:srgbClr val="EAF3FF"/>
+          </a:solidFill>
+          <a:ln>
+            <a:noFill/>
+          </a:ln>
+          <a:effectLst/>
+        </p:spPr>
+        <p:style>
+          <a:lnRef idx="1">
+            <a:schemeClr val="accent1"/>
+          </a:lnRef>
+          <a:fillRef idx="3">
+            <a:schemeClr val="accent1"/>
+          </a:fillRef>
+          <a:effectRef idx="2">
+            <a:schemeClr val="accent1"/>
+          </a:effectRef>
+          <a:fontRef idx="minor">
+            <a:schemeClr val="lt1"/>
+          </a:fontRef>
+        </p:style>
+        <p:txBody>
+          <a:bodyPr rtlCol="0" anchor="ctr"/>
+          <a:lstStyle/>
+          <a:p/>
+        </p:txBody>
+      </p:sp>
+      <p:sp>
+        <p:nvSpPr>
+          <p:cNvPr id="22" name="TextBox 21"/>
+          <p:cNvSpPr txBox="1"/>
+          <p:nvPr/>
+        </p:nvSpPr>
+        <p:spPr>
+          <a:xfrm>
+            <a:off x="5499332" y="4076700"/>
+            <a:ext cx="1193030" cy="1173480"/>
+          </a:xfrm>
+          <a:prstGeom prst="rect">
+            <a:avLst/>
+          </a:prstGeom>
+          <a:noFill/>
+        </p:spPr>
+        <p:txBody>
+          <a:bodyPr wrap="square" anchor="t" lIns="0" rIns="0" tIns="0" bIns="0"/>
+          <a:lstStyle/>
+          <a:p>
             <a:pPr algn="l"/>
             <a:r>
-              <a:rPr sz="2200" b="0" i="0">
+              <a:rPr sz="1700" b="0" i="0">
                 <a:solidFill>
                   <a:srgbClr val="202122"/>
                 </a:solidFill>
                 <a:latin typeface="Calibri"/>
               </a:rPr>
-              <a:t>What is the first step in resolving a user issue?</a:t>
+              <a:t>What must change.</a:t>
+            </a:r>
+          </a:p>
+        </p:txBody>
+      </p:sp>
+      <p:sp>
+        <p:nvSpPr>
+          <p:cNvPr id="23" name="Oval 22"/>
+          <p:cNvSpPr/>
+          <p:nvPr/>
+        </p:nvSpPr>
+        <p:spPr>
+          <a:xfrm>
+            <a:off x="7380318" y="2385060"/>
+            <a:ext cx="640080" cy="640080"/>
+          </a:xfrm>
+          <a:prstGeom prst="ellipse">
+            <a:avLst/>
+          </a:prstGeom>
+          <a:solidFill>
+            <a:srgbClr val="33C17A"/>
+          </a:solidFill>
+          <a:ln>
+            <a:noFill/>
+          </a:ln>
+          <a:effectLst/>
+        </p:spPr>
+        <p:style>
+          <a:lnRef idx="1">
+            <a:schemeClr val="accent1"/>
+          </a:lnRef>
+          <a:fillRef idx="3">
+            <a:schemeClr val="accent1"/>
+          </a:fillRef>
+          <a:effectRef idx="2">
+            <a:schemeClr val="accent1"/>
+          </a:effectRef>
+          <a:fontRef idx="minor">
+            <a:schemeClr val="lt1"/>
+          </a:fontRef>
+        </p:style>
+        <p:txBody>
+          <a:bodyPr rtlCol="0" anchor="ctr" lIns="0" rIns="0" tIns="0" bIns="0"/>
+          <a:lstStyle/>
+          <a:p>
+            <a:pPr algn="ctr"/>
+            <a:r>
+              <a:rPr sz="2000" b="1">
+                <a:solidFill>
+                  <a:srgbClr val="202122"/>
+                </a:solidFill>
+                <a:latin typeface="Calibri"/>
+              </a:rPr>
+              <a:t>5</a:t>
+            </a:r>
+          </a:p>
+        </p:txBody>
+      </p:sp>
+      <p:sp>
+        <p:nvSpPr>
+          <p:cNvPr id="24" name="TextBox 23"/>
+          <p:cNvSpPr txBox="1"/>
+          <p:nvPr/>
+        </p:nvSpPr>
+        <p:spPr>
+          <a:xfrm>
+            <a:off x="6966682" y="3162300"/>
+            <a:ext cx="1467350" cy="731520"/>
+          </a:xfrm>
+          <a:prstGeom prst="rect">
+            <a:avLst/>
+          </a:prstGeom>
+          <a:noFill/>
+        </p:spPr>
+        <p:txBody>
+          <a:bodyPr wrap="square" anchor="t" lIns="0" rIns="0" tIns="0" bIns="0"/>
+          <a:lstStyle/>
+          <a:p>
+            <a:pPr algn="ctr"/>
+            <a:r>
+              <a:rPr sz="1600" b="1" i="0">
+                <a:solidFill>
+                  <a:srgbClr val="03306E"/>
+                </a:solidFill>
+                <a:latin typeface="Calibri"/>
+              </a:rPr>
+              <a:t>Schedule</a:t>
+            </a:r>
+          </a:p>
+        </p:txBody>
+      </p:sp>
+      <p:sp>
+        <p:nvSpPr>
+          <p:cNvPr id="25" name="Rounded Rectangle 24"/>
+          <p:cNvSpPr/>
+          <p:nvPr/>
+        </p:nvSpPr>
+        <p:spPr>
+          <a:xfrm>
+            <a:off x="6966682" y="3939540"/>
+            <a:ext cx="1467350" cy="1447800"/>
+          </a:xfrm>
+          <a:prstGeom prst="roundRect">
+            <a:avLst>
+              <a:gd name="adj" fmla="val 6000"/>
+            </a:avLst>
+          </a:prstGeom>
+          <a:solidFill>
+            <a:srgbClr val="EAF3FF"/>
+          </a:solidFill>
+          <a:ln>
+            <a:noFill/>
+          </a:ln>
+          <a:effectLst/>
+        </p:spPr>
+        <p:style>
+          <a:lnRef idx="1">
+            <a:schemeClr val="accent1"/>
+          </a:lnRef>
+          <a:fillRef idx="3">
+            <a:schemeClr val="accent1"/>
+          </a:fillRef>
+          <a:effectRef idx="2">
+            <a:schemeClr val="accent1"/>
+          </a:effectRef>
+          <a:fontRef idx="minor">
+            <a:schemeClr val="lt1"/>
+          </a:fontRef>
+        </p:style>
+        <p:txBody>
+          <a:bodyPr rtlCol="0" anchor="ctr"/>
+          <a:lstStyle/>
+          <a:p/>
+        </p:txBody>
+      </p:sp>
+      <p:sp>
+        <p:nvSpPr>
+          <p:cNvPr id="26" name="TextBox 25"/>
+          <p:cNvSpPr txBox="1"/>
+          <p:nvPr/>
+        </p:nvSpPr>
+        <p:spPr>
+          <a:xfrm>
+            <a:off x="7103842" y="4076700"/>
+            <a:ext cx="1193030" cy="1173480"/>
+          </a:xfrm>
+          <a:prstGeom prst="rect">
+            <a:avLst/>
+          </a:prstGeom>
+          <a:noFill/>
+        </p:spPr>
+        <p:txBody>
+          <a:bodyPr wrap="square" anchor="t" lIns="0" rIns="0" tIns="0" bIns="0"/>
+          <a:lstStyle/>
+          <a:p>
+            <a:pPr algn="l"/>
+            <a:r>
+              <a:rPr sz="1700" b="0" i="0">
+                <a:solidFill>
+                  <a:srgbClr val="202122"/>
+                </a:solidFill>
+                <a:latin typeface="Calibri"/>
+              </a:rPr>
+              <a:t>When it will change.</a:t>
+            </a:r>
+          </a:p>
+        </p:txBody>
+      </p:sp>
+      <p:sp>
+        <p:nvSpPr>
+          <p:cNvPr id="27" name="Oval 26"/>
+          <p:cNvSpPr/>
+          <p:nvPr/>
+        </p:nvSpPr>
+        <p:spPr>
+          <a:xfrm>
+            <a:off x="8984829" y="2385060"/>
+            <a:ext cx="640080" cy="640080"/>
+          </a:xfrm>
+          <a:prstGeom prst="ellipse">
+            <a:avLst/>
+          </a:prstGeom>
+          <a:solidFill>
+            <a:srgbClr val="33C17A"/>
+          </a:solidFill>
+          <a:ln>
+            <a:noFill/>
+          </a:ln>
+          <a:effectLst/>
+        </p:spPr>
+        <p:style>
+          <a:lnRef idx="1">
+            <a:schemeClr val="accent1"/>
+          </a:lnRef>
+          <a:fillRef idx="3">
+            <a:schemeClr val="accent1"/>
+          </a:fillRef>
+          <a:effectRef idx="2">
+            <a:schemeClr val="accent1"/>
+          </a:effectRef>
+          <a:fontRef idx="minor">
+            <a:schemeClr val="lt1"/>
+          </a:fontRef>
+        </p:style>
+        <p:txBody>
+          <a:bodyPr rtlCol="0" anchor="ctr" lIns="0" rIns="0" tIns="0" bIns="0"/>
+          <a:lstStyle/>
+          <a:p>
+            <a:pPr algn="ctr"/>
+            <a:r>
+              <a:rPr sz="2000" b="1">
+                <a:solidFill>
+                  <a:srgbClr val="202122"/>
+                </a:solidFill>
+                <a:latin typeface="Calibri"/>
+              </a:rPr>
+              <a:t>6</a:t>
+            </a:r>
+          </a:p>
+        </p:txBody>
+      </p:sp>
+      <p:sp>
+        <p:nvSpPr>
+          <p:cNvPr id="28" name="TextBox 27"/>
+          <p:cNvSpPr txBox="1"/>
+          <p:nvPr/>
+        </p:nvSpPr>
+        <p:spPr>
+          <a:xfrm>
+            <a:off x="8571193" y="3162300"/>
+            <a:ext cx="1467350" cy="731520"/>
+          </a:xfrm>
+          <a:prstGeom prst="rect">
+            <a:avLst/>
+          </a:prstGeom>
+          <a:noFill/>
+        </p:spPr>
+        <p:txBody>
+          <a:bodyPr wrap="square" anchor="t" lIns="0" rIns="0" tIns="0" bIns="0"/>
+          <a:lstStyle/>
+          <a:p>
+            <a:pPr algn="ctr"/>
+            <a:r>
+              <a:rPr sz="1600" b="1" i="0">
+                <a:solidFill>
+                  <a:srgbClr val="03306E"/>
+                </a:solidFill>
+                <a:latin typeface="Calibri"/>
+              </a:rPr>
+              <a:t>Regression test</a:t>
+            </a:r>
+          </a:p>
+        </p:txBody>
+      </p:sp>
+      <p:sp>
+        <p:nvSpPr>
+          <p:cNvPr id="29" name="Rounded Rectangle 28"/>
+          <p:cNvSpPr/>
+          <p:nvPr/>
+        </p:nvSpPr>
+        <p:spPr>
+          <a:xfrm>
+            <a:off x="8571193" y="3939540"/>
+            <a:ext cx="1467350" cy="1447800"/>
+          </a:xfrm>
+          <a:prstGeom prst="roundRect">
+            <a:avLst>
+              <a:gd name="adj" fmla="val 6000"/>
+            </a:avLst>
+          </a:prstGeom>
+          <a:solidFill>
+            <a:srgbClr val="EAF3FF"/>
+          </a:solidFill>
+          <a:ln>
+            <a:noFill/>
+          </a:ln>
+          <a:effectLst/>
+        </p:spPr>
+        <p:style>
+          <a:lnRef idx="1">
+            <a:schemeClr val="accent1"/>
+          </a:lnRef>
+          <a:fillRef idx="3">
+            <a:schemeClr val="accent1"/>
+          </a:fillRef>
+          <a:effectRef idx="2">
+            <a:schemeClr val="accent1"/>
+          </a:effectRef>
+          <a:fontRef idx="minor">
+            <a:schemeClr val="lt1"/>
+          </a:fontRef>
+        </p:style>
+        <p:txBody>
+          <a:bodyPr rtlCol="0" anchor="ctr"/>
+          <a:lstStyle/>
+          <a:p/>
+        </p:txBody>
+      </p:sp>
+      <p:sp>
+        <p:nvSpPr>
+          <p:cNvPr id="30" name="TextBox 29"/>
+          <p:cNvSpPr txBox="1"/>
+          <p:nvPr/>
+        </p:nvSpPr>
+        <p:spPr>
+          <a:xfrm>
+            <a:off x="8708353" y="4076700"/>
+            <a:ext cx="1193030" cy="1173480"/>
+          </a:xfrm>
+          <a:prstGeom prst="rect">
+            <a:avLst/>
+          </a:prstGeom>
+          <a:noFill/>
+        </p:spPr>
+        <p:txBody>
+          <a:bodyPr wrap="square" anchor="t" lIns="0" rIns="0" tIns="0" bIns="0"/>
+          <a:lstStyle/>
+          <a:p>
+            <a:pPr algn="l"/>
+            <a:r>
+              <a:rPr sz="1700" b="0" i="0">
+                <a:solidFill>
+                  <a:srgbClr val="202122"/>
+                </a:solidFill>
+                <a:latin typeface="Calibri"/>
+              </a:rPr>
+              <a:t>Check nothing else broke.</a:t>
+            </a:r>
+          </a:p>
+        </p:txBody>
+      </p:sp>
+      <p:sp>
+        <p:nvSpPr>
+          <p:cNvPr id="31" name="Oval 30"/>
+          <p:cNvSpPr/>
+          <p:nvPr/>
+        </p:nvSpPr>
+        <p:spPr>
+          <a:xfrm>
+            <a:off x="10589339" y="2385060"/>
+            <a:ext cx="640080" cy="640080"/>
+          </a:xfrm>
+          <a:prstGeom prst="ellipse">
+            <a:avLst/>
+          </a:prstGeom>
+          <a:solidFill>
+            <a:srgbClr val="33C17A"/>
+          </a:solidFill>
+          <a:ln>
+            <a:noFill/>
+          </a:ln>
+          <a:effectLst/>
+        </p:spPr>
+        <p:style>
+          <a:lnRef idx="1">
+            <a:schemeClr val="accent1"/>
+          </a:lnRef>
+          <a:fillRef idx="3">
+            <a:schemeClr val="accent1"/>
+          </a:fillRef>
+          <a:effectRef idx="2">
+            <a:schemeClr val="accent1"/>
+          </a:effectRef>
+          <a:fontRef idx="minor">
+            <a:schemeClr val="lt1"/>
+          </a:fontRef>
+        </p:style>
+        <p:txBody>
+          <a:bodyPr rtlCol="0" anchor="ctr" lIns="0" rIns="0" tIns="0" bIns="0"/>
+          <a:lstStyle/>
+          <a:p>
+            <a:pPr algn="ctr"/>
+            <a:r>
+              <a:rPr sz="2000" b="1">
+                <a:solidFill>
+                  <a:srgbClr val="202122"/>
+                </a:solidFill>
+                <a:latin typeface="Calibri"/>
+              </a:rPr>
+              <a:t>7</a:t>
+            </a:r>
+          </a:p>
+        </p:txBody>
+      </p:sp>
+      <p:sp>
+        <p:nvSpPr>
+          <p:cNvPr id="32" name="TextBox 31"/>
+          <p:cNvSpPr txBox="1"/>
+          <p:nvPr/>
+        </p:nvSpPr>
+        <p:spPr>
+          <a:xfrm>
+            <a:off x="10175704" y="3162300"/>
+            <a:ext cx="1467350" cy="731520"/>
+          </a:xfrm>
+          <a:prstGeom prst="rect">
+            <a:avLst/>
+          </a:prstGeom>
+          <a:noFill/>
+        </p:spPr>
+        <p:txBody>
+          <a:bodyPr wrap="square" anchor="t" lIns="0" rIns="0" tIns="0" bIns="0"/>
+          <a:lstStyle/>
+          <a:p>
+            <a:pPr algn="ctr"/>
+            <a:r>
+              <a:rPr sz="1600" b="1" i="0">
+                <a:solidFill>
+                  <a:srgbClr val="03306E"/>
+                </a:solidFill>
+                <a:latin typeface="Calibri"/>
+              </a:rPr>
+              <a:t>Release</a:t>
+            </a:r>
+          </a:p>
+        </p:txBody>
+      </p:sp>
+      <p:sp>
+        <p:nvSpPr>
+          <p:cNvPr id="33" name="Rounded Rectangle 32"/>
+          <p:cNvSpPr/>
+          <p:nvPr/>
+        </p:nvSpPr>
+        <p:spPr>
+          <a:xfrm>
+            <a:off x="10175704" y="3939540"/>
+            <a:ext cx="1467350" cy="1447800"/>
+          </a:xfrm>
+          <a:prstGeom prst="roundRect">
+            <a:avLst>
+              <a:gd name="adj" fmla="val 6000"/>
+            </a:avLst>
+          </a:prstGeom>
+          <a:solidFill>
+            <a:srgbClr val="EAF3FF"/>
+          </a:solidFill>
+          <a:ln>
+            <a:noFill/>
+          </a:ln>
+          <a:effectLst/>
+        </p:spPr>
+        <p:style>
+          <a:lnRef idx="1">
+            <a:schemeClr val="accent1"/>
+          </a:lnRef>
+          <a:fillRef idx="3">
+            <a:schemeClr val="accent1"/>
+          </a:fillRef>
+          <a:effectRef idx="2">
+            <a:schemeClr val="accent1"/>
+          </a:effectRef>
+          <a:fontRef idx="minor">
+            <a:schemeClr val="lt1"/>
+          </a:fontRef>
+        </p:style>
+        <p:txBody>
+          <a:bodyPr rtlCol="0" anchor="ctr"/>
+          <a:lstStyle/>
+          <a:p/>
+        </p:txBody>
+      </p:sp>
+      <p:sp>
+        <p:nvSpPr>
+          <p:cNvPr id="34" name="TextBox 33"/>
+          <p:cNvSpPr txBox="1"/>
+          <p:nvPr/>
+        </p:nvSpPr>
+        <p:spPr>
+          <a:xfrm>
+            <a:off x="10312864" y="4076700"/>
+            <a:ext cx="1193030" cy="1173480"/>
+          </a:xfrm>
+          <a:prstGeom prst="rect">
+            <a:avLst/>
+          </a:prstGeom>
+          <a:noFill/>
+        </p:spPr>
+        <p:txBody>
+          <a:bodyPr wrap="square" anchor="t" lIns="0" rIns="0" tIns="0" bIns="0"/>
+          <a:lstStyle/>
+          <a:p>
+            <a:pPr algn="l"/>
+            <a:r>
+              <a:rPr sz="1700" b="0" i="0">
+                <a:solidFill>
+                  <a:srgbClr val="202122"/>
+                </a:solidFill>
+                <a:latin typeface="Calibri"/>
+              </a:rPr>
+              <a:t>Planned or emergency.</a:t>
             </a:r>
           </a:p>
         </p:txBody>
@@ -9366,7 +12414,7 @@
                 </a:solidFill>
                 <a:latin typeface="Cambria"/>
               </a:rPr>
-              <a:t>Answers</a:t>
+              <a:t>Quick check: Software change management</a:t>
             </a:r>
           </a:p>
         </p:txBody>
@@ -9445,8 +12493,8 @@
         </p:nvSpPr>
         <p:spPr>
           <a:xfrm>
-            <a:off x="548640" y="1618488"/>
-            <a:ext cx="411480" cy="411480"/>
+            <a:off x="548640" y="1691640"/>
+            <a:ext cx="502920" cy="502920"/>
           </a:xfrm>
           <a:prstGeom prst="ellipse">
             <a:avLst/>
@@ -9479,7 +12527,7 @@
           <a:p>
             <a:pPr algn="ctr"/>
             <a:r>
-              <a:rPr sz="1400" b="1">
+              <a:rPr sz="1600" b="1">
                 <a:solidFill>
                   <a:srgbClr val="202122"/>
                 </a:solidFill>
@@ -9498,8 +12546,8 @@
         </p:nvSpPr>
         <p:spPr>
           <a:xfrm>
-            <a:off x="1234440" y="1600200"/>
-            <a:ext cx="10408615" cy="1030986"/>
+            <a:off x="1371600" y="1645920"/>
+            <a:ext cx="10271455" cy="1188720"/>
           </a:xfrm>
           <a:prstGeom prst="rect">
             <a:avLst/>
@@ -9512,24 +12560,13 @@
           <a:p>
             <a:pPr algn="l"/>
             <a:r>
-              <a:rPr sz="1800" b="0" i="0">
-                <a:solidFill>
-                  <a:srgbClr val="54595D"/>
-                </a:solidFill>
-                <a:latin typeface="Calibri"/>
-              </a:rPr>
-              <a:t>Fixing a zero-day vulnerability is which type of change?</a:t>
-            </a:r>
-          </a:p>
-          <a:p>
-            <a:r>
-              <a:rPr sz="1800" b="1">
-                <a:solidFill>
-                  <a:srgbClr val="03306E"/>
-                </a:solidFill>
-                <a:latin typeface="Calibri"/>
-              </a:rPr>
-              <a:t>Correcting.</a:t>
+              <a:rPr sz="2400" b="0" i="0">
+                <a:solidFill>
+                  <a:srgbClr val="202122"/>
+                </a:solidFill>
+                <a:latin typeface="Calibri"/>
+              </a:rPr>
+              <a:t>Why regression test a change?</a:t>
             </a:r>
           </a:p>
         </p:txBody>
@@ -9542,8 +12579,8 @@
         </p:nvSpPr>
         <p:spPr>
           <a:xfrm>
-            <a:off x="548640" y="2814066"/>
-            <a:ext cx="411480" cy="411480"/>
+            <a:off x="548640" y="3108960"/>
+            <a:ext cx="502920" cy="502920"/>
           </a:xfrm>
           <a:prstGeom prst="ellipse">
             <a:avLst/>
@@ -9576,7 +12613,7 @@
           <a:p>
             <a:pPr algn="ctr"/>
             <a:r>
-              <a:rPr sz="1400" b="1">
+              <a:rPr sz="1600" b="1">
                 <a:solidFill>
                   <a:srgbClr val="202122"/>
                 </a:solidFill>
@@ -9595,8 +12632,8 @@
         </p:nvSpPr>
         <p:spPr>
           <a:xfrm>
-            <a:off x="1234440" y="2795778"/>
-            <a:ext cx="10408615" cy="1030986"/>
+            <a:off x="1371600" y="3063240"/>
+            <a:ext cx="10271455" cy="1188720"/>
           </a:xfrm>
           <a:prstGeom prst="rect">
             <a:avLst/>
@@ -9609,24 +12646,13 @@
           <a:p>
             <a:pPr algn="l"/>
             <a:r>
-              <a:rPr sz="1800" b="0" i="0">
-                <a:solidFill>
-                  <a:srgbClr val="54595D"/>
-                </a:solidFill>
-                <a:latin typeface="Calibri"/>
-              </a:rPr>
-              <a:t>Why is regression testing part of change management?</a:t>
-            </a:r>
-          </a:p>
-          <a:p>
-            <a:r>
-              <a:rPr sz="1800" b="1">
-                <a:solidFill>
-                  <a:srgbClr val="03306E"/>
-                </a:solidFill>
-                <a:latin typeface="Calibri"/>
-              </a:rPr>
-              <a:t>To make sure the change hasn't broken other features.</a:t>
+              <a:rPr sz="2400" b="0" i="0">
+                <a:solidFill>
+                  <a:srgbClr val="202122"/>
+                </a:solidFill>
+                <a:latin typeface="Calibri"/>
+              </a:rPr>
+              <a:t>Who needs to be told about changes?</a:t>
             </a:r>
           </a:p>
         </p:txBody>
@@ -9639,8 +12665,8 @@
         </p:nvSpPr>
         <p:spPr>
           <a:xfrm>
-            <a:off x="548640" y="4009644"/>
-            <a:ext cx="411480" cy="411480"/>
+            <a:off x="548640" y="4526280"/>
+            <a:ext cx="502920" cy="502920"/>
           </a:xfrm>
           <a:prstGeom prst="ellipse">
             <a:avLst/>
@@ -9673,7 +12699,7 @@
           <a:p>
             <a:pPr algn="ctr"/>
             <a:r>
-              <a:rPr sz="1400" b="1">
+              <a:rPr sz="1600" b="1">
                 <a:solidFill>
                   <a:srgbClr val="202122"/>
                 </a:solidFill>
@@ -9692,8 +12718,8 @@
         </p:nvSpPr>
         <p:spPr>
           <a:xfrm>
-            <a:off x="1234440" y="3991356"/>
-            <a:ext cx="10408615" cy="1030986"/>
+            <a:off x="1371600" y="4480560"/>
+            <a:ext cx="10271455" cy="1188720"/>
           </a:xfrm>
           <a:prstGeom prst="rect">
             <a:avLst/>
@@ -9706,121 +12732,46 @@
           <a:p>
             <a:pPr algn="l"/>
             <a:r>
-              <a:rPr sz="1800" b="0" i="0">
+              <a:rPr sz="2400" b="0" i="0">
+                <a:solidFill>
+                  <a:srgbClr val="202122"/>
+                </a:solidFill>
+                <a:latin typeface="Calibri"/>
+              </a:rPr>
+              <a:t>Can emergency fixes skip documentation?</a:t>
+            </a:r>
+          </a:p>
+        </p:txBody>
+      </p:sp>
+      <p:sp>
+        <p:nvSpPr>
+          <p:cNvPr id="12" name="TextBox 11"/>
+          <p:cNvSpPr txBox="1"/>
+          <p:nvPr/>
+        </p:nvSpPr>
+        <p:spPr>
+          <a:xfrm>
+            <a:off x="548640" y="5852160"/>
+            <a:ext cx="11094415" cy="365760"/>
+          </a:xfrm>
+          <a:prstGeom prst="rect">
+            <a:avLst/>
+          </a:prstGeom>
+          <a:noFill/>
+        </p:spPr>
+        <p:txBody>
+          <a:bodyPr wrap="square" anchor="t" lIns="0" rIns="0" tIns="0" bIns="0"/>
+          <a:lstStyle/>
+          <a:p>
+            <a:pPr algn="l"/>
+            <a:r>
+              <a:rPr sz="1300" b="0" i="1">
                 <a:solidFill>
                   <a:srgbClr val="54595D"/>
                 </a:solidFill>
                 <a:latin typeface="Calibri"/>
               </a:rPr>
-              <a:t>Name two written formats for communicating with users.</a:t>
-            </a:r>
-          </a:p>
-          <a:p>
-            <a:r>
-              <a:rPr sz="1800" b="1">
-                <a:solidFill>
-                  <a:srgbClr val="03306E"/>
-                </a:solidFill>
-                <a:latin typeface="Calibri"/>
-              </a:rPr>
-              <a:t>Any two of: blogs, reports, technical documentation, release notes, user guides, FAQs.</a:t>
-            </a:r>
-          </a:p>
-        </p:txBody>
-      </p:sp>
-      <p:sp>
-        <p:nvSpPr>
-          <p:cNvPr id="12" name="Oval 11"/>
-          <p:cNvSpPr/>
-          <p:nvPr/>
-        </p:nvSpPr>
-        <p:spPr>
-          <a:xfrm>
-            <a:off x="548640" y="5205221"/>
-            <a:ext cx="411480" cy="411480"/>
-          </a:xfrm>
-          <a:prstGeom prst="ellipse">
-            <a:avLst/>
-          </a:prstGeom>
-          <a:solidFill>
-            <a:srgbClr val="33C17A"/>
-          </a:solidFill>
-          <a:ln>
-            <a:noFill/>
-          </a:ln>
-          <a:effectLst/>
-        </p:spPr>
-        <p:style>
-          <a:lnRef idx="1">
-            <a:schemeClr val="accent1"/>
-          </a:lnRef>
-          <a:fillRef idx="3">
-            <a:schemeClr val="accent1"/>
-          </a:fillRef>
-          <a:effectRef idx="2">
-            <a:schemeClr val="accent1"/>
-          </a:effectRef>
-          <a:fontRef idx="minor">
-            <a:schemeClr val="lt1"/>
-          </a:fontRef>
-        </p:style>
-        <p:txBody>
-          <a:bodyPr rtlCol="0" anchor="ctr" lIns="0" rIns="0" tIns="0" bIns="0"/>
-          <a:lstStyle/>
-          <a:p>
-            <a:pPr algn="ctr"/>
-            <a:r>
-              <a:rPr sz="1400" b="1">
-                <a:solidFill>
-                  <a:srgbClr val="202122"/>
-                </a:solidFill>
-                <a:latin typeface="Calibri"/>
-              </a:rPr>
-              <a:t>4</a:t>
-            </a:r>
-          </a:p>
-        </p:txBody>
-      </p:sp>
-      <p:sp>
-        <p:nvSpPr>
-          <p:cNvPr id="13" name="TextBox 12"/>
-          <p:cNvSpPr txBox="1"/>
-          <p:nvPr/>
-        </p:nvSpPr>
-        <p:spPr>
-          <a:xfrm>
-            <a:off x="1234440" y="5186933"/>
-            <a:ext cx="10408615" cy="1030986"/>
-          </a:xfrm>
-          <a:prstGeom prst="rect">
-            <a:avLst/>
-          </a:prstGeom>
-          <a:noFill/>
-        </p:spPr>
-        <p:txBody>
-          <a:bodyPr wrap="square" anchor="t" lIns="0" rIns="0" tIns="0" bIns="0"/>
-          <a:lstStyle/>
-          <a:p>
-            <a:pPr algn="l"/>
-            <a:r>
-              <a:rPr sz="1800" b="0" i="0">
-                <a:solidFill>
-                  <a:srgbClr val="54595D"/>
-                </a:solidFill>
-                <a:latin typeface="Calibri"/>
-              </a:rPr>
-              <a:t>What is the first step in resolving a user issue?</a:t>
-            </a:r>
-          </a:p>
-          <a:p>
-            <a:r>
-              <a:rPr sz="1800" b="1">
-                <a:solidFill>
-                  <a:srgbClr val="03306E"/>
-                </a:solidFill>
-                <a:latin typeface="Calibri"/>
-              </a:rPr>
-              <a:t>Identify or replicate it.</a:t>
+              <a:t>Answer on mini whiteboards or in your book. Answers are in the speaker notes.</a:t>
             </a:r>
           </a:p>
         </p:txBody>
@@ -9912,7 +12863,7 @@
                 </a:solidFill>
                 <a:latin typeface="Cambria"/>
               </a:rPr>
-              <a:t>Activity: Release notes and support</a:t>
+              <a:t>Maintaining code and supporting users</a:t>
             </a:r>
           </a:p>
         </p:txBody>
@@ -9991,16 +12942,16 @@
         </p:nvSpPr>
         <p:spPr>
           <a:xfrm>
-            <a:off x="548640" y="1508760"/>
-            <a:ext cx="2011680" cy="457200"/>
+            <a:off x="548640" y="1600200"/>
+            <a:ext cx="5364327" cy="640080"/>
           </a:xfrm>
           <a:prstGeom prst="roundRect">
             <a:avLst>
-              <a:gd name="adj" fmla="val 50000"/>
+              <a:gd name="adj" fmla="val 15000"/>
             </a:avLst>
           </a:prstGeom>
           <a:solidFill>
-            <a:srgbClr val="33C17A"/>
+            <a:srgbClr val="03306E"/>
           </a:solidFill>
           <a:ln>
             <a:noFill/>
@@ -10035,8 +12986,8 @@
         </p:nvSpPr>
         <p:spPr>
           <a:xfrm>
-            <a:off x="548640" y="1508760"/>
-            <a:ext cx="2011680" cy="457200"/>
+            <a:off x="777240" y="1600200"/>
+            <a:ext cx="4907127" cy="640080"/>
           </a:xfrm>
           <a:prstGeom prst="rect">
             <a:avLst/>
@@ -10047,65 +12998,206 @@
           <a:bodyPr wrap="square" anchor="ctr" lIns="0" rIns="0" tIns="0" bIns="0"/>
           <a:lstStyle/>
           <a:p>
-            <a:pPr algn="ctr"/>
-            <a:r>
-              <a:rPr sz="1400" b="1" i="0">
+            <a:pPr algn="l"/>
+            <a:r>
+              <a:rPr sz="2000" b="1" i="0">
+                <a:solidFill>
+                  <a:srgbClr val="FFFFFF"/>
+                </a:solidFill>
+                <a:latin typeface="Calibri"/>
+              </a:rPr>
+              <a:t>Maintaining code in a team</a:t>
+            </a:r>
+          </a:p>
+        </p:txBody>
+      </p:sp>
+      <p:sp>
+        <p:nvSpPr>
+          <p:cNvPr id="8" name="Rounded Rectangle 7"/>
+          <p:cNvSpPr/>
+          <p:nvPr/>
+        </p:nvSpPr>
+        <p:spPr>
+          <a:xfrm>
+            <a:off x="548640" y="2377440"/>
+            <a:ext cx="5364327" cy="3794760"/>
+          </a:xfrm>
+          <a:prstGeom prst="roundRect">
+            <a:avLst>
+              <a:gd name="adj" fmla="val 4000"/>
+            </a:avLst>
+          </a:prstGeom>
+          <a:solidFill>
+            <a:srgbClr val="EAF3FF"/>
+          </a:solidFill>
+          <a:ln>
+            <a:noFill/>
+          </a:ln>
+          <a:effectLst/>
+        </p:spPr>
+        <p:style>
+          <a:lnRef idx="1">
+            <a:schemeClr val="accent1"/>
+          </a:lnRef>
+          <a:fillRef idx="3">
+            <a:schemeClr val="accent1"/>
+          </a:fillRef>
+          <a:effectRef idx="2">
+            <a:schemeClr val="accent1"/>
+          </a:effectRef>
+          <a:fontRef idx="minor">
+            <a:schemeClr val="lt1"/>
+          </a:fontRef>
+        </p:style>
+        <p:txBody>
+          <a:bodyPr rtlCol="0" anchor="ctr"/>
+          <a:lstStyle/>
+          <a:p/>
+        </p:txBody>
+      </p:sp>
+      <p:sp>
+        <p:nvSpPr>
+          <p:cNvPr id="9" name="TextBox 8"/>
+          <p:cNvSpPr txBox="1"/>
+          <p:nvPr/>
+        </p:nvSpPr>
+        <p:spPr>
+          <a:xfrm>
+            <a:off x="822959" y="2606040"/>
+            <a:ext cx="4815687" cy="3337560"/>
+          </a:xfrm>
+          <a:prstGeom prst="rect">
+            <a:avLst/>
+          </a:prstGeom>
+          <a:noFill/>
+        </p:spPr>
+        <p:txBody>
+          <a:bodyPr wrap="square" lIns="0" rIns="0" tIns="0" bIns="0">
+            <a:spAutoFit/>
+          </a:bodyPr>
+          <a:lstStyle/>
+          <a:p>
+            <a:pPr marL="274320" indent="-274320">
+              <a:spcAft>
+                <a:spcPts val="990"/>
+              </a:spcAft>
+              <a:buClr>
+                <a:srgbClr val="0645AD"/>
+              </a:buClr>
+              <a:buFont typeface="Arial"/>
+              <a:buChar char="•"/>
+            </a:pPr>
+            <a:r>
+              <a:rPr sz="2200" b="0">
                 <a:solidFill>
                   <a:srgbClr val="202122"/>
                 </a:solidFill>
                 <a:latin typeface="Calibri"/>
               </a:rPr>
-              <a:t>30 minutes</a:t>
-            </a:r>
-          </a:p>
-        </p:txBody>
-      </p:sp>
-      <p:sp>
-        <p:nvSpPr>
-          <p:cNvPr id="8" name="TextBox 7"/>
-          <p:cNvSpPr txBox="1"/>
-          <p:nvPr/>
-        </p:nvSpPr>
-        <p:spPr>
-          <a:xfrm>
-            <a:off x="2743200" y="1508760"/>
-            <a:ext cx="4754880" cy="457200"/>
-          </a:xfrm>
-          <a:prstGeom prst="rect">
-            <a:avLst/>
-          </a:prstGeom>
-          <a:noFill/>
-        </p:spPr>
-        <p:txBody>
-          <a:bodyPr wrap="square" anchor="ctr" lIns="0" rIns="0" tIns="0" bIns="0"/>
-          <a:lstStyle/>
-          <a:p>
-            <a:pPr algn="l"/>
-            <a:r>
-              <a:rPr sz="1400" b="0" i="1">
-                <a:solidFill>
-                  <a:srgbClr val="54595D"/>
-                </a:solidFill>
-                <a:latin typeface="Calibri"/>
-              </a:rPr>
-              <a:t>Pairs</a:t>
-            </a:r>
-          </a:p>
-        </p:txBody>
-      </p:sp>
-      <p:sp>
-        <p:nvSpPr>
-          <p:cNvPr id="9" name="Oval 8"/>
+              <a:t>Separate code into modules</a:t>
+            </a:r>
+          </a:p>
+          <a:p>
+            <a:pPr marL="274320" indent="-274320">
+              <a:spcAft>
+                <a:spcPts val="990"/>
+              </a:spcAft>
+              <a:buClr>
+                <a:srgbClr val="0645AD"/>
+              </a:buClr>
+              <a:buFont typeface="Arial"/>
+              <a:buChar char="•"/>
+            </a:pPr>
+            <a:r>
+              <a:rPr sz="2200" b="0">
+                <a:solidFill>
+                  <a:srgbClr val="202122"/>
+                </a:solidFill>
+                <a:latin typeface="Calibri"/>
+              </a:rPr>
+              <a:t>Write readable code</a:t>
+            </a:r>
+          </a:p>
+          <a:p>
+            <a:pPr marL="274320" indent="-274320">
+              <a:spcAft>
+                <a:spcPts val="990"/>
+              </a:spcAft>
+              <a:buClr>
+                <a:srgbClr val="0645AD"/>
+              </a:buClr>
+              <a:buFont typeface="Arial"/>
+              <a:buChar char="•"/>
+            </a:pPr>
+            <a:r>
+              <a:rPr sz="2200" b="0">
+                <a:solidFill>
+                  <a:srgbClr val="202122"/>
+                </a:solidFill>
+                <a:latin typeface="Calibri"/>
+              </a:rPr>
+              <a:t>Follow agreed conventions</a:t>
+            </a:r>
+          </a:p>
+          <a:p>
+            <a:pPr marL="274320" indent="-274320">
+              <a:spcAft>
+                <a:spcPts val="990"/>
+              </a:spcAft>
+              <a:buClr>
+                <a:srgbClr val="0645AD"/>
+              </a:buClr>
+              <a:buFont typeface="Arial"/>
+              <a:buChar char="•"/>
+            </a:pPr>
+            <a:r>
+              <a:rPr sz="2200" b="0">
+                <a:solidFill>
+                  <a:srgbClr val="202122"/>
+                </a:solidFill>
+                <a:latin typeface="Calibri"/>
+              </a:rPr>
+              <a:t>Comment helpfully</a:t>
+            </a:r>
+          </a:p>
+          <a:p>
+            <a:pPr marL="274320" indent="-274320">
+              <a:spcAft>
+                <a:spcPts val="990"/>
+              </a:spcAft>
+              <a:buClr>
+                <a:srgbClr val="0645AD"/>
+              </a:buClr>
+              <a:buFont typeface="Arial"/>
+              <a:buChar char="•"/>
+            </a:pPr>
+            <a:r>
+              <a:rPr sz="2200" b="0">
+                <a:solidFill>
+                  <a:srgbClr val="202122"/>
+                </a:solidFill>
+                <a:latin typeface="Calibri"/>
+              </a:rPr>
+              <a:t>Keep change logs up to date</a:t>
+            </a:r>
+          </a:p>
+        </p:txBody>
+      </p:sp>
+      <p:sp>
+        <p:nvSpPr>
+          <p:cNvPr id="10" name="Rounded Rectangle 9"/>
           <p:cNvSpPr/>
           <p:nvPr/>
         </p:nvSpPr>
         <p:spPr>
           <a:xfrm>
-            <a:off x="548640" y="2482596"/>
-            <a:ext cx="384048" cy="384048"/>
-          </a:xfrm>
-          <a:prstGeom prst="ellipse">
-            <a:avLst/>
+            <a:off x="6278727" y="1600200"/>
+            <a:ext cx="5364327" cy="640080"/>
+          </a:xfrm>
+          <a:prstGeom prst="roundRect">
+            <a:avLst>
+              <a:gd name="adj" fmla="val 15000"/>
+            </a:avLst>
           </a:prstGeom>
           <a:solidFill>
             <a:srgbClr val="0645AD"/>
@@ -10130,327 +13222,58 @@
           </a:fontRef>
         </p:style>
         <p:txBody>
-          <a:bodyPr rtlCol="0" anchor="ctr" lIns="0" rIns="0" tIns="0" bIns="0"/>
-          <a:lstStyle/>
-          <a:p>
-            <a:pPr algn="ctr"/>
-            <a:r>
-              <a:rPr sz="1300" b="1">
+          <a:bodyPr rtlCol="0" anchor="ctr"/>
+          <a:lstStyle/>
+          <a:p/>
+        </p:txBody>
+      </p:sp>
+      <p:sp>
+        <p:nvSpPr>
+          <p:cNvPr id="11" name="TextBox 10"/>
+          <p:cNvSpPr txBox="1"/>
+          <p:nvPr/>
+        </p:nvSpPr>
+        <p:spPr>
+          <a:xfrm>
+            <a:off x="6507327" y="1600200"/>
+            <a:ext cx="4907127" cy="640080"/>
+          </a:xfrm>
+          <a:prstGeom prst="rect">
+            <a:avLst/>
+          </a:prstGeom>
+          <a:noFill/>
+        </p:spPr>
+        <p:txBody>
+          <a:bodyPr wrap="square" anchor="ctr" lIns="0" rIns="0" tIns="0" bIns="0"/>
+          <a:lstStyle/>
+          <a:p>
+            <a:pPr algn="l"/>
+            <a:r>
+              <a:rPr sz="2000" b="1" i="0">
                 <a:solidFill>
                   <a:srgbClr val="FFFFFF"/>
                 </a:solidFill>
                 <a:latin typeface="Calibri"/>
               </a:rPr>
-              <a:t>1</a:t>
-            </a:r>
-          </a:p>
-        </p:txBody>
-      </p:sp>
-      <p:sp>
-        <p:nvSpPr>
-          <p:cNvPr id="10" name="TextBox 9"/>
-          <p:cNvSpPr txBox="1"/>
-          <p:nvPr/>
-        </p:nvSpPr>
-        <p:spPr>
-          <a:xfrm>
-            <a:off x="1143000" y="2240280"/>
-            <a:ext cx="5943600" cy="868680"/>
-          </a:xfrm>
-          <a:prstGeom prst="rect">
-            <a:avLst/>
-          </a:prstGeom>
-          <a:noFill/>
-        </p:spPr>
-        <p:txBody>
-          <a:bodyPr wrap="square" anchor="ctr" lIns="0" rIns="0" tIns="0" bIns="0"/>
-          <a:lstStyle/>
-          <a:p>
-            <a:pPr algn="l"/>
-            <a:r>
-              <a:rPr sz="1700" b="0" i="0">
-                <a:solidFill>
-                  <a:srgbClr val="202122"/>
-                </a:solidFill>
-                <a:latin typeface="Calibri"/>
-              </a:rPr>
-              <a:t>Your teacher gives you a bug report and a code change.</a:t>
-            </a:r>
-          </a:p>
-        </p:txBody>
-      </p:sp>
-      <p:sp>
-        <p:nvSpPr>
-          <p:cNvPr id="11" name="Oval 10"/>
+              <a:t>Communicating with users</a:t>
+            </a:r>
+          </a:p>
+        </p:txBody>
+      </p:sp>
+      <p:sp>
+        <p:nvSpPr>
+          <p:cNvPr id="12" name="Rounded Rectangle 11"/>
           <p:cNvSpPr/>
           <p:nvPr/>
         </p:nvSpPr>
         <p:spPr>
           <a:xfrm>
-            <a:off x="548640" y="3461004"/>
-            <a:ext cx="384048" cy="384048"/>
-          </a:xfrm>
-          <a:prstGeom prst="ellipse">
-            <a:avLst/>
-          </a:prstGeom>
-          <a:solidFill>
-            <a:srgbClr val="0645AD"/>
-          </a:solidFill>
-          <a:ln>
-            <a:noFill/>
-          </a:ln>
-          <a:effectLst/>
-        </p:spPr>
-        <p:style>
-          <a:lnRef idx="1">
-            <a:schemeClr val="accent1"/>
-          </a:lnRef>
-          <a:fillRef idx="3">
-            <a:schemeClr val="accent1"/>
-          </a:fillRef>
-          <a:effectRef idx="2">
-            <a:schemeClr val="accent1"/>
-          </a:effectRef>
-          <a:fontRef idx="minor">
-            <a:schemeClr val="lt1"/>
-          </a:fontRef>
-        </p:style>
-        <p:txBody>
-          <a:bodyPr rtlCol="0" anchor="ctr" lIns="0" rIns="0" tIns="0" bIns="0"/>
-          <a:lstStyle/>
-          <a:p>
-            <a:pPr algn="ctr"/>
-            <a:r>
-              <a:rPr sz="1300" b="1">
-                <a:solidFill>
-                  <a:srgbClr val="FFFFFF"/>
-                </a:solidFill>
-                <a:latin typeface="Calibri"/>
-              </a:rPr>
-              <a:t>2</a:t>
-            </a:r>
-          </a:p>
-        </p:txBody>
-      </p:sp>
-      <p:sp>
-        <p:nvSpPr>
-          <p:cNvPr id="12" name="TextBox 11"/>
-          <p:cNvSpPr txBox="1"/>
-          <p:nvPr/>
-        </p:nvSpPr>
-        <p:spPr>
-          <a:xfrm>
-            <a:off x="1143000" y="3218688"/>
-            <a:ext cx="5943600" cy="868680"/>
-          </a:xfrm>
-          <a:prstGeom prst="rect">
-            <a:avLst/>
-          </a:prstGeom>
-          <a:noFill/>
-        </p:spPr>
-        <p:txBody>
-          <a:bodyPr wrap="square" anchor="ctr" lIns="0" rIns="0" tIns="0" bIns="0"/>
-          <a:lstStyle/>
-          <a:p>
-            <a:pPr algn="l"/>
-            <a:r>
-              <a:rPr sz="1700" b="0" i="0">
-                <a:solidFill>
-                  <a:srgbClr val="202122"/>
-                </a:solidFill>
-                <a:latin typeface="Calibri"/>
-              </a:rPr>
-              <a:t>Replicate the bug, fix it and add a change log entry.</a:t>
-            </a:r>
-          </a:p>
-        </p:txBody>
-      </p:sp>
-      <p:sp>
-        <p:nvSpPr>
-          <p:cNvPr id="13" name="Oval 12"/>
-          <p:cNvSpPr/>
-          <p:nvPr/>
-        </p:nvSpPr>
-        <p:spPr>
-          <a:xfrm>
-            <a:off x="548640" y="4439412"/>
-            <a:ext cx="384048" cy="384048"/>
-          </a:xfrm>
-          <a:prstGeom prst="ellipse">
-            <a:avLst/>
-          </a:prstGeom>
-          <a:solidFill>
-            <a:srgbClr val="0645AD"/>
-          </a:solidFill>
-          <a:ln>
-            <a:noFill/>
-          </a:ln>
-          <a:effectLst/>
-        </p:spPr>
-        <p:style>
-          <a:lnRef idx="1">
-            <a:schemeClr val="accent1"/>
-          </a:lnRef>
-          <a:fillRef idx="3">
-            <a:schemeClr val="accent1"/>
-          </a:fillRef>
-          <a:effectRef idx="2">
-            <a:schemeClr val="accent1"/>
-          </a:effectRef>
-          <a:fontRef idx="minor">
-            <a:schemeClr val="lt1"/>
-          </a:fontRef>
-        </p:style>
-        <p:txBody>
-          <a:bodyPr rtlCol="0" anchor="ctr" lIns="0" rIns="0" tIns="0" bIns="0"/>
-          <a:lstStyle/>
-          <a:p>
-            <a:pPr algn="ctr"/>
-            <a:r>
-              <a:rPr sz="1300" b="1">
-                <a:solidFill>
-                  <a:srgbClr val="FFFFFF"/>
-                </a:solidFill>
-                <a:latin typeface="Calibri"/>
-              </a:rPr>
-              <a:t>3</a:t>
-            </a:r>
-          </a:p>
-        </p:txBody>
-      </p:sp>
-      <p:sp>
-        <p:nvSpPr>
-          <p:cNvPr id="14" name="TextBox 13"/>
-          <p:cNvSpPr txBox="1"/>
-          <p:nvPr/>
-        </p:nvSpPr>
-        <p:spPr>
-          <a:xfrm>
-            <a:off x="1143000" y="4197096"/>
-            <a:ext cx="5943600" cy="868680"/>
-          </a:xfrm>
-          <a:prstGeom prst="rect">
-            <a:avLst/>
-          </a:prstGeom>
-          <a:noFill/>
-        </p:spPr>
-        <p:txBody>
-          <a:bodyPr wrap="square" anchor="ctr" lIns="0" rIns="0" tIns="0" bIns="0"/>
-          <a:lstStyle/>
-          <a:p>
-            <a:pPr algn="l"/>
-            <a:r>
-              <a:rPr sz="1700" b="0" i="0">
-                <a:solidFill>
-                  <a:srgbClr val="202122"/>
-                </a:solidFill>
-                <a:latin typeface="Calibri"/>
-              </a:rPr>
-              <a:t>Write release notes for non-technical users.</a:t>
-            </a:r>
-          </a:p>
-        </p:txBody>
-      </p:sp>
-      <p:sp>
-        <p:nvSpPr>
-          <p:cNvPr id="15" name="Oval 14"/>
-          <p:cNvSpPr/>
-          <p:nvPr/>
-        </p:nvSpPr>
-        <p:spPr>
-          <a:xfrm>
-            <a:off x="548640" y="5417820"/>
-            <a:ext cx="384048" cy="384048"/>
-          </a:xfrm>
-          <a:prstGeom prst="ellipse">
-            <a:avLst/>
-          </a:prstGeom>
-          <a:solidFill>
-            <a:srgbClr val="0645AD"/>
-          </a:solidFill>
-          <a:ln>
-            <a:noFill/>
-          </a:ln>
-          <a:effectLst/>
-        </p:spPr>
-        <p:style>
-          <a:lnRef idx="1">
-            <a:schemeClr val="accent1"/>
-          </a:lnRef>
-          <a:fillRef idx="3">
-            <a:schemeClr val="accent1"/>
-          </a:fillRef>
-          <a:effectRef idx="2">
-            <a:schemeClr val="accent1"/>
-          </a:effectRef>
-          <a:fontRef idx="minor">
-            <a:schemeClr val="lt1"/>
-          </a:fontRef>
-        </p:style>
-        <p:txBody>
-          <a:bodyPr rtlCol="0" anchor="ctr" lIns="0" rIns="0" tIns="0" bIns="0"/>
-          <a:lstStyle/>
-          <a:p>
-            <a:pPr algn="ctr"/>
-            <a:r>
-              <a:rPr sz="1300" b="1">
-                <a:solidFill>
-                  <a:srgbClr val="FFFFFF"/>
-                </a:solidFill>
-                <a:latin typeface="Calibri"/>
-              </a:rPr>
-              <a:t>4</a:t>
-            </a:r>
-          </a:p>
-        </p:txBody>
-      </p:sp>
-      <p:sp>
-        <p:nvSpPr>
-          <p:cNvPr id="16" name="TextBox 15"/>
-          <p:cNvSpPr txBox="1"/>
-          <p:nvPr/>
-        </p:nvSpPr>
-        <p:spPr>
-          <a:xfrm>
-            <a:off x="1143000" y="5175504"/>
-            <a:ext cx="5943600" cy="868680"/>
-          </a:xfrm>
-          <a:prstGeom prst="rect">
-            <a:avLst/>
-          </a:prstGeom>
-          <a:noFill/>
-        </p:spPr>
-        <p:txBody>
-          <a:bodyPr wrap="square" anchor="ctr" lIns="0" rIns="0" tIns="0" bIns="0"/>
-          <a:lstStyle/>
-          <a:p>
-            <a:pPr algn="l"/>
-            <a:r>
-              <a:rPr sz="1700" b="0" i="0">
-                <a:solidFill>
-                  <a:srgbClr val="202122"/>
-                </a:solidFill>
-                <a:latin typeface="Calibri"/>
-              </a:rPr>
-              <a:t>Write a short technical note for other developers.</a:t>
-            </a:r>
-          </a:p>
-        </p:txBody>
-      </p:sp>
-      <p:sp>
-        <p:nvSpPr>
-          <p:cNvPr id="17" name="Rounded Rectangle 16"/>
-          <p:cNvSpPr/>
-          <p:nvPr/>
-        </p:nvSpPr>
-        <p:spPr>
-          <a:xfrm>
-            <a:off x="7772400" y="1508760"/>
-            <a:ext cx="3867912" cy="4572000"/>
+            <a:off x="6278727" y="2377440"/>
+            <a:ext cx="5364327" cy="3794760"/>
           </a:xfrm>
           <a:prstGeom prst="roundRect">
             <a:avLst>
-              <a:gd name="adj" fmla="val 8000"/>
+              <a:gd name="adj" fmla="val 4000"/>
             </a:avLst>
           </a:prstGeom>
           <a:solidFill>
@@ -10483,47 +13306,14 @@
       </p:sp>
       <p:sp>
         <p:nvSpPr>
-          <p:cNvPr id="18" name="TextBox 17"/>
-          <p:cNvSpPr txBox="1"/>
-          <p:nvPr/>
-        </p:nvSpPr>
-        <p:spPr>
-          <a:xfrm>
-            <a:off x="8046720" y="1737360"/>
-            <a:ext cx="3291840" cy="365760"/>
-          </a:xfrm>
-          <a:prstGeom prst="rect">
-            <a:avLst/>
-          </a:prstGeom>
-          <a:noFill/>
-        </p:spPr>
-        <p:txBody>
-          <a:bodyPr wrap="square" anchor="t" lIns="0" rIns="0" tIns="0" bIns="0"/>
-          <a:lstStyle/>
-          <a:p>
-            <a:pPr algn="l"/>
-            <a:r>
-              <a:rPr sz="1300" b="1" i="0">
-                <a:solidFill>
-                  <a:srgbClr val="0645AD"/>
-                </a:solidFill>
-                <a:latin typeface="Calibri"/>
-              </a:rPr>
-              <a:t>SUCCESS CRITERIA</a:t>
-            </a:r>
-          </a:p>
-        </p:txBody>
-      </p:sp>
-      <p:sp>
-        <p:nvSpPr>
-          <p:cNvPr id="19" name="TextBox 18"/>
-          <p:cNvSpPr txBox="1"/>
-          <p:nvPr/>
-        </p:nvSpPr>
-        <p:spPr>
-          <a:xfrm>
-            <a:off x="8046720" y="2240280"/>
-            <a:ext cx="3337560" cy="3657600"/>
+          <p:cNvPr id="13" name="TextBox 12"/>
+          <p:cNvSpPr txBox="1"/>
+          <p:nvPr/>
+        </p:nvSpPr>
+        <p:spPr>
+          <a:xfrm>
+            <a:off x="6553047" y="2606040"/>
+            <a:ext cx="4815687" cy="3337560"/>
           </a:xfrm>
           <a:prstGeom prst="rect">
             <a:avLst/>
@@ -10538,7 +13328,7 @@
           <a:p>
             <a:pPr marL="274320" indent="-274320">
               <a:spcAft>
-                <a:spcPts val="810"/>
+                <a:spcPts val="990"/>
               </a:spcAft>
               <a:buClr>
                 <a:srgbClr val="0645AD"/>
@@ -10547,19 +13337,19 @@
               <a:buChar char="•"/>
             </a:pPr>
             <a:r>
-              <a:rPr sz="1800" b="0">
+              <a:rPr sz="2200" b="0">
                 <a:solidFill>
                   <a:srgbClr val="202122"/>
                 </a:solidFill>
                 <a:latin typeface="Calibri"/>
               </a:rPr>
-              <a:t>Bug replicated before fixing</a:t>
+              <a:t>Face to face and remote calls</a:t>
             </a:r>
           </a:p>
           <a:p>
             <a:pPr marL="274320" indent="-274320">
               <a:spcAft>
-                <a:spcPts val="810"/>
+                <a:spcPts val="990"/>
               </a:spcAft>
               <a:buClr>
                 <a:srgbClr val="0645AD"/>
@@ -10568,19 +13358,19 @@
               <a:buChar char="•"/>
             </a:pPr>
             <a:r>
-              <a:rPr sz="1800" b="0">
+              <a:rPr sz="2200" b="0">
                 <a:solidFill>
                   <a:srgbClr val="202122"/>
                 </a:solidFill>
                 <a:latin typeface="Calibri"/>
               </a:rPr>
-              <a:t>Change log is clear</a:t>
+              <a:t>Blogs, reports, release notes, guides, FAQs</a:t>
             </a:r>
           </a:p>
           <a:p>
             <a:pPr marL="274320" indent="-274320">
               <a:spcAft>
-                <a:spcPts val="810"/>
+                <a:spcPts val="990"/>
               </a:spcAft>
               <a:buClr>
                 <a:srgbClr val="0645AD"/>
@@ -10589,13 +13379,34 @@
               <a:buChar char="•"/>
             </a:pPr>
             <a:r>
-              <a:rPr sz="1800" b="0">
+              <a:rPr sz="2200" b="0">
                 <a:solidFill>
                   <a:srgbClr val="202122"/>
                 </a:solidFill>
                 <a:latin typeface="Calibri"/>
               </a:rPr>
-              <a:t>Tone matches each audience</a:t>
+              <a:t>Demonstrations, screencasts, narration</a:t>
+            </a:r>
+          </a:p>
+          <a:p>
+            <a:pPr marL="274320" indent="-274320">
+              <a:spcAft>
+                <a:spcPts val="990"/>
+              </a:spcAft>
+              <a:buClr>
+                <a:srgbClr val="0645AD"/>
+              </a:buClr>
+              <a:buFont typeface="Arial"/>
+              <a:buChar char="•"/>
+            </a:pPr>
+            <a:r>
+              <a:rPr sz="2200" b="0">
+                <a:solidFill>
+                  <a:srgbClr val="202122"/>
+                </a:solidFill>
+                <a:latin typeface="Calibri"/>
+              </a:rPr>
+              <a:t>Machine-readable API contracts</a:t>
             </a:r>
           </a:p>
         </p:txBody>
